--- a/Documentation/Corp Architecture Overview.pptx
+++ b/Documentation/Corp Architecture Overview.pptx
@@ -6,9 +6,10 @@
   </p:sldMasterIdLst>
   <p:sldIdLst>
     <p:sldId id="256" r:id="rId2"/>
-    <p:sldId id="258" r:id="rId3"/>
-    <p:sldId id="259" r:id="rId4"/>
-    <p:sldId id="260" r:id="rId5"/>
+    <p:sldId id="261" r:id="rId3"/>
+    <p:sldId id="258" r:id="rId4"/>
+    <p:sldId id="259" r:id="rId5"/>
+    <p:sldId id="260" r:id="rId6"/>
   </p:sldIdLst>
   <p:sldSz cx="12192000" cy="6858000"/>
   <p:notesSz cx="6858000" cy="9144000"/>
@@ -107,6 +108,11 @@
       </a:defRPr>
     </a:lvl9pPr>
   </p:defaultTextStyle>
+  <p:extLst>
+    <p:ext uri="{EFAFB233-063F-42B5-8137-9DF3F51BA10A}">
+      <p15:sldGuideLst xmlns:p15="http://schemas.microsoft.com/office/powerpoint/2012/main"/>
+    </p:ext>
+  </p:extLst>
 </p:presentation>
 </file>
 
@@ -259,7 +265,7 @@
           <a:p>
             <a:fld id="{08306F49-376E-45A5-AD65-FD4D759E20F3}" type="datetimeFigureOut">
               <a:rPr lang="en-AU" smtClean="0"/>
-              <a:t>14/08/2026</a:t>
+              <a:t>17/08/2026</a:t>
             </a:fld>
             <a:endParaRPr lang="en-AU"/>
           </a:p>
@@ -459,7 +465,7 @@
           <a:p>
             <a:fld id="{08306F49-376E-45A5-AD65-FD4D759E20F3}" type="datetimeFigureOut">
               <a:rPr lang="en-AU" smtClean="0"/>
-              <a:t>14/08/2026</a:t>
+              <a:t>17/08/2026</a:t>
             </a:fld>
             <a:endParaRPr lang="en-AU"/>
           </a:p>
@@ -669,7 +675,7 @@
           <a:p>
             <a:fld id="{08306F49-376E-45A5-AD65-FD4D759E20F3}" type="datetimeFigureOut">
               <a:rPr lang="en-AU" smtClean="0"/>
-              <a:t>14/08/2026</a:t>
+              <a:t>17/08/2026</a:t>
             </a:fld>
             <a:endParaRPr lang="en-AU"/>
           </a:p>
@@ -879,7 +885,7 @@
           <a:p>
             <a:fld id="{08306F49-376E-45A5-AD65-FD4D759E20F3}" type="datetimeFigureOut">
               <a:rPr lang="en-AU" smtClean="0"/>
-              <a:t>14/08/2026</a:t>
+              <a:t>17/08/2026</a:t>
             </a:fld>
             <a:endParaRPr lang="en-AU"/>
           </a:p>
@@ -1171,7 +1177,7 @@
           <a:p>
             <a:fld id="{08306F49-376E-45A5-AD65-FD4D759E20F3}" type="datetimeFigureOut">
               <a:rPr lang="en-AU" smtClean="0"/>
-              <a:t>14/08/2026</a:t>
+              <a:t>17/08/2026</a:t>
             </a:fld>
             <a:endParaRPr lang="en-AU"/>
           </a:p>
@@ -1439,7 +1445,7 @@
           <a:p>
             <a:fld id="{08306F49-376E-45A5-AD65-FD4D759E20F3}" type="datetimeFigureOut">
               <a:rPr lang="en-AU" smtClean="0"/>
-              <a:t>14/08/2026</a:t>
+              <a:t>17/08/2026</a:t>
             </a:fld>
             <a:endParaRPr lang="en-AU"/>
           </a:p>
@@ -1854,7 +1860,7 @@
           <a:p>
             <a:fld id="{08306F49-376E-45A5-AD65-FD4D759E20F3}" type="datetimeFigureOut">
               <a:rPr lang="en-AU" smtClean="0"/>
-              <a:t>14/08/2026</a:t>
+              <a:t>17/08/2026</a:t>
             </a:fld>
             <a:endParaRPr lang="en-AU"/>
           </a:p>
@@ -1996,7 +2002,7 @@
           <a:p>
             <a:fld id="{08306F49-376E-45A5-AD65-FD4D759E20F3}" type="datetimeFigureOut">
               <a:rPr lang="en-AU" smtClean="0"/>
-              <a:t>14/08/2026</a:t>
+              <a:t>17/08/2026</a:t>
             </a:fld>
             <a:endParaRPr lang="en-AU"/>
           </a:p>
@@ -2109,7 +2115,7 @@
           <a:p>
             <a:fld id="{08306F49-376E-45A5-AD65-FD4D759E20F3}" type="datetimeFigureOut">
               <a:rPr lang="en-AU" smtClean="0"/>
-              <a:t>14/08/2026</a:t>
+              <a:t>17/08/2026</a:t>
             </a:fld>
             <a:endParaRPr lang="en-AU"/>
           </a:p>
@@ -2422,7 +2428,7 @@
           <a:p>
             <a:fld id="{08306F49-376E-45A5-AD65-FD4D759E20F3}" type="datetimeFigureOut">
               <a:rPr lang="en-AU" smtClean="0"/>
-              <a:t>14/08/2026</a:t>
+              <a:t>17/08/2026</a:t>
             </a:fld>
             <a:endParaRPr lang="en-AU"/>
           </a:p>
@@ -2711,7 +2717,7 @@
           <a:p>
             <a:fld id="{08306F49-376E-45A5-AD65-FD4D759E20F3}" type="datetimeFigureOut">
               <a:rPr lang="en-AU" smtClean="0"/>
-              <a:t>14/08/2026</a:t>
+              <a:t>17/08/2026</a:t>
             </a:fld>
             <a:endParaRPr lang="en-AU"/>
           </a:p>
@@ -2954,7 +2960,7 @@
           <a:p>
             <a:fld id="{08306F49-376E-45A5-AD65-FD4D759E20F3}" type="datetimeFigureOut">
               <a:rPr lang="en-AU" smtClean="0"/>
-              <a:t>14/08/2026</a:t>
+              <a:t>17/08/2026</a:t>
             </a:fld>
             <a:endParaRPr lang="en-AU"/>
           </a:p>
@@ -3459,105 +3465,10 @@
       </p:grpSpPr>
       <p:sp>
         <p:nvSpPr>
-          <p:cNvPr id="14" name="Rectangle 13">
-            <a:extLst>
-              <a:ext uri="{FF2B5EF4-FFF2-40B4-BE49-F238E27FC236}">
-                <a16:creationId xmlns:a16="http://schemas.microsoft.com/office/drawing/2014/main" id="{2BE04BD8-2102-C4FA-658F-F7FD00C738E1}"/>
-              </a:ext>
-            </a:extLst>
-          </p:cNvPr>
-          <p:cNvSpPr/>
-          <p:nvPr/>
-        </p:nvSpPr>
-        <p:spPr>
-          <a:xfrm>
-            <a:off x="1512217" y="3011973"/>
-            <a:ext cx="1730185" cy="3461788"/>
-          </a:xfrm>
-          <a:prstGeom prst="rect">
-            <a:avLst/>
-          </a:prstGeom>
-          <a:ln/>
-        </p:spPr>
-        <p:style>
-          <a:lnRef idx="2">
-            <a:schemeClr val="dk1"/>
-          </a:lnRef>
-          <a:fillRef idx="1">
-            <a:schemeClr val="lt1"/>
-          </a:fillRef>
-          <a:effectRef idx="0">
-            <a:schemeClr val="dk1"/>
-          </a:effectRef>
-          <a:fontRef idx="minor">
-            <a:schemeClr val="dk1"/>
-          </a:fontRef>
-        </p:style>
-        <p:txBody>
-          <a:bodyPr lIns="36000" tIns="0" rIns="0" bIns="0" rtlCol="0" anchor="t"/>
-          <a:lstStyle/>
-          <a:p>
-            <a:pPr algn="ctr"/>
-            <a:r>
-              <a:rPr lang="en-AU" sz="1200" dirty="0"/>
-              <a:t>Zenme Org Boundary</a:t>
-            </a:r>
-          </a:p>
-        </p:txBody>
-      </p:sp>
-      <p:sp>
-        <p:nvSpPr>
-          <p:cNvPr id="13" name="Rectangle 12">
-            <a:extLst>
-              <a:ext uri="{FF2B5EF4-FFF2-40B4-BE49-F238E27FC236}">
-                <a16:creationId xmlns:a16="http://schemas.microsoft.com/office/drawing/2014/main" id="{188CEB5D-6025-AC2C-19C2-137EA3B4484B}"/>
-              </a:ext>
-            </a:extLst>
-          </p:cNvPr>
-          <p:cNvSpPr/>
-          <p:nvPr/>
-        </p:nvSpPr>
-        <p:spPr>
-          <a:xfrm>
-            <a:off x="3570432" y="2998430"/>
-            <a:ext cx="5848261" cy="3461788"/>
-          </a:xfrm>
-          <a:prstGeom prst="rect">
-            <a:avLst/>
-          </a:prstGeom>
-          <a:ln/>
-        </p:spPr>
-        <p:style>
-          <a:lnRef idx="2">
-            <a:schemeClr val="dk1"/>
-          </a:lnRef>
-          <a:fillRef idx="1">
-            <a:schemeClr val="lt1"/>
-          </a:fillRef>
-          <a:effectRef idx="0">
-            <a:schemeClr val="dk1"/>
-          </a:effectRef>
-          <a:fontRef idx="minor">
-            <a:schemeClr val="dk1"/>
-          </a:fontRef>
-        </p:style>
-        <p:txBody>
-          <a:bodyPr lIns="36000" tIns="0" rIns="0" bIns="0" rtlCol="0" anchor="t"/>
-          <a:lstStyle/>
-          <a:p>
-            <a:r>
-              <a:rPr lang="en-AU" sz="1200" dirty="0"/>
-              <a:t>Customer Org Boundary</a:t>
-            </a:r>
-          </a:p>
-        </p:txBody>
-      </p:sp>
-      <p:sp>
-        <p:nvSpPr>
           <p:cNvPr id="2" name="Title 1">
             <a:extLst>
               <a:ext uri="{FF2B5EF4-FFF2-40B4-BE49-F238E27FC236}">
-                <a16:creationId xmlns:a16="http://schemas.microsoft.com/office/drawing/2014/main" id="{E38C65B2-C3B2-884A-16B4-C86DCB50FBFA}"/>
+                <a16:creationId xmlns:a16="http://schemas.microsoft.com/office/drawing/2014/main" id="{38088B46-A8CB-68B8-C78A-F1A3F672A9F7}"/>
               </a:ext>
             </a:extLst>
           </p:cNvPr>
@@ -3575,7 +3486,198 @@
           <a:p>
             <a:r>
               <a:rPr lang="en-AU" dirty="0"/>
-              <a:t>Zen Installer</a:t>
+              <a:t>Use Cases</a:t>
+            </a:r>
+          </a:p>
+        </p:txBody>
+      </p:sp>
+      <p:sp>
+        <p:nvSpPr>
+          <p:cNvPr id="3" name="Content Placeholder 2">
+            <a:extLst>
+              <a:ext uri="{FF2B5EF4-FFF2-40B4-BE49-F238E27FC236}">
+                <a16:creationId xmlns:a16="http://schemas.microsoft.com/office/drawing/2014/main" id="{87FF8973-AD52-2DC5-3A83-EA46440ECC9E}"/>
+              </a:ext>
+            </a:extLst>
+          </p:cNvPr>
+          <p:cNvSpPr>
+            <a:spLocks noGrp="1"/>
+          </p:cNvSpPr>
+          <p:nvPr>
+            <p:ph idx="1"/>
+          </p:nvPr>
+        </p:nvSpPr>
+        <p:spPr/>
+        <p:txBody>
+          <a:bodyPr/>
+          <a:lstStyle/>
+          <a:p>
+            <a:r>
+              <a:rPr lang="en-AU" dirty="0"/>
+              <a:t>Replicating production</a:t>
+            </a:r>
+            <a:br>
+              <a:rPr lang="en-AU" dirty="0"/>
+            </a:br>
+            <a:r>
+              <a:rPr lang="en-AU" dirty="0"/>
+              <a:t>Because the architecture is fully scripted, it allows a replica of the production environment to be created for disaster recovery or testing of changes to the base architecture.</a:t>
+            </a:r>
+          </a:p>
+          <a:p>
+            <a:endParaRPr lang="en-AU" dirty="0"/>
+          </a:p>
+        </p:txBody>
+      </p:sp>
+    </p:spTree>
+    <p:extLst>
+      <p:ext uri="{BB962C8B-B14F-4D97-AF65-F5344CB8AC3E}">
+        <p14:creationId xmlns:p14="http://schemas.microsoft.com/office/powerpoint/2010/main" val="946804762"/>
+      </p:ext>
+    </p:extLst>
+  </p:cSld>
+  <p:clrMapOvr>
+    <a:masterClrMapping/>
+  </p:clrMapOvr>
+</p:sld>
+</file>
+
+<file path=ppt/slides/slide3.xml><?xml version="1.0" encoding="utf-8"?>
+<p:sld xmlns:a="http://schemas.openxmlformats.org/drawingml/2006/main" xmlns:r="http://schemas.openxmlformats.org/officeDocument/2006/relationships" xmlns:p="http://schemas.openxmlformats.org/presentationml/2006/main">
+  <p:cSld>
+    <p:spTree>
+      <p:nvGrpSpPr>
+        <p:cNvPr id="1" name=""/>
+        <p:cNvGrpSpPr/>
+        <p:nvPr/>
+      </p:nvGrpSpPr>
+      <p:grpSpPr>
+        <a:xfrm>
+          <a:off x="0" y="0"/>
+          <a:ext cx="0" cy="0"/>
+          <a:chOff x="0" y="0"/>
+          <a:chExt cx="0" cy="0"/>
+        </a:xfrm>
+      </p:grpSpPr>
+      <p:sp>
+        <p:nvSpPr>
+          <p:cNvPr id="14" name="Rectangle 13">
+            <a:extLst>
+              <a:ext uri="{FF2B5EF4-FFF2-40B4-BE49-F238E27FC236}">
+                <a16:creationId xmlns:a16="http://schemas.microsoft.com/office/drawing/2014/main" id="{2BE04BD8-2102-C4FA-658F-F7FD00C738E1}"/>
+              </a:ext>
+            </a:extLst>
+          </p:cNvPr>
+          <p:cNvSpPr/>
+          <p:nvPr/>
+        </p:nvSpPr>
+        <p:spPr>
+          <a:xfrm>
+            <a:off x="1512217" y="3011973"/>
+            <a:ext cx="1730185" cy="3461788"/>
+          </a:xfrm>
+          <a:prstGeom prst="rect">
+            <a:avLst/>
+          </a:prstGeom>
+          <a:ln/>
+        </p:spPr>
+        <p:style>
+          <a:lnRef idx="2">
+            <a:schemeClr val="dk1"/>
+          </a:lnRef>
+          <a:fillRef idx="1">
+            <a:schemeClr val="lt1"/>
+          </a:fillRef>
+          <a:effectRef idx="0">
+            <a:schemeClr val="dk1"/>
+          </a:effectRef>
+          <a:fontRef idx="minor">
+            <a:schemeClr val="dk1"/>
+          </a:fontRef>
+        </p:style>
+        <p:txBody>
+          <a:bodyPr lIns="36000" tIns="0" rIns="0" bIns="0" rtlCol="0" anchor="t"/>
+          <a:lstStyle/>
+          <a:p>
+            <a:pPr algn="ctr"/>
+            <a:r>
+              <a:rPr lang="en-AU" sz="1200" dirty="0"/>
+              <a:t>Zenme Org Boundary</a:t>
+            </a:r>
+          </a:p>
+        </p:txBody>
+      </p:sp>
+      <p:sp>
+        <p:nvSpPr>
+          <p:cNvPr id="13" name="Rectangle 12">
+            <a:extLst>
+              <a:ext uri="{FF2B5EF4-FFF2-40B4-BE49-F238E27FC236}">
+                <a16:creationId xmlns:a16="http://schemas.microsoft.com/office/drawing/2014/main" id="{188CEB5D-6025-AC2C-19C2-137EA3B4484B}"/>
+              </a:ext>
+            </a:extLst>
+          </p:cNvPr>
+          <p:cNvSpPr/>
+          <p:nvPr/>
+        </p:nvSpPr>
+        <p:spPr>
+          <a:xfrm>
+            <a:off x="3570432" y="2998430"/>
+            <a:ext cx="5848261" cy="3461788"/>
+          </a:xfrm>
+          <a:prstGeom prst="rect">
+            <a:avLst/>
+          </a:prstGeom>
+          <a:ln/>
+        </p:spPr>
+        <p:style>
+          <a:lnRef idx="2">
+            <a:schemeClr val="dk1"/>
+          </a:lnRef>
+          <a:fillRef idx="1">
+            <a:schemeClr val="lt1"/>
+          </a:fillRef>
+          <a:effectRef idx="0">
+            <a:schemeClr val="dk1"/>
+          </a:effectRef>
+          <a:fontRef idx="minor">
+            <a:schemeClr val="dk1"/>
+          </a:fontRef>
+        </p:style>
+        <p:txBody>
+          <a:bodyPr lIns="36000" tIns="0" rIns="0" bIns="0" rtlCol="0" anchor="t"/>
+          <a:lstStyle/>
+          <a:p>
+            <a:r>
+              <a:rPr lang="en-AU" sz="1200" dirty="0"/>
+              <a:t>Customer Org Boundary</a:t>
+            </a:r>
+          </a:p>
+        </p:txBody>
+      </p:sp>
+      <p:sp>
+        <p:nvSpPr>
+          <p:cNvPr id="2" name="Title 1">
+            <a:extLst>
+              <a:ext uri="{FF2B5EF4-FFF2-40B4-BE49-F238E27FC236}">
+                <a16:creationId xmlns:a16="http://schemas.microsoft.com/office/drawing/2014/main" id="{E38C65B2-C3B2-884A-16B4-C86DCB50FBFA}"/>
+              </a:ext>
+            </a:extLst>
+          </p:cNvPr>
+          <p:cNvSpPr>
+            <a:spLocks noGrp="1"/>
+          </p:cNvSpPr>
+          <p:nvPr>
+            <p:ph type="title"/>
+          </p:nvPr>
+        </p:nvSpPr>
+        <p:spPr/>
+        <p:txBody>
+          <a:bodyPr/>
+          <a:lstStyle/>
+          <a:p>
+            <a:r>
+              <a:rPr lang="en-AU" dirty="0"/>
+              <a:t>Zen Installer Initialisation</a:t>
             </a:r>
           </a:p>
         </p:txBody>
@@ -4666,7 +4768,7 @@
 </p:sld>
 </file>
 
-<file path=ppt/slides/slide3.xml><?xml version="1.0" encoding="utf-8"?>
+<file path=ppt/slides/slide4.xml><?xml version="1.0" encoding="utf-8"?>
 <p:sld xmlns:a="http://schemas.openxmlformats.org/drawingml/2006/main" xmlns:r="http://schemas.openxmlformats.org/officeDocument/2006/relationships" xmlns:p="http://schemas.openxmlformats.org/presentationml/2006/main">
   <p:cSld>
     <p:spTree>
@@ -6246,7 +6348,7 @@
 </p:sld>
 </file>
 
-<file path=ppt/slides/slide4.xml><?xml version="1.0" encoding="utf-8"?>
+<file path=ppt/slides/slide5.xml><?xml version="1.0" encoding="utf-8"?>
 <p:sld xmlns:a="http://schemas.openxmlformats.org/drawingml/2006/main" xmlns:r="http://schemas.openxmlformats.org/officeDocument/2006/relationships" xmlns:p="http://schemas.openxmlformats.org/presentationml/2006/main">
   <p:cSld>
     <p:spTree>

--- a/Documentation/Corp Architecture Overview.pptx
+++ b/Documentation/Corp Architecture Overview.pptx
@@ -10,6 +10,8 @@
     <p:sldId id="258" r:id="rId4"/>
     <p:sldId id="259" r:id="rId5"/>
     <p:sldId id="260" r:id="rId6"/>
+    <p:sldId id="262" r:id="rId7"/>
+    <p:sldId id="263" r:id="rId8"/>
   </p:sldIdLst>
   <p:sldSz cx="12192000" cy="6858000"/>
   <p:notesSz cx="6858000" cy="9144000"/>
@@ -3509,20 +3511,51 @@
         </p:nvSpPr>
         <p:spPr/>
         <p:txBody>
-          <a:bodyPr/>
-          <a:lstStyle/>
-          <a:p>
-            <a:r>
-              <a:rPr lang="en-AU" dirty="0"/>
+          <a:bodyPr>
+            <a:normAutofit/>
+          </a:bodyPr>
+          <a:lstStyle/>
+          <a:p>
+            <a:r>
+              <a:rPr lang="en-AU" b="1" dirty="0"/>
               <a:t>Replicating production</a:t>
             </a:r>
             <a:br>
-              <a:rPr lang="en-AU" dirty="0"/>
+              <a:rPr lang="en-AU" b="1" dirty="0"/>
             </a:br>
             <a:r>
               <a:rPr lang="en-AU" dirty="0"/>
               <a:t>Because the architecture is fully scripted, it allows a replica of the production environment to be created for disaster recovery or testing of changes to the base architecture.</a:t>
             </a:r>
+          </a:p>
+          <a:p>
+            <a:r>
+              <a:rPr lang="en-AU" b="1" dirty="0"/>
+              <a:t>Automated security</a:t>
+            </a:r>
+            <a:br>
+              <a:rPr lang="en-AU" b="1" dirty="0"/>
+            </a:br>
+            <a:r>
+              <a:rPr lang="en-AU" dirty="0"/>
+              <a:t>By overlaying the corporate support and security over individual application security.</a:t>
+            </a:r>
+          </a:p>
+          <a:p>
+            <a:r>
+              <a:rPr lang="en-AU" b="1" dirty="0"/>
+              <a:t>Federated support model</a:t>
+            </a:r>
+            <a:br>
+              <a:rPr lang="en-AU" b="1" dirty="0"/>
+            </a:br>
+            <a:r>
+              <a:rPr lang="en-AU" dirty="0"/>
+              <a:t>Application support teams have autonomy and high privileges in their domain of control while the framework ensure they cannot compromise the base security standards.</a:t>
+            </a:r>
+          </a:p>
+          <a:p>
+            <a:endParaRPr lang="en-AU" dirty="0"/>
           </a:p>
           <a:p>
             <a:endParaRPr lang="en-AU" dirty="0"/>
@@ -3786,7 +3819,7 @@
         </p:nvSpPr>
         <p:spPr>
           <a:xfrm>
-            <a:off x="1657309" y="3684492"/>
+            <a:off x="1657309" y="4135783"/>
             <a:ext cx="1440000" cy="540000"/>
           </a:xfrm>
           <a:prstGeom prst="roundRect">
@@ -3840,7 +3873,7 @@
         </p:nvSpPr>
         <p:spPr>
           <a:xfrm>
-            <a:off x="4025455" y="3324492"/>
+            <a:off x="4025455" y="3775783"/>
             <a:ext cx="1080000" cy="360000"/>
           </a:xfrm>
           <a:prstGeom prst="roundRect">
@@ -3887,7 +3920,7 @@
         </p:nvSpPr>
         <p:spPr>
           <a:xfrm>
-            <a:off x="4025455" y="3811009"/>
+            <a:off x="4025455" y="4262300"/>
             <a:ext cx="1080000" cy="360000"/>
           </a:xfrm>
           <a:prstGeom prst="roundRect">
@@ -3934,7 +3967,7 @@
         </p:nvSpPr>
         <p:spPr>
           <a:xfrm>
-            <a:off x="4025455" y="4289492"/>
+            <a:off x="4025455" y="4740783"/>
             <a:ext cx="1080000" cy="360000"/>
           </a:xfrm>
           <a:prstGeom prst="roundRect">
@@ -3985,7 +4018,7 @@
         </p:nvCxnSpPr>
         <p:spPr>
           <a:xfrm flipV="1">
-            <a:off x="3097309" y="3504492"/>
+            <a:off x="3097309" y="3955783"/>
             <a:ext cx="928146" cy="450000"/>
           </a:xfrm>
           <a:prstGeom prst="line">
@@ -4029,8 +4062,8 @@
         </p:nvCxnSpPr>
         <p:spPr>
           <a:xfrm rot="16200000" flipH="1">
-            <a:off x="707849" y="3005032"/>
-            <a:ext cx="794112" cy="1104807"/>
+            <a:off x="482204" y="3230677"/>
+            <a:ext cx="1245403" cy="1104807"/>
           </a:xfrm>
           <a:prstGeom prst="curvedConnector2">
             <a:avLst/>
@@ -4073,7 +4106,7 @@
         </p:nvCxnSpPr>
         <p:spPr>
           <a:xfrm>
-            <a:off x="3097309" y="3954492"/>
+            <a:off x="3097309" y="4405783"/>
             <a:ext cx="928146" cy="36517"/>
           </a:xfrm>
           <a:prstGeom prst="line">
@@ -4117,7 +4150,7 @@
         </p:nvCxnSpPr>
         <p:spPr>
           <a:xfrm>
-            <a:off x="3097309" y="3954492"/>
+            <a:off x="3097309" y="4405783"/>
             <a:ext cx="928146" cy="515000"/>
           </a:xfrm>
           <a:prstGeom prst="line">
@@ -4207,9 +4240,9 @@
           <p:nvPr/>
         </p:nvCxnSpPr>
         <p:spPr>
-          <a:xfrm>
-            <a:off x="5105455" y="3504492"/>
-            <a:ext cx="1081309" cy="9475"/>
+          <a:xfrm flipV="1">
+            <a:off x="5105455" y="3513967"/>
+            <a:ext cx="1081309" cy="441816"/>
           </a:xfrm>
           <a:prstGeom prst="line">
             <a:avLst/>
@@ -4350,8 +4383,8 @@
         </p:nvCxnSpPr>
         <p:spPr>
           <a:xfrm rot="5400000">
-            <a:off x="6470677" y="4310054"/>
-            <a:ext cx="1232175" cy="12700"/>
+            <a:off x="6537990" y="4242741"/>
+            <a:ext cx="1097548" cy="12700"/>
           </a:xfrm>
           <a:prstGeom prst="bentConnector3">
             <a:avLst>
@@ -4575,8 +4608,8 @@
         </p:nvSpPr>
         <p:spPr>
           <a:xfrm>
-            <a:off x="6186764" y="4926142"/>
-            <a:ext cx="1800000" cy="360000"/>
+            <a:off x="6186764" y="4791515"/>
+            <a:ext cx="1800000" cy="494627"/>
           </a:xfrm>
           <a:prstGeom prst="roundRect">
             <a:avLst/>
@@ -4603,7 +4636,7 @@
             <a:pPr algn="ctr"/>
             <a:r>
               <a:rPr lang="en-AU" sz="1600" dirty="0"/>
-              <a:t>Code Deployer</a:t>
+              <a:t>GitHub Code Deployer</a:t>
             </a:r>
           </a:p>
         </p:txBody>
@@ -4626,8 +4659,8 @@
         </p:nvCxnSpPr>
         <p:spPr>
           <a:xfrm flipV="1">
-            <a:off x="3097309" y="5106142"/>
-            <a:ext cx="3089455" cy="859672"/>
+            <a:off x="3097309" y="5038829"/>
+            <a:ext cx="3089455" cy="926985"/>
           </a:xfrm>
           <a:prstGeom prst="straightConnector1">
             <a:avLst/>
@@ -4667,7 +4700,7 @@
         </p:nvSpPr>
         <p:spPr>
           <a:xfrm>
-            <a:off x="2866417" y="3546167"/>
+            <a:off x="2866417" y="3997458"/>
             <a:ext cx="1080000" cy="180000"/>
           </a:xfrm>
           <a:prstGeom prst="rect">
@@ -4751,6 +4784,199 @@
             <a:r>
               <a:rPr lang="en-AU" sz="1200" dirty="0"/>
               <a:t>Deploy</a:t>
+            </a:r>
+          </a:p>
+        </p:txBody>
+      </p:sp>
+      <p:sp>
+        <p:nvSpPr>
+          <p:cNvPr id="7" name="Rectangle: Rounded Corners 6">
+            <a:extLst>
+              <a:ext uri="{FF2B5EF4-FFF2-40B4-BE49-F238E27FC236}">
+                <a16:creationId xmlns:a16="http://schemas.microsoft.com/office/drawing/2014/main" id="{5F10F245-A7F1-7608-991F-205115FE594F}"/>
+              </a:ext>
+            </a:extLst>
+          </p:cNvPr>
+          <p:cNvSpPr/>
+          <p:nvPr/>
+        </p:nvSpPr>
+        <p:spPr>
+          <a:xfrm>
+            <a:off x="1665380" y="3445898"/>
+            <a:ext cx="1440000" cy="540000"/>
+          </a:xfrm>
+          <a:prstGeom prst="roundRect">
+            <a:avLst/>
+          </a:prstGeom>
+        </p:spPr>
+        <p:style>
+          <a:lnRef idx="2">
+            <a:schemeClr val="dk1"/>
+          </a:lnRef>
+          <a:fillRef idx="1">
+            <a:schemeClr val="lt1"/>
+          </a:fillRef>
+          <a:effectRef idx="0">
+            <a:schemeClr val="dk1"/>
+          </a:effectRef>
+          <a:fontRef idx="minor">
+            <a:schemeClr val="dk1"/>
+          </a:fontRef>
+        </p:style>
+        <p:txBody>
+          <a:bodyPr lIns="0" tIns="0" rIns="0" bIns="0" rtlCol="0" anchor="ctr"/>
+          <a:lstStyle/>
+          <a:p>
+            <a:pPr algn="ctr"/>
+            <a:r>
+              <a:rPr lang="en-AU" sz="1600" dirty="0"/>
+              <a:t>Template Repository</a:t>
+            </a:r>
+          </a:p>
+        </p:txBody>
+      </p:sp>
+      <p:cxnSp>
+        <p:nvCxnSpPr>
+          <p:cNvPr id="21" name="Straight Connector 20">
+            <a:extLst>
+              <a:ext uri="{FF2B5EF4-FFF2-40B4-BE49-F238E27FC236}">
+                <a16:creationId xmlns:a16="http://schemas.microsoft.com/office/drawing/2014/main" id="{5BBED580-3543-7BF6-5BAE-5F10B348D33F}"/>
+              </a:ext>
+            </a:extLst>
+          </p:cNvPr>
+          <p:cNvCxnSpPr>
+            <a:cxnSpLocks/>
+            <a:stCxn id="7" idx="3"/>
+            <a:endCxn id="35" idx="1"/>
+          </p:cNvCxnSpPr>
+          <p:nvPr/>
+        </p:nvCxnSpPr>
+        <p:spPr>
+          <a:xfrm flipV="1">
+            <a:off x="3105380" y="3513967"/>
+            <a:ext cx="3081384" cy="201931"/>
+          </a:xfrm>
+          <a:prstGeom prst="line">
+            <a:avLst/>
+          </a:prstGeom>
+          <a:ln>
+            <a:headEnd type="none" w="med" len="med"/>
+            <a:tailEnd type="triangle" w="med" len="med"/>
+          </a:ln>
+        </p:spPr>
+        <p:style>
+          <a:lnRef idx="1">
+            <a:schemeClr val="accent5"/>
+          </a:lnRef>
+          <a:fillRef idx="0">
+            <a:schemeClr val="accent5"/>
+          </a:fillRef>
+          <a:effectRef idx="0">
+            <a:schemeClr val="accent5"/>
+          </a:effectRef>
+          <a:fontRef idx="minor">
+            <a:schemeClr val="tx1"/>
+          </a:fontRef>
+        </p:style>
+      </p:cxnSp>
+      <p:sp>
+        <p:nvSpPr>
+          <p:cNvPr id="24" name="Rectangle 23">
+            <a:extLst>
+              <a:ext uri="{FF2B5EF4-FFF2-40B4-BE49-F238E27FC236}">
+                <a16:creationId xmlns:a16="http://schemas.microsoft.com/office/drawing/2014/main" id="{E2409610-9738-784C-6BFC-4350201E24C1}"/>
+              </a:ext>
+            </a:extLst>
+          </p:cNvPr>
+          <p:cNvSpPr/>
+          <p:nvPr/>
+        </p:nvSpPr>
+        <p:spPr>
+          <a:xfrm>
+            <a:off x="3662118" y="3361238"/>
+            <a:ext cx="1339252" cy="152729"/>
+          </a:xfrm>
+          <a:prstGeom prst="rect">
+            <a:avLst/>
+          </a:prstGeom>
+          <a:noFill/>
+          <a:ln>
+            <a:noFill/>
+          </a:ln>
+        </p:spPr>
+        <p:style>
+          <a:lnRef idx="2">
+            <a:schemeClr val="dk1"/>
+          </a:lnRef>
+          <a:fillRef idx="1">
+            <a:schemeClr val="lt1"/>
+          </a:fillRef>
+          <a:effectRef idx="0">
+            <a:schemeClr val="dk1"/>
+          </a:effectRef>
+          <a:fontRef idx="minor">
+            <a:schemeClr val="dk1"/>
+          </a:fontRef>
+        </p:style>
+        <p:txBody>
+          <a:bodyPr lIns="0" tIns="0" rIns="0" bIns="0" rtlCol="0" anchor="ctr"/>
+          <a:lstStyle/>
+          <a:p>
+            <a:pPr algn="ctr"/>
+            <a:r>
+              <a:rPr lang="en-AU" sz="1200" dirty="0"/>
+              <a:t>Initial Fork Replica</a:t>
+            </a:r>
+          </a:p>
+        </p:txBody>
+      </p:sp>
+      <p:sp>
+        <p:nvSpPr>
+          <p:cNvPr id="26" name="Rectangle 25">
+            <a:extLst>
+              <a:ext uri="{FF2B5EF4-FFF2-40B4-BE49-F238E27FC236}">
+                <a16:creationId xmlns:a16="http://schemas.microsoft.com/office/drawing/2014/main" id="{A136D44D-90E9-B8A3-D82B-A7304C29FE43}"/>
+              </a:ext>
+            </a:extLst>
+          </p:cNvPr>
+          <p:cNvSpPr/>
+          <p:nvPr/>
+        </p:nvSpPr>
+        <p:spPr>
+          <a:xfrm>
+            <a:off x="7235846" y="4117540"/>
+            <a:ext cx="837204" cy="504760"/>
+          </a:xfrm>
+          <a:prstGeom prst="rect">
+            <a:avLst/>
+          </a:prstGeom>
+          <a:noFill/>
+          <a:ln>
+            <a:noFill/>
+          </a:ln>
+        </p:spPr>
+        <p:style>
+          <a:lnRef idx="2">
+            <a:schemeClr val="dk1"/>
+          </a:lnRef>
+          <a:fillRef idx="1">
+            <a:schemeClr val="lt1"/>
+          </a:fillRef>
+          <a:effectRef idx="0">
+            <a:schemeClr val="dk1"/>
+          </a:effectRef>
+          <a:fontRef idx="minor">
+            <a:schemeClr val="dk1"/>
+          </a:fontRef>
+        </p:style>
+        <p:txBody>
+          <a:bodyPr lIns="0" tIns="0" rIns="0" bIns="0" rtlCol="0" anchor="ctr"/>
+          <a:lstStyle/>
+          <a:p>
+            <a:pPr algn="ctr"/>
+            <a:r>
+              <a:rPr lang="en-AU" sz="1200" dirty="0"/>
+              <a:t>Add customer changes</a:t>
             </a:r>
           </a:p>
         </p:txBody>
@@ -4931,8 +5157,8 @@
         </p:nvSpPr>
         <p:spPr>
           <a:xfrm>
-            <a:off x="348343" y="823584"/>
-            <a:ext cx="11355977" cy="1942143"/>
+            <a:off x="348343" y="991015"/>
+            <a:ext cx="11355977" cy="1774712"/>
           </a:xfrm>
         </p:spPr>
         <p:txBody>
@@ -6488,7 +6714,7 @@
           <a:p>
             <a:r>
               <a:rPr lang="en-AU" dirty="0"/>
-              <a:t>Support Architecture</a:t>
+              <a:t>Federated Support Architecture</a:t>
             </a:r>
           </a:p>
         </p:txBody>
@@ -6531,7 +6757,7 @@
             </a:pPr>
             <a:r>
               <a:rPr lang="en-AU" sz="1600" dirty="0"/>
-              <a:t>App support staff only has admin access to the App domain that they support.</a:t>
+              <a:t>App support staff has admin access to only the App domain they support.</a:t>
             </a:r>
           </a:p>
           <a:p>
@@ -7679,14 +7905,14 @@
           <p:cNvCxnSpPr>
             <a:cxnSpLocks/>
             <a:stCxn id="94" idx="1"/>
-            <a:endCxn id="77" idx="3"/>
+            <a:endCxn id="13" idx="3"/>
           </p:cNvCxnSpPr>
           <p:nvPr/>
         </p:nvCxnSpPr>
         <p:spPr>
           <a:xfrm flipH="1">
-            <a:off x="9256310" y="4409724"/>
-            <a:ext cx="1857777" cy="652380"/>
+            <a:off x="10353800" y="4409724"/>
+            <a:ext cx="760287" cy="704493"/>
           </a:xfrm>
           <a:prstGeom prst="line">
             <a:avLst/>
@@ -7852,7 +8078,7 @@
         </p:nvSpPr>
         <p:spPr>
           <a:xfrm>
-            <a:off x="9796310" y="4835193"/>
+            <a:off x="10273800" y="5380610"/>
             <a:ext cx="1080000" cy="329265"/>
           </a:xfrm>
           <a:prstGeom prst="rect">
@@ -8035,10 +8261,4979 @@
           </a:p>
         </p:txBody>
       </p:sp>
+      <p:sp>
+        <p:nvSpPr>
+          <p:cNvPr id="13" name="Rectangle: Rounded Corners 12">
+            <a:extLst>
+              <a:ext uri="{FF2B5EF4-FFF2-40B4-BE49-F238E27FC236}">
+                <a16:creationId xmlns:a16="http://schemas.microsoft.com/office/drawing/2014/main" id="{38D04FD1-ACA8-F095-4481-82CB657F6377}"/>
+              </a:ext>
+            </a:extLst>
+          </p:cNvPr>
+          <p:cNvSpPr/>
+          <p:nvPr/>
+        </p:nvSpPr>
+        <p:spPr>
+          <a:xfrm>
+            <a:off x="9627691" y="4822618"/>
+            <a:ext cx="726109" cy="583197"/>
+          </a:xfrm>
+          <a:prstGeom prst="roundRect">
+            <a:avLst/>
+          </a:prstGeom>
+        </p:spPr>
+        <p:style>
+          <a:lnRef idx="2">
+            <a:schemeClr val="dk1"/>
+          </a:lnRef>
+          <a:fillRef idx="1">
+            <a:schemeClr val="lt1"/>
+          </a:fillRef>
+          <a:effectRef idx="0">
+            <a:schemeClr val="dk1"/>
+          </a:effectRef>
+          <a:fontRef idx="minor">
+            <a:schemeClr val="dk1"/>
+          </a:fontRef>
+        </p:style>
+        <p:txBody>
+          <a:bodyPr lIns="0" tIns="0" rIns="0" bIns="0" rtlCol="0" anchor="ctr"/>
+          <a:lstStyle/>
+          <a:p>
+            <a:pPr algn="ctr"/>
+            <a:r>
+              <a:rPr lang="en-AU" sz="1400" dirty="0"/>
+              <a:t>Zen Installer</a:t>
+            </a:r>
+          </a:p>
+        </p:txBody>
+      </p:sp>
+      <p:cxnSp>
+        <p:nvCxnSpPr>
+          <p:cNvPr id="19" name="Straight Connector 18">
+            <a:extLst>
+              <a:ext uri="{FF2B5EF4-FFF2-40B4-BE49-F238E27FC236}">
+                <a16:creationId xmlns:a16="http://schemas.microsoft.com/office/drawing/2014/main" id="{E1DDD8E2-CCE5-A1DF-3D61-E43B5E480C06}"/>
+              </a:ext>
+            </a:extLst>
+          </p:cNvPr>
+          <p:cNvCxnSpPr>
+            <a:cxnSpLocks/>
+            <a:stCxn id="13" idx="1"/>
+            <a:endCxn id="77" idx="3"/>
+          </p:cNvCxnSpPr>
+          <p:nvPr/>
+        </p:nvCxnSpPr>
+        <p:spPr>
+          <a:xfrm flipH="1" flipV="1">
+            <a:off x="9256310" y="5062104"/>
+            <a:ext cx="371381" cy="52113"/>
+          </a:xfrm>
+          <a:prstGeom prst="line">
+            <a:avLst/>
+          </a:prstGeom>
+        </p:spPr>
+        <p:style>
+          <a:lnRef idx="2">
+            <a:schemeClr val="accent5"/>
+          </a:lnRef>
+          <a:fillRef idx="0">
+            <a:schemeClr val="accent5"/>
+          </a:fillRef>
+          <a:effectRef idx="1">
+            <a:schemeClr val="accent5"/>
+          </a:effectRef>
+          <a:fontRef idx="minor">
+            <a:schemeClr val="tx1"/>
+          </a:fontRef>
+        </p:style>
+      </p:cxnSp>
     </p:spTree>
     <p:extLst>
       <p:ext uri="{BB962C8B-B14F-4D97-AF65-F5344CB8AC3E}">
         <p14:creationId xmlns:p14="http://schemas.microsoft.com/office/powerpoint/2010/main" val="3965249681"/>
+      </p:ext>
+    </p:extLst>
+  </p:cSld>
+  <p:clrMapOvr>
+    <a:masterClrMapping/>
+  </p:clrMapOvr>
+</p:sld>
+</file>
+
+<file path=ppt/slides/slide6.xml><?xml version="1.0" encoding="utf-8"?>
+<p:sld xmlns:a="http://schemas.openxmlformats.org/drawingml/2006/main" xmlns:r="http://schemas.openxmlformats.org/officeDocument/2006/relationships" xmlns:p="http://schemas.openxmlformats.org/presentationml/2006/main">
+  <p:cSld>
+    <p:spTree>
+      <p:nvGrpSpPr>
+        <p:cNvPr id="1" name=""/>
+        <p:cNvGrpSpPr/>
+        <p:nvPr/>
+      </p:nvGrpSpPr>
+      <p:grpSpPr>
+        <a:xfrm>
+          <a:off x="0" y="0"/>
+          <a:ext cx="0" cy="0"/>
+          <a:chOff x="0" y="0"/>
+          <a:chExt cx="0" cy="0"/>
+        </a:xfrm>
+      </p:grpSpPr>
+      <p:sp>
+        <p:nvSpPr>
+          <p:cNvPr id="2" name="Title 1">
+            <a:extLst>
+              <a:ext uri="{FF2B5EF4-FFF2-40B4-BE49-F238E27FC236}">
+                <a16:creationId xmlns:a16="http://schemas.microsoft.com/office/drawing/2014/main" id="{DC3926A6-2580-3B78-1048-4780E2E92BCF}"/>
+              </a:ext>
+            </a:extLst>
+          </p:cNvPr>
+          <p:cNvSpPr>
+            <a:spLocks noGrp="1"/>
+          </p:cNvSpPr>
+          <p:nvPr>
+            <p:ph type="title"/>
+          </p:nvPr>
+        </p:nvSpPr>
+        <p:spPr/>
+        <p:txBody>
+          <a:bodyPr>
+            <a:normAutofit/>
+          </a:bodyPr>
+          <a:lstStyle/>
+          <a:p>
+            <a:r>
+              <a:rPr lang="en-AU" dirty="0"/>
+              <a:t>Consumer AI</a:t>
+            </a:r>
+          </a:p>
+        </p:txBody>
+      </p:sp>
+      <p:sp>
+        <p:nvSpPr>
+          <p:cNvPr id="3" name="Content Placeholder 2">
+            <a:extLst>
+              <a:ext uri="{FF2B5EF4-FFF2-40B4-BE49-F238E27FC236}">
+                <a16:creationId xmlns:a16="http://schemas.microsoft.com/office/drawing/2014/main" id="{E8C81E1E-F3CB-AF12-87B0-F328B4DCE6A6}"/>
+              </a:ext>
+            </a:extLst>
+          </p:cNvPr>
+          <p:cNvSpPr>
+            <a:spLocks noGrp="1"/>
+          </p:cNvSpPr>
+          <p:nvPr>
+            <p:ph idx="1"/>
+          </p:nvPr>
+        </p:nvSpPr>
+        <p:spPr>
+          <a:xfrm>
+            <a:off x="348343" y="856525"/>
+            <a:ext cx="11355977" cy="1746525"/>
+          </a:xfrm>
+        </p:spPr>
+        <p:txBody>
+          <a:bodyPr>
+            <a:normAutofit fontScale="92500"/>
+          </a:bodyPr>
+          <a:lstStyle/>
+          <a:p>
+            <a:pPr>
+              <a:lnSpc>
+                <a:spcPct val="120000"/>
+              </a:lnSpc>
+              <a:spcBef>
+                <a:spcPts val="600"/>
+              </a:spcBef>
+            </a:pPr>
+            <a:r>
+              <a:rPr lang="en-AU" sz="1600" dirty="0"/>
+              <a:t>Consumers sign up to the Zenme ecosystem at any of the hosting providers. </a:t>
+            </a:r>
+            <a:br>
+              <a:rPr lang="en-AU" sz="1600" dirty="0"/>
+            </a:br>
+            <a:r>
+              <a:rPr lang="en-AU" sz="1600" dirty="0"/>
+              <a:t>They can transfer their data from one to another hosting provider through the Zenme framework.</a:t>
+            </a:r>
+          </a:p>
+          <a:p>
+            <a:pPr>
+              <a:lnSpc>
+                <a:spcPct val="120000"/>
+              </a:lnSpc>
+              <a:spcBef>
+                <a:spcPts val="600"/>
+              </a:spcBef>
+            </a:pPr>
+            <a:r>
+              <a:rPr lang="en-AU" sz="1600" dirty="0"/>
+              <a:t>Hosting providers deploy the Zenme framework using ZenInstaller. They decide which of the apps and AIs from GitHub they want to provide on their host environment.</a:t>
+            </a:r>
+          </a:p>
+          <a:p>
+            <a:pPr>
+              <a:lnSpc>
+                <a:spcPct val="120000"/>
+              </a:lnSpc>
+              <a:spcBef>
+                <a:spcPts val="600"/>
+              </a:spcBef>
+            </a:pPr>
+            <a:r>
+              <a:rPr lang="en-AU" sz="1600" dirty="0"/>
+              <a:t>Developers publish their apps and AI models to GitHub and register them with the Zenme framework for inclusion in ZenInstaller.</a:t>
+            </a:r>
+          </a:p>
+        </p:txBody>
+      </p:sp>
+      <p:sp>
+        <p:nvSpPr>
+          <p:cNvPr id="4" name="Rectangle 3">
+            <a:extLst>
+              <a:ext uri="{FF2B5EF4-FFF2-40B4-BE49-F238E27FC236}">
+                <a16:creationId xmlns:a16="http://schemas.microsoft.com/office/drawing/2014/main" id="{8D710C09-2439-DF54-E1E1-86C165107CF6}"/>
+              </a:ext>
+            </a:extLst>
+          </p:cNvPr>
+          <p:cNvSpPr/>
+          <p:nvPr/>
+        </p:nvSpPr>
+        <p:spPr>
+          <a:xfrm>
+            <a:off x="5830206" y="4032482"/>
+            <a:ext cx="1730185" cy="1194370"/>
+          </a:xfrm>
+          <a:prstGeom prst="rect">
+            <a:avLst/>
+          </a:prstGeom>
+          <a:ln/>
+        </p:spPr>
+        <p:style>
+          <a:lnRef idx="2">
+            <a:schemeClr val="dk1"/>
+          </a:lnRef>
+          <a:fillRef idx="1">
+            <a:schemeClr val="lt1"/>
+          </a:fillRef>
+          <a:effectRef idx="0">
+            <a:schemeClr val="dk1"/>
+          </a:effectRef>
+          <a:fontRef idx="minor">
+            <a:schemeClr val="dk1"/>
+          </a:fontRef>
+        </p:style>
+        <p:txBody>
+          <a:bodyPr lIns="36000" tIns="0" rIns="0" bIns="0" rtlCol="0" anchor="t"/>
+          <a:lstStyle/>
+          <a:p>
+            <a:pPr algn="ctr"/>
+            <a:r>
+              <a:rPr lang="en-AU" sz="1200" dirty="0"/>
+              <a:t>Zenme Org Boundary</a:t>
+            </a:r>
+          </a:p>
+        </p:txBody>
+      </p:sp>
+      <p:pic>
+        <p:nvPicPr>
+          <p:cNvPr id="5" name="Graphic 4" descr="User with solid fill">
+            <a:extLst>
+              <a:ext uri="{FF2B5EF4-FFF2-40B4-BE49-F238E27FC236}">
+                <a16:creationId xmlns:a16="http://schemas.microsoft.com/office/drawing/2014/main" id="{B9870A59-F85F-D4ED-1AAE-04B7FA98D31B}"/>
+              </a:ext>
+            </a:extLst>
+          </p:cNvPr>
+          <p:cNvPicPr>
+            <a:picLocks noChangeAspect="1"/>
+          </p:cNvPicPr>
+          <p:nvPr/>
+        </p:nvPicPr>
+        <p:blipFill>
+          <a:blip>
+            <a:extLst>
+              <a:ext uri="{96DAC541-7B7A-43D3-8B79-37D633B846F1}">
+                <asvg:svgBlip xmlns:asvg="http://schemas.microsoft.com/office/drawing/2016/SVG/main" r:embed="rId2"/>
+              </a:ext>
+            </a:extLst>
+          </a:blip>
+          <a:srcRect l="16685" t="13871" r="16727" b="13810"/>
+          <a:stretch>
+            <a:fillRect/>
+          </a:stretch>
+        </p:blipFill>
+        <p:spPr>
+          <a:xfrm>
+            <a:off x="561033" y="3235201"/>
+            <a:ext cx="479426" cy="520701"/>
+          </a:xfrm>
+          <a:prstGeom prst="rect">
+            <a:avLst/>
+          </a:prstGeom>
+        </p:spPr>
+      </p:pic>
+      <p:sp>
+        <p:nvSpPr>
+          <p:cNvPr id="6" name="Rectangle: Rounded Corners 5">
+            <a:extLst>
+              <a:ext uri="{FF2B5EF4-FFF2-40B4-BE49-F238E27FC236}">
+                <a16:creationId xmlns:a16="http://schemas.microsoft.com/office/drawing/2014/main" id="{7B491F7C-57AA-D4C8-AD2F-5239EE0DEE51}"/>
+              </a:ext>
+            </a:extLst>
+          </p:cNvPr>
+          <p:cNvSpPr/>
+          <p:nvPr/>
+        </p:nvSpPr>
+        <p:spPr>
+          <a:xfrm>
+            <a:off x="5975298" y="4442295"/>
+            <a:ext cx="1440000" cy="540000"/>
+          </a:xfrm>
+          <a:prstGeom prst="roundRect">
+            <a:avLst/>
+          </a:prstGeom>
+        </p:spPr>
+        <p:style>
+          <a:lnRef idx="2">
+            <a:schemeClr val="dk1"/>
+          </a:lnRef>
+          <a:fillRef idx="1">
+            <a:schemeClr val="lt1"/>
+          </a:fillRef>
+          <a:effectRef idx="0">
+            <a:schemeClr val="dk1"/>
+          </a:effectRef>
+          <a:fontRef idx="minor">
+            <a:schemeClr val="dk1"/>
+          </a:fontRef>
+        </p:style>
+        <p:txBody>
+          <a:bodyPr lIns="0" tIns="0" rIns="0" bIns="0" rtlCol="0" anchor="ctr"/>
+          <a:lstStyle/>
+          <a:p>
+            <a:pPr algn="ctr"/>
+            <a:r>
+              <a:rPr lang="en-AU" sz="1400" dirty="0"/>
+              <a:t>ZenInstaller</a:t>
+            </a:r>
+          </a:p>
+        </p:txBody>
+      </p:sp>
+      <p:sp>
+        <p:nvSpPr>
+          <p:cNvPr id="15" name="Rectangle 14">
+            <a:extLst>
+              <a:ext uri="{FF2B5EF4-FFF2-40B4-BE49-F238E27FC236}">
+                <a16:creationId xmlns:a16="http://schemas.microsoft.com/office/drawing/2014/main" id="{2B3CF1A1-4A32-59C0-CF4F-FBD1DA48AC88}"/>
+              </a:ext>
+            </a:extLst>
+          </p:cNvPr>
+          <p:cNvSpPr/>
+          <p:nvPr/>
+        </p:nvSpPr>
+        <p:spPr>
+          <a:xfrm>
+            <a:off x="2660020" y="2769565"/>
+            <a:ext cx="1730185" cy="1735622"/>
+          </a:xfrm>
+          <a:prstGeom prst="rect">
+            <a:avLst/>
+          </a:prstGeom>
+          <a:ln/>
+        </p:spPr>
+        <p:style>
+          <a:lnRef idx="2">
+            <a:schemeClr val="dk1"/>
+          </a:lnRef>
+          <a:fillRef idx="1">
+            <a:schemeClr val="lt1"/>
+          </a:fillRef>
+          <a:effectRef idx="0">
+            <a:schemeClr val="dk1"/>
+          </a:effectRef>
+          <a:fontRef idx="minor">
+            <a:schemeClr val="dk1"/>
+          </a:fontRef>
+        </p:style>
+        <p:txBody>
+          <a:bodyPr lIns="36000" tIns="0" rIns="0" bIns="0" rtlCol="0" anchor="t"/>
+          <a:lstStyle/>
+          <a:p>
+            <a:pPr algn="ctr"/>
+            <a:r>
+              <a:rPr lang="en-AU" sz="1200" dirty="0"/>
+              <a:t>Host A Org Boundary</a:t>
+            </a:r>
+          </a:p>
+        </p:txBody>
+      </p:sp>
+      <p:sp>
+        <p:nvSpPr>
+          <p:cNvPr id="16" name="Rectangle: Rounded Corners 15">
+            <a:extLst>
+              <a:ext uri="{FF2B5EF4-FFF2-40B4-BE49-F238E27FC236}">
+                <a16:creationId xmlns:a16="http://schemas.microsoft.com/office/drawing/2014/main" id="{61A400A9-87D6-976E-5068-D45A2B235B01}"/>
+              </a:ext>
+            </a:extLst>
+          </p:cNvPr>
+          <p:cNvSpPr/>
+          <p:nvPr/>
+        </p:nvSpPr>
+        <p:spPr>
+          <a:xfrm>
+            <a:off x="2805112" y="3179378"/>
+            <a:ext cx="1440000" cy="180000"/>
+          </a:xfrm>
+          <a:prstGeom prst="roundRect">
+            <a:avLst/>
+          </a:prstGeom>
+        </p:spPr>
+        <p:style>
+          <a:lnRef idx="2">
+            <a:schemeClr val="dk1"/>
+          </a:lnRef>
+          <a:fillRef idx="1">
+            <a:schemeClr val="lt1"/>
+          </a:fillRef>
+          <a:effectRef idx="0">
+            <a:schemeClr val="dk1"/>
+          </a:effectRef>
+          <a:fontRef idx="minor">
+            <a:schemeClr val="dk1"/>
+          </a:fontRef>
+        </p:style>
+        <p:txBody>
+          <a:bodyPr lIns="0" tIns="0" rIns="0" bIns="0" rtlCol="0" anchor="ctr"/>
+          <a:lstStyle/>
+          <a:p>
+            <a:pPr algn="ctr"/>
+            <a:r>
+              <a:rPr lang="en-AU" sz="1200" dirty="0"/>
+              <a:t>Zenme Framework</a:t>
+            </a:r>
+          </a:p>
+        </p:txBody>
+      </p:sp>
+      <p:sp>
+        <p:nvSpPr>
+          <p:cNvPr id="18" name="Rectangle 17">
+            <a:extLst>
+              <a:ext uri="{FF2B5EF4-FFF2-40B4-BE49-F238E27FC236}">
+                <a16:creationId xmlns:a16="http://schemas.microsoft.com/office/drawing/2014/main" id="{B8C59B00-0141-66A9-4775-D5458F090527}"/>
+              </a:ext>
+            </a:extLst>
+          </p:cNvPr>
+          <p:cNvSpPr/>
+          <p:nvPr/>
+        </p:nvSpPr>
+        <p:spPr>
+          <a:xfrm>
+            <a:off x="8012213" y="2751980"/>
+            <a:ext cx="1730185" cy="3803323"/>
+          </a:xfrm>
+          <a:prstGeom prst="rect">
+            <a:avLst/>
+          </a:prstGeom>
+          <a:ln/>
+        </p:spPr>
+        <p:style>
+          <a:lnRef idx="2">
+            <a:schemeClr val="dk1"/>
+          </a:lnRef>
+          <a:fillRef idx="1">
+            <a:schemeClr val="lt1"/>
+          </a:fillRef>
+          <a:effectRef idx="0">
+            <a:schemeClr val="dk1"/>
+          </a:effectRef>
+          <a:fontRef idx="minor">
+            <a:schemeClr val="dk1"/>
+          </a:fontRef>
+        </p:style>
+        <p:txBody>
+          <a:bodyPr lIns="36000" tIns="0" rIns="0" bIns="0" rtlCol="0" anchor="t"/>
+          <a:lstStyle/>
+          <a:p>
+            <a:pPr algn="ctr"/>
+            <a:r>
+              <a:rPr lang="en-AU" sz="1200" dirty="0"/>
+              <a:t>GitHub</a:t>
+            </a:r>
+          </a:p>
+        </p:txBody>
+      </p:sp>
+      <p:sp>
+        <p:nvSpPr>
+          <p:cNvPr id="21" name="Rectangle: Rounded Corners 20">
+            <a:extLst>
+              <a:ext uri="{FF2B5EF4-FFF2-40B4-BE49-F238E27FC236}">
+                <a16:creationId xmlns:a16="http://schemas.microsoft.com/office/drawing/2014/main" id="{23C2CF97-78DA-9600-7E8E-D3FFCCA483E9}"/>
+              </a:ext>
+            </a:extLst>
+          </p:cNvPr>
+          <p:cNvSpPr/>
+          <p:nvPr/>
+        </p:nvSpPr>
+        <p:spPr>
+          <a:xfrm>
+            <a:off x="8157305" y="3757609"/>
+            <a:ext cx="1440000" cy="540000"/>
+          </a:xfrm>
+          <a:prstGeom prst="roundRect">
+            <a:avLst/>
+          </a:prstGeom>
+        </p:spPr>
+        <p:style>
+          <a:lnRef idx="2">
+            <a:schemeClr val="dk1"/>
+          </a:lnRef>
+          <a:fillRef idx="1">
+            <a:schemeClr val="lt1"/>
+          </a:fillRef>
+          <a:effectRef idx="0">
+            <a:schemeClr val="dk1"/>
+          </a:effectRef>
+          <a:fontRef idx="minor">
+            <a:schemeClr val="dk1"/>
+          </a:fontRef>
+        </p:style>
+        <p:txBody>
+          <a:bodyPr lIns="0" tIns="0" rIns="0" bIns="0" rtlCol="0" anchor="ctr"/>
+          <a:lstStyle/>
+          <a:p>
+            <a:pPr algn="ctr"/>
+            <a:r>
+              <a:rPr lang="en-AU" sz="1400" dirty="0"/>
+              <a:t>Zenme App</a:t>
+            </a:r>
+          </a:p>
+        </p:txBody>
+      </p:sp>
+      <p:sp>
+        <p:nvSpPr>
+          <p:cNvPr id="22" name="Rectangle: Rounded Corners 21">
+            <a:extLst>
+              <a:ext uri="{FF2B5EF4-FFF2-40B4-BE49-F238E27FC236}">
+                <a16:creationId xmlns:a16="http://schemas.microsoft.com/office/drawing/2014/main" id="{9BB33B42-FD87-E7F9-C2AA-036C65510234}"/>
+              </a:ext>
+            </a:extLst>
+          </p:cNvPr>
+          <p:cNvSpPr/>
+          <p:nvPr/>
+        </p:nvSpPr>
+        <p:spPr>
+          <a:xfrm>
+            <a:off x="8157305" y="4469400"/>
+            <a:ext cx="1440000" cy="540000"/>
+          </a:xfrm>
+          <a:prstGeom prst="roundRect">
+            <a:avLst/>
+          </a:prstGeom>
+        </p:spPr>
+        <p:style>
+          <a:lnRef idx="2">
+            <a:schemeClr val="dk1"/>
+          </a:lnRef>
+          <a:fillRef idx="1">
+            <a:schemeClr val="lt1"/>
+          </a:fillRef>
+          <a:effectRef idx="0">
+            <a:schemeClr val="dk1"/>
+          </a:effectRef>
+          <a:fontRef idx="minor">
+            <a:schemeClr val="dk1"/>
+          </a:fontRef>
+        </p:style>
+        <p:txBody>
+          <a:bodyPr lIns="0" tIns="0" rIns="0" bIns="0" rtlCol="0" anchor="ctr"/>
+          <a:lstStyle/>
+          <a:p>
+            <a:pPr algn="ctr"/>
+            <a:r>
+              <a:rPr lang="en-AU" sz="1400" dirty="0"/>
+              <a:t>Zenme AI </a:t>
+            </a:r>
+          </a:p>
+        </p:txBody>
+      </p:sp>
+      <p:sp>
+        <p:nvSpPr>
+          <p:cNvPr id="23" name="Rectangle: Rounded Corners 22">
+            <a:extLst>
+              <a:ext uri="{FF2B5EF4-FFF2-40B4-BE49-F238E27FC236}">
+                <a16:creationId xmlns:a16="http://schemas.microsoft.com/office/drawing/2014/main" id="{4A65BFAA-A508-4A30-B987-EC5439F91BDA}"/>
+              </a:ext>
+            </a:extLst>
+          </p:cNvPr>
+          <p:cNvSpPr/>
+          <p:nvPr/>
+        </p:nvSpPr>
+        <p:spPr>
+          <a:xfrm>
+            <a:off x="8157305" y="3045818"/>
+            <a:ext cx="1440000" cy="540000"/>
+          </a:xfrm>
+          <a:prstGeom prst="roundRect">
+            <a:avLst/>
+          </a:prstGeom>
+        </p:spPr>
+        <p:style>
+          <a:lnRef idx="2">
+            <a:schemeClr val="dk1"/>
+          </a:lnRef>
+          <a:fillRef idx="1">
+            <a:schemeClr val="lt1"/>
+          </a:fillRef>
+          <a:effectRef idx="0">
+            <a:schemeClr val="dk1"/>
+          </a:effectRef>
+          <a:fontRef idx="minor">
+            <a:schemeClr val="dk1"/>
+          </a:fontRef>
+        </p:style>
+        <p:txBody>
+          <a:bodyPr lIns="0" tIns="0" rIns="0" bIns="0" rtlCol="0" anchor="ctr"/>
+          <a:lstStyle/>
+          <a:p>
+            <a:pPr algn="ctr"/>
+            <a:r>
+              <a:rPr lang="en-AU" sz="1400" dirty="0"/>
+              <a:t>Zenme Framework</a:t>
+            </a:r>
+          </a:p>
+        </p:txBody>
+      </p:sp>
+      <p:sp>
+        <p:nvSpPr>
+          <p:cNvPr id="24" name="Rectangle: Rounded Corners 23">
+            <a:extLst>
+              <a:ext uri="{FF2B5EF4-FFF2-40B4-BE49-F238E27FC236}">
+                <a16:creationId xmlns:a16="http://schemas.microsoft.com/office/drawing/2014/main" id="{DFC0DCAC-8D6F-60E5-1D7D-29759058F2A0}"/>
+              </a:ext>
+            </a:extLst>
+          </p:cNvPr>
+          <p:cNvSpPr/>
+          <p:nvPr/>
+        </p:nvSpPr>
+        <p:spPr>
+          <a:xfrm>
+            <a:off x="8157305" y="5181191"/>
+            <a:ext cx="1440000" cy="540000"/>
+          </a:xfrm>
+          <a:prstGeom prst="roundRect">
+            <a:avLst/>
+          </a:prstGeom>
+        </p:spPr>
+        <p:style>
+          <a:lnRef idx="2">
+            <a:schemeClr val="dk1"/>
+          </a:lnRef>
+          <a:fillRef idx="1">
+            <a:schemeClr val="lt1"/>
+          </a:fillRef>
+          <a:effectRef idx="0">
+            <a:schemeClr val="dk1"/>
+          </a:effectRef>
+          <a:fontRef idx="minor">
+            <a:schemeClr val="dk1"/>
+          </a:fontRef>
+        </p:style>
+        <p:txBody>
+          <a:bodyPr lIns="0" tIns="0" rIns="0" bIns="0" rtlCol="0" anchor="ctr"/>
+          <a:lstStyle/>
+          <a:p>
+            <a:pPr algn="ctr"/>
+            <a:r>
+              <a:rPr lang="en-AU" sz="1400" dirty="0"/>
+              <a:t>Abc AI </a:t>
+            </a:r>
+          </a:p>
+        </p:txBody>
+      </p:sp>
+      <p:sp>
+        <p:nvSpPr>
+          <p:cNvPr id="25" name="Rectangle: Rounded Corners 24">
+            <a:extLst>
+              <a:ext uri="{FF2B5EF4-FFF2-40B4-BE49-F238E27FC236}">
+                <a16:creationId xmlns:a16="http://schemas.microsoft.com/office/drawing/2014/main" id="{7E57C625-8045-93BB-BAB5-E636295AC54B}"/>
+              </a:ext>
+            </a:extLst>
+          </p:cNvPr>
+          <p:cNvSpPr/>
+          <p:nvPr/>
+        </p:nvSpPr>
+        <p:spPr>
+          <a:xfrm>
+            <a:off x="8157305" y="5892981"/>
+            <a:ext cx="1440000" cy="540000"/>
+          </a:xfrm>
+          <a:prstGeom prst="roundRect">
+            <a:avLst/>
+          </a:prstGeom>
+        </p:spPr>
+        <p:style>
+          <a:lnRef idx="2">
+            <a:schemeClr val="dk1"/>
+          </a:lnRef>
+          <a:fillRef idx="1">
+            <a:schemeClr val="lt1"/>
+          </a:fillRef>
+          <a:effectRef idx="0">
+            <a:schemeClr val="dk1"/>
+          </a:effectRef>
+          <a:fontRef idx="minor">
+            <a:schemeClr val="dk1"/>
+          </a:fontRef>
+        </p:style>
+        <p:txBody>
+          <a:bodyPr lIns="0" tIns="0" rIns="0" bIns="0" rtlCol="0" anchor="ctr"/>
+          <a:lstStyle/>
+          <a:p>
+            <a:pPr algn="ctr"/>
+            <a:r>
+              <a:rPr lang="en-AU" sz="1400" dirty="0"/>
+              <a:t>Xyz App / AI </a:t>
+            </a:r>
+          </a:p>
+        </p:txBody>
+      </p:sp>
+      <p:pic>
+        <p:nvPicPr>
+          <p:cNvPr id="27" name="Graphic 26" descr="User with solid fill">
+            <a:extLst>
+              <a:ext uri="{FF2B5EF4-FFF2-40B4-BE49-F238E27FC236}">
+                <a16:creationId xmlns:a16="http://schemas.microsoft.com/office/drawing/2014/main" id="{6F195FC8-1803-92EF-4F14-8B7A5CB0E3FF}"/>
+              </a:ext>
+            </a:extLst>
+          </p:cNvPr>
+          <p:cNvPicPr>
+            <a:picLocks noChangeAspect="1"/>
+          </p:cNvPicPr>
+          <p:nvPr/>
+        </p:nvPicPr>
+        <p:blipFill>
+          <a:blip>
+            <a:extLst>
+              <a:ext uri="{96DAC541-7B7A-43D3-8B79-37D633B846F1}">
+                <asvg:svgBlip xmlns:asvg="http://schemas.microsoft.com/office/drawing/2016/SVG/main" r:embed="rId2"/>
+              </a:ext>
+            </a:extLst>
+          </a:blip>
+          <a:srcRect l="16685" t="13871" r="16727" b="13810"/>
+          <a:stretch>
+            <a:fillRect/>
+          </a:stretch>
+        </p:blipFill>
+        <p:spPr>
+          <a:xfrm>
+            <a:off x="11064399" y="3433676"/>
+            <a:ext cx="479426" cy="520701"/>
+          </a:xfrm>
+          <a:prstGeom prst="rect">
+            <a:avLst/>
+          </a:prstGeom>
+        </p:spPr>
+      </p:pic>
+      <p:sp>
+        <p:nvSpPr>
+          <p:cNvPr id="31" name="Rectangle 30">
+            <a:extLst>
+              <a:ext uri="{FF2B5EF4-FFF2-40B4-BE49-F238E27FC236}">
+                <a16:creationId xmlns:a16="http://schemas.microsoft.com/office/drawing/2014/main" id="{2F8BAECC-2BDC-9771-856C-58313CA1BB60}"/>
+              </a:ext>
+            </a:extLst>
+          </p:cNvPr>
+          <p:cNvSpPr/>
+          <p:nvPr/>
+        </p:nvSpPr>
+        <p:spPr>
+          <a:xfrm>
+            <a:off x="10854112" y="3152680"/>
+            <a:ext cx="900000" cy="180000"/>
+          </a:xfrm>
+          <a:prstGeom prst="rect">
+            <a:avLst/>
+          </a:prstGeom>
+          <a:noFill/>
+          <a:ln>
+            <a:noFill/>
+          </a:ln>
+        </p:spPr>
+        <p:style>
+          <a:lnRef idx="2">
+            <a:schemeClr val="dk1"/>
+          </a:lnRef>
+          <a:fillRef idx="1">
+            <a:schemeClr val="lt1"/>
+          </a:fillRef>
+          <a:effectRef idx="0">
+            <a:schemeClr val="dk1"/>
+          </a:effectRef>
+          <a:fontRef idx="minor">
+            <a:schemeClr val="dk1"/>
+          </a:fontRef>
+        </p:style>
+        <p:txBody>
+          <a:bodyPr lIns="0" tIns="0" rIns="0" bIns="0" rtlCol="0" anchor="ctr"/>
+          <a:lstStyle/>
+          <a:p>
+            <a:pPr algn="ctr"/>
+            <a:r>
+              <a:rPr lang="en-AU" sz="1200" dirty="0"/>
+              <a:t>Zenme Developer</a:t>
+            </a:r>
+          </a:p>
+        </p:txBody>
+      </p:sp>
+      <p:pic>
+        <p:nvPicPr>
+          <p:cNvPr id="32" name="Graphic 31" descr="User with solid fill">
+            <a:extLst>
+              <a:ext uri="{FF2B5EF4-FFF2-40B4-BE49-F238E27FC236}">
+                <a16:creationId xmlns:a16="http://schemas.microsoft.com/office/drawing/2014/main" id="{F78F9301-A800-835B-92DB-A0156F5F8312}"/>
+              </a:ext>
+            </a:extLst>
+          </p:cNvPr>
+          <p:cNvPicPr>
+            <a:picLocks noChangeAspect="1"/>
+          </p:cNvPicPr>
+          <p:nvPr/>
+        </p:nvPicPr>
+        <p:blipFill>
+          <a:blip>
+            <a:extLst>
+              <a:ext uri="{96DAC541-7B7A-43D3-8B79-37D633B846F1}">
+                <asvg:svgBlip xmlns:asvg="http://schemas.microsoft.com/office/drawing/2016/SVG/main" r:embed="rId2"/>
+              </a:ext>
+            </a:extLst>
+          </a:blip>
+          <a:srcRect l="16685" t="13871" r="16727" b="13810"/>
+          <a:stretch>
+            <a:fillRect/>
+          </a:stretch>
+        </p:blipFill>
+        <p:spPr>
+          <a:xfrm>
+            <a:off x="11064399" y="4689292"/>
+            <a:ext cx="479426" cy="520701"/>
+          </a:xfrm>
+          <a:prstGeom prst="rect">
+            <a:avLst/>
+          </a:prstGeom>
+        </p:spPr>
+      </p:pic>
+      <p:sp>
+        <p:nvSpPr>
+          <p:cNvPr id="33" name="Rectangle 32">
+            <a:extLst>
+              <a:ext uri="{FF2B5EF4-FFF2-40B4-BE49-F238E27FC236}">
+                <a16:creationId xmlns:a16="http://schemas.microsoft.com/office/drawing/2014/main" id="{53DDDB71-B573-F3D6-973F-163DFBC4507A}"/>
+              </a:ext>
+            </a:extLst>
+          </p:cNvPr>
+          <p:cNvSpPr/>
+          <p:nvPr/>
+        </p:nvSpPr>
+        <p:spPr>
+          <a:xfrm>
+            <a:off x="10854112" y="4408296"/>
+            <a:ext cx="900000" cy="180000"/>
+          </a:xfrm>
+          <a:prstGeom prst="rect">
+            <a:avLst/>
+          </a:prstGeom>
+          <a:noFill/>
+          <a:ln>
+            <a:noFill/>
+          </a:ln>
+        </p:spPr>
+        <p:style>
+          <a:lnRef idx="2">
+            <a:schemeClr val="dk1"/>
+          </a:lnRef>
+          <a:fillRef idx="1">
+            <a:schemeClr val="lt1"/>
+          </a:fillRef>
+          <a:effectRef idx="0">
+            <a:schemeClr val="dk1"/>
+          </a:effectRef>
+          <a:fontRef idx="minor">
+            <a:schemeClr val="dk1"/>
+          </a:fontRef>
+        </p:style>
+        <p:txBody>
+          <a:bodyPr lIns="0" tIns="0" rIns="0" bIns="0" rtlCol="0" anchor="ctr"/>
+          <a:lstStyle/>
+          <a:p>
+            <a:pPr algn="ctr"/>
+            <a:r>
+              <a:rPr lang="en-AU" sz="1200" dirty="0"/>
+              <a:t>Abc Developer</a:t>
+            </a:r>
+          </a:p>
+        </p:txBody>
+      </p:sp>
+      <p:pic>
+        <p:nvPicPr>
+          <p:cNvPr id="34" name="Graphic 33" descr="User with solid fill">
+            <a:extLst>
+              <a:ext uri="{FF2B5EF4-FFF2-40B4-BE49-F238E27FC236}">
+                <a16:creationId xmlns:a16="http://schemas.microsoft.com/office/drawing/2014/main" id="{C89A7CAA-EC2F-72D3-1119-E0FC8DDC79A8}"/>
+              </a:ext>
+            </a:extLst>
+          </p:cNvPr>
+          <p:cNvPicPr>
+            <a:picLocks noChangeAspect="1"/>
+          </p:cNvPicPr>
+          <p:nvPr/>
+        </p:nvPicPr>
+        <p:blipFill>
+          <a:blip>
+            <a:extLst>
+              <a:ext uri="{96DAC541-7B7A-43D3-8B79-37D633B846F1}">
+                <asvg:svgBlip xmlns:asvg="http://schemas.microsoft.com/office/drawing/2016/SVG/main" r:embed="rId2"/>
+              </a:ext>
+            </a:extLst>
+          </a:blip>
+          <a:srcRect l="16685" t="13871" r="16727" b="13810"/>
+          <a:stretch>
+            <a:fillRect/>
+          </a:stretch>
+        </p:blipFill>
+        <p:spPr>
+          <a:xfrm>
+            <a:off x="11064399" y="5963909"/>
+            <a:ext cx="479426" cy="520701"/>
+          </a:xfrm>
+          <a:prstGeom prst="rect">
+            <a:avLst/>
+          </a:prstGeom>
+        </p:spPr>
+      </p:pic>
+      <p:sp>
+        <p:nvSpPr>
+          <p:cNvPr id="35" name="Rectangle 34">
+            <a:extLst>
+              <a:ext uri="{FF2B5EF4-FFF2-40B4-BE49-F238E27FC236}">
+                <a16:creationId xmlns:a16="http://schemas.microsoft.com/office/drawing/2014/main" id="{229B3F67-D4E3-4C0A-9775-46E183D84A7D}"/>
+              </a:ext>
+            </a:extLst>
+          </p:cNvPr>
+          <p:cNvSpPr/>
+          <p:nvPr/>
+        </p:nvSpPr>
+        <p:spPr>
+          <a:xfrm>
+            <a:off x="10854112" y="5682913"/>
+            <a:ext cx="900000" cy="180000"/>
+          </a:xfrm>
+          <a:prstGeom prst="rect">
+            <a:avLst/>
+          </a:prstGeom>
+          <a:noFill/>
+          <a:ln>
+            <a:noFill/>
+          </a:ln>
+        </p:spPr>
+        <p:style>
+          <a:lnRef idx="2">
+            <a:schemeClr val="dk1"/>
+          </a:lnRef>
+          <a:fillRef idx="1">
+            <a:schemeClr val="lt1"/>
+          </a:fillRef>
+          <a:effectRef idx="0">
+            <a:schemeClr val="dk1"/>
+          </a:effectRef>
+          <a:fontRef idx="minor">
+            <a:schemeClr val="dk1"/>
+          </a:fontRef>
+        </p:style>
+        <p:txBody>
+          <a:bodyPr lIns="0" tIns="0" rIns="0" bIns="0" rtlCol="0" anchor="ctr"/>
+          <a:lstStyle/>
+          <a:p>
+            <a:pPr algn="ctr"/>
+            <a:r>
+              <a:rPr lang="en-AU" sz="1200" dirty="0"/>
+              <a:t>Xyz Developer</a:t>
+            </a:r>
+          </a:p>
+        </p:txBody>
+      </p:sp>
+      <p:cxnSp>
+        <p:nvCxnSpPr>
+          <p:cNvPr id="36" name="Straight Connector 35">
+            <a:extLst>
+              <a:ext uri="{FF2B5EF4-FFF2-40B4-BE49-F238E27FC236}">
+                <a16:creationId xmlns:a16="http://schemas.microsoft.com/office/drawing/2014/main" id="{2EF15B87-FDC6-8EA3-F178-48E6CA2D791F}"/>
+              </a:ext>
+            </a:extLst>
+          </p:cNvPr>
+          <p:cNvCxnSpPr>
+            <a:cxnSpLocks/>
+            <a:stCxn id="27" idx="1"/>
+            <a:endCxn id="23" idx="3"/>
+          </p:cNvCxnSpPr>
+          <p:nvPr/>
+        </p:nvCxnSpPr>
+        <p:spPr>
+          <a:xfrm flipH="1" flipV="1">
+            <a:off x="9597305" y="3315818"/>
+            <a:ext cx="1467094" cy="378209"/>
+          </a:xfrm>
+          <a:prstGeom prst="line">
+            <a:avLst/>
+          </a:prstGeom>
+          <a:ln>
+            <a:headEnd type="none" w="med" len="med"/>
+            <a:tailEnd type="triangle" w="med" len="med"/>
+          </a:ln>
+        </p:spPr>
+        <p:style>
+          <a:lnRef idx="2">
+            <a:schemeClr val="accent2"/>
+          </a:lnRef>
+          <a:fillRef idx="0">
+            <a:schemeClr val="accent2"/>
+          </a:fillRef>
+          <a:effectRef idx="1">
+            <a:schemeClr val="accent2"/>
+          </a:effectRef>
+          <a:fontRef idx="minor">
+            <a:schemeClr val="tx1"/>
+          </a:fontRef>
+        </p:style>
+      </p:cxnSp>
+      <p:cxnSp>
+        <p:nvCxnSpPr>
+          <p:cNvPr id="39" name="Straight Connector 38">
+            <a:extLst>
+              <a:ext uri="{FF2B5EF4-FFF2-40B4-BE49-F238E27FC236}">
+                <a16:creationId xmlns:a16="http://schemas.microsoft.com/office/drawing/2014/main" id="{BFAE4A1E-90E1-5B30-33C5-0E675BD89C69}"/>
+              </a:ext>
+            </a:extLst>
+          </p:cNvPr>
+          <p:cNvCxnSpPr>
+            <a:cxnSpLocks/>
+            <a:stCxn id="27" idx="1"/>
+            <a:endCxn id="21" idx="3"/>
+          </p:cNvCxnSpPr>
+          <p:nvPr/>
+        </p:nvCxnSpPr>
+        <p:spPr>
+          <a:xfrm flipH="1">
+            <a:off x="9597305" y="3694027"/>
+            <a:ext cx="1467094" cy="333582"/>
+          </a:xfrm>
+          <a:prstGeom prst="line">
+            <a:avLst/>
+          </a:prstGeom>
+          <a:ln>
+            <a:headEnd type="none" w="med" len="med"/>
+            <a:tailEnd type="triangle" w="med" len="med"/>
+          </a:ln>
+        </p:spPr>
+        <p:style>
+          <a:lnRef idx="2">
+            <a:schemeClr val="accent2"/>
+          </a:lnRef>
+          <a:fillRef idx="0">
+            <a:schemeClr val="accent2"/>
+          </a:fillRef>
+          <a:effectRef idx="1">
+            <a:schemeClr val="accent2"/>
+          </a:effectRef>
+          <a:fontRef idx="minor">
+            <a:schemeClr val="tx1"/>
+          </a:fontRef>
+        </p:style>
+      </p:cxnSp>
+      <p:cxnSp>
+        <p:nvCxnSpPr>
+          <p:cNvPr id="41" name="Straight Connector 40">
+            <a:extLst>
+              <a:ext uri="{FF2B5EF4-FFF2-40B4-BE49-F238E27FC236}">
+                <a16:creationId xmlns:a16="http://schemas.microsoft.com/office/drawing/2014/main" id="{37051140-62FB-7338-1908-0A659C889645}"/>
+              </a:ext>
+            </a:extLst>
+          </p:cNvPr>
+          <p:cNvCxnSpPr>
+            <a:cxnSpLocks/>
+            <a:stCxn id="27" idx="1"/>
+            <a:endCxn id="22" idx="3"/>
+          </p:cNvCxnSpPr>
+          <p:nvPr/>
+        </p:nvCxnSpPr>
+        <p:spPr>
+          <a:xfrm flipH="1">
+            <a:off x="9597305" y="3694027"/>
+            <a:ext cx="1467094" cy="1045373"/>
+          </a:xfrm>
+          <a:prstGeom prst="line">
+            <a:avLst/>
+          </a:prstGeom>
+          <a:ln>
+            <a:headEnd type="none" w="med" len="med"/>
+            <a:tailEnd type="triangle" w="med" len="med"/>
+          </a:ln>
+        </p:spPr>
+        <p:style>
+          <a:lnRef idx="2">
+            <a:schemeClr val="accent2"/>
+          </a:lnRef>
+          <a:fillRef idx="0">
+            <a:schemeClr val="accent2"/>
+          </a:fillRef>
+          <a:effectRef idx="1">
+            <a:schemeClr val="accent2"/>
+          </a:effectRef>
+          <a:fontRef idx="minor">
+            <a:schemeClr val="tx1"/>
+          </a:fontRef>
+        </p:style>
+      </p:cxnSp>
+      <p:cxnSp>
+        <p:nvCxnSpPr>
+          <p:cNvPr id="43" name="Straight Connector 42">
+            <a:extLst>
+              <a:ext uri="{FF2B5EF4-FFF2-40B4-BE49-F238E27FC236}">
+                <a16:creationId xmlns:a16="http://schemas.microsoft.com/office/drawing/2014/main" id="{BC64E114-6516-FC4A-6594-7C33EC8FE5FD}"/>
+              </a:ext>
+            </a:extLst>
+          </p:cNvPr>
+          <p:cNvCxnSpPr>
+            <a:cxnSpLocks/>
+            <a:stCxn id="32" idx="1"/>
+            <a:endCxn id="24" idx="3"/>
+          </p:cNvCxnSpPr>
+          <p:nvPr/>
+        </p:nvCxnSpPr>
+        <p:spPr>
+          <a:xfrm flipH="1">
+            <a:off x="9597305" y="4949643"/>
+            <a:ext cx="1467094" cy="501548"/>
+          </a:xfrm>
+          <a:prstGeom prst="line">
+            <a:avLst/>
+          </a:prstGeom>
+          <a:ln>
+            <a:headEnd type="none" w="med" len="med"/>
+            <a:tailEnd type="triangle" w="med" len="med"/>
+          </a:ln>
+        </p:spPr>
+        <p:style>
+          <a:lnRef idx="2">
+            <a:schemeClr val="accent2"/>
+          </a:lnRef>
+          <a:fillRef idx="0">
+            <a:schemeClr val="accent2"/>
+          </a:fillRef>
+          <a:effectRef idx="1">
+            <a:schemeClr val="accent2"/>
+          </a:effectRef>
+          <a:fontRef idx="minor">
+            <a:schemeClr val="tx1"/>
+          </a:fontRef>
+        </p:style>
+      </p:cxnSp>
+      <p:cxnSp>
+        <p:nvCxnSpPr>
+          <p:cNvPr id="44" name="Straight Connector 43">
+            <a:extLst>
+              <a:ext uri="{FF2B5EF4-FFF2-40B4-BE49-F238E27FC236}">
+                <a16:creationId xmlns:a16="http://schemas.microsoft.com/office/drawing/2014/main" id="{39213E9E-451A-3D6B-721E-777977659EDE}"/>
+              </a:ext>
+            </a:extLst>
+          </p:cNvPr>
+          <p:cNvCxnSpPr>
+            <a:cxnSpLocks/>
+            <a:stCxn id="34" idx="1"/>
+            <a:endCxn id="25" idx="3"/>
+          </p:cNvCxnSpPr>
+          <p:nvPr/>
+        </p:nvCxnSpPr>
+        <p:spPr>
+          <a:xfrm flipH="1" flipV="1">
+            <a:off x="9597305" y="6162981"/>
+            <a:ext cx="1467094" cy="61279"/>
+          </a:xfrm>
+          <a:prstGeom prst="line">
+            <a:avLst/>
+          </a:prstGeom>
+          <a:ln>
+            <a:headEnd type="none" w="med" len="med"/>
+            <a:tailEnd type="triangle" w="med" len="med"/>
+          </a:ln>
+        </p:spPr>
+        <p:style>
+          <a:lnRef idx="2">
+            <a:schemeClr val="accent2"/>
+          </a:lnRef>
+          <a:fillRef idx="0">
+            <a:schemeClr val="accent2"/>
+          </a:fillRef>
+          <a:effectRef idx="1">
+            <a:schemeClr val="accent2"/>
+          </a:effectRef>
+          <a:fontRef idx="minor">
+            <a:schemeClr val="tx1"/>
+          </a:fontRef>
+        </p:style>
+      </p:cxnSp>
+      <p:pic>
+        <p:nvPicPr>
+          <p:cNvPr id="59" name="Graphic 58" descr="User with solid fill">
+            <a:extLst>
+              <a:ext uri="{FF2B5EF4-FFF2-40B4-BE49-F238E27FC236}">
+                <a16:creationId xmlns:a16="http://schemas.microsoft.com/office/drawing/2014/main" id="{7427A992-5E6C-087D-5C1B-F59BEE482B09}"/>
+              </a:ext>
+            </a:extLst>
+          </p:cNvPr>
+          <p:cNvPicPr>
+            <a:picLocks noChangeAspect="1"/>
+          </p:cNvPicPr>
+          <p:nvPr/>
+        </p:nvPicPr>
+        <p:blipFill>
+          <a:blip>
+            <a:extLst>
+              <a:ext uri="{96DAC541-7B7A-43D3-8B79-37D633B846F1}">
+                <asvg:svgBlip xmlns:asvg="http://schemas.microsoft.com/office/drawing/2016/SVG/main" r:embed="rId2"/>
+              </a:ext>
+            </a:extLst>
+          </a:blip>
+          <a:srcRect l="16685" t="13871" r="16727" b="13810"/>
+          <a:stretch>
+            <a:fillRect/>
+          </a:stretch>
+        </p:blipFill>
+        <p:spPr>
+          <a:xfrm>
+            <a:off x="6455585" y="3032976"/>
+            <a:ext cx="479426" cy="520701"/>
+          </a:xfrm>
+          <a:prstGeom prst="rect">
+            <a:avLst/>
+          </a:prstGeom>
+        </p:spPr>
+      </p:pic>
+      <p:sp>
+        <p:nvSpPr>
+          <p:cNvPr id="60" name="Rectangle 59">
+            <a:extLst>
+              <a:ext uri="{FF2B5EF4-FFF2-40B4-BE49-F238E27FC236}">
+                <a16:creationId xmlns:a16="http://schemas.microsoft.com/office/drawing/2014/main" id="{9903C4F5-8566-5E27-CB2A-6BE2D7A870B1}"/>
+              </a:ext>
+            </a:extLst>
+          </p:cNvPr>
+          <p:cNvSpPr/>
+          <p:nvPr/>
+        </p:nvSpPr>
+        <p:spPr>
+          <a:xfrm>
+            <a:off x="6245298" y="2751980"/>
+            <a:ext cx="900000" cy="180000"/>
+          </a:xfrm>
+          <a:prstGeom prst="rect">
+            <a:avLst/>
+          </a:prstGeom>
+          <a:noFill/>
+          <a:ln>
+            <a:noFill/>
+          </a:ln>
+        </p:spPr>
+        <p:style>
+          <a:lnRef idx="2">
+            <a:schemeClr val="dk1"/>
+          </a:lnRef>
+          <a:fillRef idx="1">
+            <a:schemeClr val="lt1"/>
+          </a:fillRef>
+          <a:effectRef idx="0">
+            <a:schemeClr val="dk1"/>
+          </a:effectRef>
+          <a:fontRef idx="minor">
+            <a:schemeClr val="dk1"/>
+          </a:fontRef>
+        </p:style>
+        <p:txBody>
+          <a:bodyPr lIns="0" tIns="0" rIns="0" bIns="0" rtlCol="0" anchor="ctr"/>
+          <a:lstStyle/>
+          <a:p>
+            <a:pPr algn="ctr"/>
+            <a:r>
+              <a:rPr lang="en-AU" sz="1200" dirty="0"/>
+              <a:t>Host A Technician</a:t>
+            </a:r>
+          </a:p>
+        </p:txBody>
+      </p:sp>
+      <p:sp>
+        <p:nvSpPr>
+          <p:cNvPr id="61" name="Rectangle: Rounded Corners 60">
+            <a:extLst>
+              <a:ext uri="{FF2B5EF4-FFF2-40B4-BE49-F238E27FC236}">
+                <a16:creationId xmlns:a16="http://schemas.microsoft.com/office/drawing/2014/main" id="{D442FAE3-4B00-1562-4632-678E0B42D232}"/>
+              </a:ext>
+            </a:extLst>
+          </p:cNvPr>
+          <p:cNvSpPr/>
+          <p:nvPr/>
+        </p:nvSpPr>
+        <p:spPr>
+          <a:xfrm>
+            <a:off x="2805112" y="3495552"/>
+            <a:ext cx="1440000" cy="180000"/>
+          </a:xfrm>
+          <a:prstGeom prst="roundRect">
+            <a:avLst/>
+          </a:prstGeom>
+        </p:spPr>
+        <p:style>
+          <a:lnRef idx="2">
+            <a:schemeClr val="dk1"/>
+          </a:lnRef>
+          <a:fillRef idx="1">
+            <a:schemeClr val="lt1"/>
+          </a:fillRef>
+          <a:effectRef idx="0">
+            <a:schemeClr val="dk1"/>
+          </a:effectRef>
+          <a:fontRef idx="minor">
+            <a:schemeClr val="dk1"/>
+          </a:fontRef>
+        </p:style>
+        <p:txBody>
+          <a:bodyPr lIns="0" tIns="0" rIns="0" bIns="0" rtlCol="0" anchor="ctr"/>
+          <a:lstStyle/>
+          <a:p>
+            <a:pPr algn="ctr"/>
+            <a:r>
+              <a:rPr lang="en-AU" sz="1200" dirty="0"/>
+              <a:t>Zenme App</a:t>
+            </a:r>
+          </a:p>
+        </p:txBody>
+      </p:sp>
+      <p:sp>
+        <p:nvSpPr>
+          <p:cNvPr id="62" name="Rectangle: Rounded Corners 61">
+            <a:extLst>
+              <a:ext uri="{FF2B5EF4-FFF2-40B4-BE49-F238E27FC236}">
+                <a16:creationId xmlns:a16="http://schemas.microsoft.com/office/drawing/2014/main" id="{4AB76F3B-4B0B-A541-89CF-3E08695DB84C}"/>
+              </a:ext>
+            </a:extLst>
+          </p:cNvPr>
+          <p:cNvSpPr/>
+          <p:nvPr/>
+        </p:nvSpPr>
+        <p:spPr>
+          <a:xfrm>
+            <a:off x="2805112" y="3811726"/>
+            <a:ext cx="1440000" cy="180000"/>
+          </a:xfrm>
+          <a:prstGeom prst="roundRect">
+            <a:avLst/>
+          </a:prstGeom>
+        </p:spPr>
+        <p:style>
+          <a:lnRef idx="2">
+            <a:schemeClr val="dk1"/>
+          </a:lnRef>
+          <a:fillRef idx="1">
+            <a:schemeClr val="lt1"/>
+          </a:fillRef>
+          <a:effectRef idx="0">
+            <a:schemeClr val="dk1"/>
+          </a:effectRef>
+          <a:fontRef idx="minor">
+            <a:schemeClr val="dk1"/>
+          </a:fontRef>
+        </p:style>
+        <p:txBody>
+          <a:bodyPr lIns="0" tIns="0" rIns="0" bIns="0" rtlCol="0" anchor="ctr"/>
+          <a:lstStyle/>
+          <a:p>
+            <a:pPr algn="ctr"/>
+            <a:r>
+              <a:rPr lang="en-AU" sz="1200" dirty="0"/>
+              <a:t>Zenme AI</a:t>
+            </a:r>
+          </a:p>
+        </p:txBody>
+      </p:sp>
+      <p:sp>
+        <p:nvSpPr>
+          <p:cNvPr id="63" name="Rectangle: Rounded Corners 62">
+            <a:extLst>
+              <a:ext uri="{FF2B5EF4-FFF2-40B4-BE49-F238E27FC236}">
+                <a16:creationId xmlns:a16="http://schemas.microsoft.com/office/drawing/2014/main" id="{CE5709D1-6386-D45E-080F-70EF7E5EF74B}"/>
+              </a:ext>
+            </a:extLst>
+          </p:cNvPr>
+          <p:cNvSpPr/>
+          <p:nvPr/>
+        </p:nvSpPr>
+        <p:spPr>
+          <a:xfrm>
+            <a:off x="2805112" y="4127900"/>
+            <a:ext cx="1440000" cy="180000"/>
+          </a:xfrm>
+          <a:prstGeom prst="roundRect">
+            <a:avLst/>
+          </a:prstGeom>
+        </p:spPr>
+        <p:style>
+          <a:lnRef idx="2">
+            <a:schemeClr val="dk1"/>
+          </a:lnRef>
+          <a:fillRef idx="1">
+            <a:schemeClr val="lt1"/>
+          </a:fillRef>
+          <a:effectRef idx="0">
+            <a:schemeClr val="dk1"/>
+          </a:effectRef>
+          <a:fontRef idx="minor">
+            <a:schemeClr val="dk1"/>
+          </a:fontRef>
+        </p:style>
+        <p:txBody>
+          <a:bodyPr lIns="0" tIns="0" rIns="0" bIns="0" rtlCol="0" anchor="ctr"/>
+          <a:lstStyle/>
+          <a:p>
+            <a:pPr algn="ctr"/>
+            <a:r>
+              <a:rPr lang="en-AU" sz="1200" dirty="0"/>
+              <a:t>Abc AI</a:t>
+            </a:r>
+          </a:p>
+        </p:txBody>
+      </p:sp>
+      <p:sp>
+        <p:nvSpPr>
+          <p:cNvPr id="64" name="Rectangle 63">
+            <a:extLst>
+              <a:ext uri="{FF2B5EF4-FFF2-40B4-BE49-F238E27FC236}">
+                <a16:creationId xmlns:a16="http://schemas.microsoft.com/office/drawing/2014/main" id="{75E635DE-7961-EB38-906B-50DD67775C53}"/>
+              </a:ext>
+            </a:extLst>
+          </p:cNvPr>
+          <p:cNvSpPr/>
+          <p:nvPr/>
+        </p:nvSpPr>
+        <p:spPr>
+          <a:xfrm>
+            <a:off x="2660020" y="4831746"/>
+            <a:ext cx="1730185" cy="1735622"/>
+          </a:xfrm>
+          <a:prstGeom prst="rect">
+            <a:avLst/>
+          </a:prstGeom>
+          <a:ln/>
+        </p:spPr>
+        <p:style>
+          <a:lnRef idx="2">
+            <a:schemeClr val="dk1"/>
+          </a:lnRef>
+          <a:fillRef idx="1">
+            <a:schemeClr val="lt1"/>
+          </a:fillRef>
+          <a:effectRef idx="0">
+            <a:schemeClr val="dk1"/>
+          </a:effectRef>
+          <a:fontRef idx="minor">
+            <a:schemeClr val="dk1"/>
+          </a:fontRef>
+        </p:style>
+        <p:txBody>
+          <a:bodyPr lIns="36000" tIns="0" rIns="0" bIns="0" rtlCol="0" anchor="t"/>
+          <a:lstStyle/>
+          <a:p>
+            <a:pPr algn="ctr"/>
+            <a:r>
+              <a:rPr lang="en-AU" sz="1200" dirty="0"/>
+              <a:t>Host B Org Boundary</a:t>
+            </a:r>
+          </a:p>
+        </p:txBody>
+      </p:sp>
+      <p:sp>
+        <p:nvSpPr>
+          <p:cNvPr id="65" name="Rectangle: Rounded Corners 64">
+            <a:extLst>
+              <a:ext uri="{FF2B5EF4-FFF2-40B4-BE49-F238E27FC236}">
+                <a16:creationId xmlns:a16="http://schemas.microsoft.com/office/drawing/2014/main" id="{EFF7BED3-9002-5763-E829-51C73BBE90A8}"/>
+              </a:ext>
+            </a:extLst>
+          </p:cNvPr>
+          <p:cNvSpPr/>
+          <p:nvPr/>
+        </p:nvSpPr>
+        <p:spPr>
+          <a:xfrm>
+            <a:off x="2805112" y="5241559"/>
+            <a:ext cx="1440000" cy="180000"/>
+          </a:xfrm>
+          <a:prstGeom prst="roundRect">
+            <a:avLst/>
+          </a:prstGeom>
+        </p:spPr>
+        <p:style>
+          <a:lnRef idx="2">
+            <a:schemeClr val="dk1"/>
+          </a:lnRef>
+          <a:fillRef idx="1">
+            <a:schemeClr val="lt1"/>
+          </a:fillRef>
+          <a:effectRef idx="0">
+            <a:schemeClr val="dk1"/>
+          </a:effectRef>
+          <a:fontRef idx="minor">
+            <a:schemeClr val="dk1"/>
+          </a:fontRef>
+        </p:style>
+        <p:txBody>
+          <a:bodyPr lIns="0" tIns="0" rIns="0" bIns="0" rtlCol="0" anchor="ctr"/>
+          <a:lstStyle/>
+          <a:p>
+            <a:pPr algn="ctr"/>
+            <a:r>
+              <a:rPr lang="en-AU" sz="1200" dirty="0"/>
+              <a:t>Zenme Framework</a:t>
+            </a:r>
+          </a:p>
+        </p:txBody>
+      </p:sp>
+      <p:sp>
+        <p:nvSpPr>
+          <p:cNvPr id="66" name="Rectangle: Rounded Corners 65">
+            <a:extLst>
+              <a:ext uri="{FF2B5EF4-FFF2-40B4-BE49-F238E27FC236}">
+                <a16:creationId xmlns:a16="http://schemas.microsoft.com/office/drawing/2014/main" id="{A7661D0F-4CDA-1087-3473-8E6DAB715216}"/>
+              </a:ext>
+            </a:extLst>
+          </p:cNvPr>
+          <p:cNvSpPr/>
+          <p:nvPr/>
+        </p:nvSpPr>
+        <p:spPr>
+          <a:xfrm>
+            <a:off x="2805112" y="5557733"/>
+            <a:ext cx="1440000" cy="180000"/>
+          </a:xfrm>
+          <a:prstGeom prst="roundRect">
+            <a:avLst/>
+          </a:prstGeom>
+        </p:spPr>
+        <p:style>
+          <a:lnRef idx="2">
+            <a:schemeClr val="dk1"/>
+          </a:lnRef>
+          <a:fillRef idx="1">
+            <a:schemeClr val="lt1"/>
+          </a:fillRef>
+          <a:effectRef idx="0">
+            <a:schemeClr val="dk1"/>
+          </a:effectRef>
+          <a:fontRef idx="minor">
+            <a:schemeClr val="dk1"/>
+          </a:fontRef>
+        </p:style>
+        <p:txBody>
+          <a:bodyPr lIns="0" tIns="0" rIns="0" bIns="0" rtlCol="0" anchor="ctr"/>
+          <a:lstStyle/>
+          <a:p>
+            <a:pPr algn="ctr"/>
+            <a:r>
+              <a:rPr lang="en-AU" sz="1200" dirty="0"/>
+              <a:t>Zenme App</a:t>
+            </a:r>
+          </a:p>
+        </p:txBody>
+      </p:sp>
+      <p:sp>
+        <p:nvSpPr>
+          <p:cNvPr id="67" name="Rectangle: Rounded Corners 66">
+            <a:extLst>
+              <a:ext uri="{FF2B5EF4-FFF2-40B4-BE49-F238E27FC236}">
+                <a16:creationId xmlns:a16="http://schemas.microsoft.com/office/drawing/2014/main" id="{5B7D7721-D2B7-57BB-1432-14F725827725}"/>
+              </a:ext>
+            </a:extLst>
+          </p:cNvPr>
+          <p:cNvSpPr/>
+          <p:nvPr/>
+        </p:nvSpPr>
+        <p:spPr>
+          <a:xfrm>
+            <a:off x="2805112" y="5873907"/>
+            <a:ext cx="1440000" cy="180000"/>
+          </a:xfrm>
+          <a:prstGeom prst="roundRect">
+            <a:avLst/>
+          </a:prstGeom>
+        </p:spPr>
+        <p:style>
+          <a:lnRef idx="2">
+            <a:schemeClr val="dk1"/>
+          </a:lnRef>
+          <a:fillRef idx="1">
+            <a:schemeClr val="lt1"/>
+          </a:fillRef>
+          <a:effectRef idx="0">
+            <a:schemeClr val="dk1"/>
+          </a:effectRef>
+          <a:fontRef idx="minor">
+            <a:schemeClr val="dk1"/>
+          </a:fontRef>
+        </p:style>
+        <p:txBody>
+          <a:bodyPr lIns="0" tIns="0" rIns="0" bIns="0" rtlCol="0" anchor="ctr"/>
+          <a:lstStyle/>
+          <a:p>
+            <a:pPr algn="ctr"/>
+            <a:r>
+              <a:rPr lang="en-AU" sz="1200" dirty="0"/>
+              <a:t>Zenme AI</a:t>
+            </a:r>
+          </a:p>
+        </p:txBody>
+      </p:sp>
+      <p:sp>
+        <p:nvSpPr>
+          <p:cNvPr id="68" name="Rectangle: Rounded Corners 67">
+            <a:extLst>
+              <a:ext uri="{FF2B5EF4-FFF2-40B4-BE49-F238E27FC236}">
+                <a16:creationId xmlns:a16="http://schemas.microsoft.com/office/drawing/2014/main" id="{65C2F3E7-D3F8-992A-6171-8C87360958D8}"/>
+              </a:ext>
+            </a:extLst>
+          </p:cNvPr>
+          <p:cNvSpPr/>
+          <p:nvPr/>
+        </p:nvSpPr>
+        <p:spPr>
+          <a:xfrm>
+            <a:off x="2805112" y="6190081"/>
+            <a:ext cx="1440000" cy="180000"/>
+          </a:xfrm>
+          <a:prstGeom prst="roundRect">
+            <a:avLst/>
+          </a:prstGeom>
+        </p:spPr>
+        <p:style>
+          <a:lnRef idx="2">
+            <a:schemeClr val="dk1"/>
+          </a:lnRef>
+          <a:fillRef idx="1">
+            <a:schemeClr val="lt1"/>
+          </a:fillRef>
+          <a:effectRef idx="0">
+            <a:schemeClr val="dk1"/>
+          </a:effectRef>
+          <a:fontRef idx="minor">
+            <a:schemeClr val="dk1"/>
+          </a:fontRef>
+        </p:style>
+        <p:txBody>
+          <a:bodyPr lIns="0" tIns="0" rIns="0" bIns="0" rtlCol="0" anchor="ctr"/>
+          <a:lstStyle/>
+          <a:p>
+            <a:pPr algn="ctr"/>
+            <a:r>
+              <a:rPr lang="en-AU" sz="1200" dirty="0"/>
+              <a:t>Xyz AI</a:t>
+            </a:r>
+          </a:p>
+        </p:txBody>
+      </p:sp>
+      <p:pic>
+        <p:nvPicPr>
+          <p:cNvPr id="69" name="Graphic 68" descr="User with solid fill">
+            <a:extLst>
+              <a:ext uri="{FF2B5EF4-FFF2-40B4-BE49-F238E27FC236}">
+                <a16:creationId xmlns:a16="http://schemas.microsoft.com/office/drawing/2014/main" id="{7676E4AC-C40E-E215-22E4-ED8C37DF54C5}"/>
+              </a:ext>
+            </a:extLst>
+          </p:cNvPr>
+          <p:cNvPicPr>
+            <a:picLocks noChangeAspect="1"/>
+          </p:cNvPicPr>
+          <p:nvPr/>
+        </p:nvPicPr>
+        <p:blipFill>
+          <a:blip>
+            <a:extLst>
+              <a:ext uri="{96DAC541-7B7A-43D3-8B79-37D633B846F1}">
+                <asvg:svgBlip xmlns:asvg="http://schemas.microsoft.com/office/drawing/2016/SVG/main" r:embed="rId2"/>
+              </a:ext>
+            </a:extLst>
+          </a:blip>
+          <a:srcRect l="16685" t="13871" r="16727" b="13810"/>
+          <a:stretch>
+            <a:fillRect/>
+          </a:stretch>
+        </p:blipFill>
+        <p:spPr>
+          <a:xfrm>
+            <a:off x="6455585" y="5666303"/>
+            <a:ext cx="479426" cy="520701"/>
+          </a:xfrm>
+          <a:prstGeom prst="rect">
+            <a:avLst/>
+          </a:prstGeom>
+        </p:spPr>
+      </p:pic>
+      <p:sp>
+        <p:nvSpPr>
+          <p:cNvPr id="70" name="Rectangle 69">
+            <a:extLst>
+              <a:ext uri="{FF2B5EF4-FFF2-40B4-BE49-F238E27FC236}">
+                <a16:creationId xmlns:a16="http://schemas.microsoft.com/office/drawing/2014/main" id="{84070D66-5734-A7A1-AA84-CFD7CC532FD0}"/>
+              </a:ext>
+            </a:extLst>
+          </p:cNvPr>
+          <p:cNvSpPr/>
+          <p:nvPr/>
+        </p:nvSpPr>
+        <p:spPr>
+          <a:xfrm>
+            <a:off x="6245298" y="6285567"/>
+            <a:ext cx="900000" cy="180000"/>
+          </a:xfrm>
+          <a:prstGeom prst="rect">
+            <a:avLst/>
+          </a:prstGeom>
+          <a:noFill/>
+          <a:ln>
+            <a:noFill/>
+          </a:ln>
+        </p:spPr>
+        <p:style>
+          <a:lnRef idx="2">
+            <a:schemeClr val="dk1"/>
+          </a:lnRef>
+          <a:fillRef idx="1">
+            <a:schemeClr val="lt1"/>
+          </a:fillRef>
+          <a:effectRef idx="0">
+            <a:schemeClr val="dk1"/>
+          </a:effectRef>
+          <a:fontRef idx="minor">
+            <a:schemeClr val="dk1"/>
+          </a:fontRef>
+        </p:style>
+        <p:txBody>
+          <a:bodyPr lIns="0" tIns="0" rIns="0" bIns="0" rtlCol="0" anchor="ctr"/>
+          <a:lstStyle/>
+          <a:p>
+            <a:pPr algn="ctr"/>
+            <a:r>
+              <a:rPr lang="en-AU" sz="1200" dirty="0"/>
+              <a:t>Host B Technician</a:t>
+            </a:r>
+          </a:p>
+        </p:txBody>
+      </p:sp>
+      <p:cxnSp>
+        <p:nvCxnSpPr>
+          <p:cNvPr id="71" name="Straight Connector 70">
+            <a:extLst>
+              <a:ext uri="{FF2B5EF4-FFF2-40B4-BE49-F238E27FC236}">
+                <a16:creationId xmlns:a16="http://schemas.microsoft.com/office/drawing/2014/main" id="{2C0D62B1-4040-4A6D-F8BA-A63D427E961A}"/>
+              </a:ext>
+            </a:extLst>
+          </p:cNvPr>
+          <p:cNvCxnSpPr>
+            <a:cxnSpLocks/>
+            <a:stCxn id="59" idx="2"/>
+            <a:endCxn id="6" idx="0"/>
+          </p:cNvCxnSpPr>
+          <p:nvPr/>
+        </p:nvCxnSpPr>
+        <p:spPr>
+          <a:xfrm>
+            <a:off x="6695298" y="3553677"/>
+            <a:ext cx="0" cy="888618"/>
+          </a:xfrm>
+          <a:prstGeom prst="line">
+            <a:avLst/>
+          </a:prstGeom>
+          <a:ln>
+            <a:headEnd type="none" w="med" len="med"/>
+            <a:tailEnd type="triangle" w="med" len="med"/>
+          </a:ln>
+        </p:spPr>
+        <p:style>
+          <a:lnRef idx="2">
+            <a:schemeClr val="accent1"/>
+          </a:lnRef>
+          <a:fillRef idx="0">
+            <a:schemeClr val="accent1"/>
+          </a:fillRef>
+          <a:effectRef idx="1">
+            <a:schemeClr val="accent1"/>
+          </a:effectRef>
+          <a:fontRef idx="minor">
+            <a:schemeClr val="tx1"/>
+          </a:fontRef>
+        </p:style>
+      </p:cxnSp>
+      <p:cxnSp>
+        <p:nvCxnSpPr>
+          <p:cNvPr id="7" name="Straight Connector 15">
+            <a:extLst>
+              <a:ext uri="{FF2B5EF4-FFF2-40B4-BE49-F238E27FC236}">
+                <a16:creationId xmlns:a16="http://schemas.microsoft.com/office/drawing/2014/main" id="{03782993-C8E0-9C01-15FE-31C6A087C7B4}"/>
+              </a:ext>
+            </a:extLst>
+          </p:cNvPr>
+          <p:cNvCxnSpPr>
+            <a:cxnSpLocks/>
+            <a:stCxn id="5" idx="3"/>
+            <a:endCxn id="61" idx="1"/>
+          </p:cNvCxnSpPr>
+          <p:nvPr/>
+        </p:nvCxnSpPr>
+        <p:spPr>
+          <a:xfrm>
+            <a:off x="1040459" y="3495552"/>
+            <a:ext cx="1764653" cy="90000"/>
+          </a:xfrm>
+          <a:prstGeom prst="straightConnector1">
+            <a:avLst/>
+          </a:prstGeom>
+          <a:ln>
+            <a:headEnd type="none" w="med" len="med"/>
+            <a:tailEnd type="triangle" w="med" len="med"/>
+          </a:ln>
+        </p:spPr>
+        <p:style>
+          <a:lnRef idx="2">
+            <a:schemeClr val="accent1"/>
+          </a:lnRef>
+          <a:fillRef idx="0">
+            <a:schemeClr val="accent1"/>
+          </a:fillRef>
+          <a:effectRef idx="1">
+            <a:schemeClr val="accent1"/>
+          </a:effectRef>
+          <a:fontRef idx="minor">
+            <a:schemeClr val="tx1"/>
+          </a:fontRef>
+        </p:style>
+      </p:cxnSp>
+      <p:cxnSp>
+        <p:nvCxnSpPr>
+          <p:cNvPr id="79" name="Straight Connector 78">
+            <a:extLst>
+              <a:ext uri="{FF2B5EF4-FFF2-40B4-BE49-F238E27FC236}">
+                <a16:creationId xmlns:a16="http://schemas.microsoft.com/office/drawing/2014/main" id="{5633A4B4-FB57-FB3F-C14B-FB5EE130E33A}"/>
+              </a:ext>
+            </a:extLst>
+          </p:cNvPr>
+          <p:cNvCxnSpPr>
+            <a:cxnSpLocks/>
+            <a:stCxn id="69" idx="0"/>
+          </p:cNvCxnSpPr>
+          <p:nvPr/>
+        </p:nvCxnSpPr>
+        <p:spPr>
+          <a:xfrm flipV="1">
+            <a:off x="6695298" y="4997165"/>
+            <a:ext cx="0" cy="669138"/>
+          </a:xfrm>
+          <a:prstGeom prst="line">
+            <a:avLst/>
+          </a:prstGeom>
+          <a:ln>
+            <a:headEnd type="none" w="med" len="med"/>
+            <a:tailEnd type="triangle" w="med" len="med"/>
+          </a:ln>
+        </p:spPr>
+        <p:style>
+          <a:lnRef idx="2">
+            <a:schemeClr val="accent1"/>
+          </a:lnRef>
+          <a:fillRef idx="0">
+            <a:schemeClr val="accent1"/>
+          </a:fillRef>
+          <a:effectRef idx="1">
+            <a:schemeClr val="accent1"/>
+          </a:effectRef>
+          <a:fontRef idx="minor">
+            <a:schemeClr val="tx1"/>
+          </a:fontRef>
+        </p:style>
+      </p:cxnSp>
+      <p:cxnSp>
+        <p:nvCxnSpPr>
+          <p:cNvPr id="90" name="Straight Connector 89">
+            <a:extLst>
+              <a:ext uri="{FF2B5EF4-FFF2-40B4-BE49-F238E27FC236}">
+                <a16:creationId xmlns:a16="http://schemas.microsoft.com/office/drawing/2014/main" id="{81117601-5618-BD94-9958-1F42896AD942}"/>
+              </a:ext>
+            </a:extLst>
+          </p:cNvPr>
+          <p:cNvCxnSpPr>
+            <a:cxnSpLocks/>
+            <a:stCxn id="23" idx="1"/>
+            <a:endCxn id="6" idx="3"/>
+          </p:cNvCxnSpPr>
+          <p:nvPr/>
+        </p:nvCxnSpPr>
+        <p:spPr>
+          <a:xfrm flipH="1">
+            <a:off x="7415298" y="3315818"/>
+            <a:ext cx="742007" cy="1396477"/>
+          </a:xfrm>
+          <a:prstGeom prst="line">
+            <a:avLst/>
+          </a:prstGeom>
+          <a:ln>
+            <a:headEnd type="none" w="med" len="med"/>
+            <a:tailEnd type="triangle" w="med" len="med"/>
+          </a:ln>
+        </p:spPr>
+        <p:style>
+          <a:lnRef idx="2">
+            <a:schemeClr val="accent5"/>
+          </a:lnRef>
+          <a:fillRef idx="0">
+            <a:schemeClr val="accent5"/>
+          </a:fillRef>
+          <a:effectRef idx="1">
+            <a:schemeClr val="accent5"/>
+          </a:effectRef>
+          <a:fontRef idx="minor">
+            <a:schemeClr val="tx1"/>
+          </a:fontRef>
+        </p:style>
+      </p:cxnSp>
+      <p:cxnSp>
+        <p:nvCxnSpPr>
+          <p:cNvPr id="93" name="Straight Connector 92">
+            <a:extLst>
+              <a:ext uri="{FF2B5EF4-FFF2-40B4-BE49-F238E27FC236}">
+                <a16:creationId xmlns:a16="http://schemas.microsoft.com/office/drawing/2014/main" id="{84586DC2-200A-BC8C-47AB-9A6CF73545DC}"/>
+              </a:ext>
+            </a:extLst>
+          </p:cNvPr>
+          <p:cNvCxnSpPr>
+            <a:cxnSpLocks/>
+            <a:stCxn id="22" idx="1"/>
+            <a:endCxn id="6" idx="3"/>
+          </p:cNvCxnSpPr>
+          <p:nvPr/>
+        </p:nvCxnSpPr>
+        <p:spPr>
+          <a:xfrm flipH="1" flipV="1">
+            <a:off x="7415298" y="4712295"/>
+            <a:ext cx="742007" cy="27105"/>
+          </a:xfrm>
+          <a:prstGeom prst="line">
+            <a:avLst/>
+          </a:prstGeom>
+          <a:ln>
+            <a:headEnd type="none" w="med" len="med"/>
+            <a:tailEnd type="triangle" w="med" len="med"/>
+          </a:ln>
+        </p:spPr>
+        <p:style>
+          <a:lnRef idx="2">
+            <a:schemeClr val="accent5"/>
+          </a:lnRef>
+          <a:fillRef idx="0">
+            <a:schemeClr val="accent5"/>
+          </a:fillRef>
+          <a:effectRef idx="1">
+            <a:schemeClr val="accent5"/>
+          </a:effectRef>
+          <a:fontRef idx="minor">
+            <a:schemeClr val="tx1"/>
+          </a:fontRef>
+        </p:style>
+      </p:cxnSp>
+      <p:cxnSp>
+        <p:nvCxnSpPr>
+          <p:cNvPr id="95" name="Straight Connector 94">
+            <a:extLst>
+              <a:ext uri="{FF2B5EF4-FFF2-40B4-BE49-F238E27FC236}">
+                <a16:creationId xmlns:a16="http://schemas.microsoft.com/office/drawing/2014/main" id="{3A525F0E-C72A-A3F5-025A-9E26332ED9AA}"/>
+              </a:ext>
+            </a:extLst>
+          </p:cNvPr>
+          <p:cNvCxnSpPr>
+            <a:cxnSpLocks/>
+            <a:stCxn id="24" idx="1"/>
+            <a:endCxn id="6" idx="3"/>
+          </p:cNvCxnSpPr>
+          <p:nvPr/>
+        </p:nvCxnSpPr>
+        <p:spPr>
+          <a:xfrm flipH="1" flipV="1">
+            <a:off x="7415298" y="4712295"/>
+            <a:ext cx="742007" cy="738896"/>
+          </a:xfrm>
+          <a:prstGeom prst="line">
+            <a:avLst/>
+          </a:prstGeom>
+          <a:ln>
+            <a:headEnd type="none" w="med" len="med"/>
+            <a:tailEnd type="triangle" w="med" len="med"/>
+          </a:ln>
+        </p:spPr>
+        <p:style>
+          <a:lnRef idx="2">
+            <a:schemeClr val="accent5"/>
+          </a:lnRef>
+          <a:fillRef idx="0">
+            <a:schemeClr val="accent5"/>
+          </a:fillRef>
+          <a:effectRef idx="1">
+            <a:schemeClr val="accent5"/>
+          </a:effectRef>
+          <a:fontRef idx="minor">
+            <a:schemeClr val="tx1"/>
+          </a:fontRef>
+        </p:style>
+      </p:cxnSp>
+      <p:cxnSp>
+        <p:nvCxnSpPr>
+          <p:cNvPr id="97" name="Straight Connector 96">
+            <a:extLst>
+              <a:ext uri="{FF2B5EF4-FFF2-40B4-BE49-F238E27FC236}">
+                <a16:creationId xmlns:a16="http://schemas.microsoft.com/office/drawing/2014/main" id="{E2B63C2B-3C6A-199B-3477-6EAB026D6848}"/>
+              </a:ext>
+            </a:extLst>
+          </p:cNvPr>
+          <p:cNvCxnSpPr>
+            <a:cxnSpLocks/>
+            <a:stCxn id="25" idx="1"/>
+            <a:endCxn id="6" idx="3"/>
+          </p:cNvCxnSpPr>
+          <p:nvPr/>
+        </p:nvCxnSpPr>
+        <p:spPr>
+          <a:xfrm flipH="1" flipV="1">
+            <a:off x="7415298" y="4712295"/>
+            <a:ext cx="742007" cy="1450686"/>
+          </a:xfrm>
+          <a:prstGeom prst="line">
+            <a:avLst/>
+          </a:prstGeom>
+          <a:ln>
+            <a:headEnd type="none" w="med" len="med"/>
+            <a:tailEnd type="triangle" w="med" len="med"/>
+          </a:ln>
+        </p:spPr>
+        <p:style>
+          <a:lnRef idx="2">
+            <a:schemeClr val="accent5"/>
+          </a:lnRef>
+          <a:fillRef idx="0">
+            <a:schemeClr val="accent5"/>
+          </a:fillRef>
+          <a:effectRef idx="1">
+            <a:schemeClr val="accent5"/>
+          </a:effectRef>
+          <a:fontRef idx="minor">
+            <a:schemeClr val="tx1"/>
+          </a:fontRef>
+        </p:style>
+      </p:cxnSp>
+      <p:cxnSp>
+        <p:nvCxnSpPr>
+          <p:cNvPr id="102" name="Straight Connector 101">
+            <a:extLst>
+              <a:ext uri="{FF2B5EF4-FFF2-40B4-BE49-F238E27FC236}">
+                <a16:creationId xmlns:a16="http://schemas.microsoft.com/office/drawing/2014/main" id="{77E6087D-D3A6-E336-2BD0-1488B4EC5AEA}"/>
+              </a:ext>
+            </a:extLst>
+          </p:cNvPr>
+          <p:cNvCxnSpPr>
+            <a:cxnSpLocks/>
+            <a:stCxn id="21" idx="1"/>
+            <a:endCxn id="6" idx="3"/>
+          </p:cNvCxnSpPr>
+          <p:nvPr/>
+        </p:nvCxnSpPr>
+        <p:spPr>
+          <a:xfrm flipH="1">
+            <a:off x="7415298" y="4027609"/>
+            <a:ext cx="742007" cy="684686"/>
+          </a:xfrm>
+          <a:prstGeom prst="line">
+            <a:avLst/>
+          </a:prstGeom>
+          <a:ln>
+            <a:headEnd type="none" w="med" len="med"/>
+            <a:tailEnd type="triangle" w="med" len="med"/>
+          </a:ln>
+        </p:spPr>
+        <p:style>
+          <a:lnRef idx="2">
+            <a:schemeClr val="accent5"/>
+          </a:lnRef>
+          <a:fillRef idx="0">
+            <a:schemeClr val="accent5"/>
+          </a:fillRef>
+          <a:effectRef idx="1">
+            <a:schemeClr val="accent5"/>
+          </a:effectRef>
+          <a:fontRef idx="minor">
+            <a:schemeClr val="tx1"/>
+          </a:fontRef>
+        </p:style>
+      </p:cxnSp>
+      <p:cxnSp>
+        <p:nvCxnSpPr>
+          <p:cNvPr id="105" name="Straight Connector 104">
+            <a:extLst>
+              <a:ext uri="{FF2B5EF4-FFF2-40B4-BE49-F238E27FC236}">
+                <a16:creationId xmlns:a16="http://schemas.microsoft.com/office/drawing/2014/main" id="{DD9EC2FF-370D-F5E6-3945-A57EB9DBB958}"/>
+              </a:ext>
+            </a:extLst>
+          </p:cNvPr>
+          <p:cNvCxnSpPr>
+            <a:cxnSpLocks/>
+            <a:stCxn id="6" idx="1"/>
+            <a:endCxn id="16" idx="3"/>
+          </p:cNvCxnSpPr>
+          <p:nvPr/>
+        </p:nvCxnSpPr>
+        <p:spPr>
+          <a:xfrm flipH="1" flipV="1">
+            <a:off x="4245112" y="3269378"/>
+            <a:ext cx="1730186" cy="1442917"/>
+          </a:xfrm>
+          <a:prstGeom prst="line">
+            <a:avLst/>
+          </a:prstGeom>
+          <a:ln>
+            <a:headEnd type="none" w="med" len="med"/>
+            <a:tailEnd type="triangle" w="med" len="med"/>
+          </a:ln>
+        </p:spPr>
+        <p:style>
+          <a:lnRef idx="2">
+            <a:schemeClr val="accent5"/>
+          </a:lnRef>
+          <a:fillRef idx="0">
+            <a:schemeClr val="accent5"/>
+          </a:fillRef>
+          <a:effectRef idx="1">
+            <a:schemeClr val="accent5"/>
+          </a:effectRef>
+          <a:fontRef idx="minor">
+            <a:schemeClr val="tx1"/>
+          </a:fontRef>
+        </p:style>
+      </p:cxnSp>
+      <p:cxnSp>
+        <p:nvCxnSpPr>
+          <p:cNvPr id="108" name="Straight Connector 107">
+            <a:extLst>
+              <a:ext uri="{FF2B5EF4-FFF2-40B4-BE49-F238E27FC236}">
+                <a16:creationId xmlns:a16="http://schemas.microsoft.com/office/drawing/2014/main" id="{D78FEE33-4608-5FF9-9F5E-03BA39143F3D}"/>
+              </a:ext>
+            </a:extLst>
+          </p:cNvPr>
+          <p:cNvCxnSpPr>
+            <a:cxnSpLocks/>
+            <a:stCxn id="6" idx="1"/>
+            <a:endCxn id="61" idx="3"/>
+          </p:cNvCxnSpPr>
+          <p:nvPr/>
+        </p:nvCxnSpPr>
+        <p:spPr>
+          <a:xfrm flipH="1" flipV="1">
+            <a:off x="4245112" y="3585552"/>
+            <a:ext cx="1730186" cy="1126743"/>
+          </a:xfrm>
+          <a:prstGeom prst="line">
+            <a:avLst/>
+          </a:prstGeom>
+          <a:ln>
+            <a:headEnd type="none" w="med" len="med"/>
+            <a:tailEnd type="triangle" w="med" len="med"/>
+          </a:ln>
+        </p:spPr>
+        <p:style>
+          <a:lnRef idx="2">
+            <a:schemeClr val="accent5"/>
+          </a:lnRef>
+          <a:fillRef idx="0">
+            <a:schemeClr val="accent5"/>
+          </a:fillRef>
+          <a:effectRef idx="1">
+            <a:schemeClr val="accent5"/>
+          </a:effectRef>
+          <a:fontRef idx="minor">
+            <a:schemeClr val="tx1"/>
+          </a:fontRef>
+        </p:style>
+      </p:cxnSp>
+      <p:cxnSp>
+        <p:nvCxnSpPr>
+          <p:cNvPr id="110" name="Straight Connector 109">
+            <a:extLst>
+              <a:ext uri="{FF2B5EF4-FFF2-40B4-BE49-F238E27FC236}">
+                <a16:creationId xmlns:a16="http://schemas.microsoft.com/office/drawing/2014/main" id="{46401587-7A17-7ABD-739F-51C5A78CD552}"/>
+              </a:ext>
+            </a:extLst>
+          </p:cNvPr>
+          <p:cNvCxnSpPr>
+            <a:cxnSpLocks/>
+            <a:stCxn id="6" idx="1"/>
+            <a:endCxn id="62" idx="3"/>
+          </p:cNvCxnSpPr>
+          <p:nvPr/>
+        </p:nvCxnSpPr>
+        <p:spPr>
+          <a:xfrm flipH="1" flipV="1">
+            <a:off x="4245112" y="3901726"/>
+            <a:ext cx="1730186" cy="810569"/>
+          </a:xfrm>
+          <a:prstGeom prst="line">
+            <a:avLst/>
+          </a:prstGeom>
+          <a:ln>
+            <a:headEnd type="none" w="med" len="med"/>
+            <a:tailEnd type="triangle" w="med" len="med"/>
+          </a:ln>
+        </p:spPr>
+        <p:style>
+          <a:lnRef idx="2">
+            <a:schemeClr val="accent5"/>
+          </a:lnRef>
+          <a:fillRef idx="0">
+            <a:schemeClr val="accent5"/>
+          </a:fillRef>
+          <a:effectRef idx="1">
+            <a:schemeClr val="accent5"/>
+          </a:effectRef>
+          <a:fontRef idx="minor">
+            <a:schemeClr val="tx1"/>
+          </a:fontRef>
+        </p:style>
+      </p:cxnSp>
+      <p:cxnSp>
+        <p:nvCxnSpPr>
+          <p:cNvPr id="112" name="Straight Connector 111">
+            <a:extLst>
+              <a:ext uri="{FF2B5EF4-FFF2-40B4-BE49-F238E27FC236}">
+                <a16:creationId xmlns:a16="http://schemas.microsoft.com/office/drawing/2014/main" id="{F998E74A-659B-CEB6-3C4D-E4C8E6142553}"/>
+              </a:ext>
+            </a:extLst>
+          </p:cNvPr>
+          <p:cNvCxnSpPr>
+            <a:cxnSpLocks/>
+            <a:stCxn id="6" idx="1"/>
+            <a:endCxn id="63" idx="3"/>
+          </p:cNvCxnSpPr>
+          <p:nvPr/>
+        </p:nvCxnSpPr>
+        <p:spPr>
+          <a:xfrm flipH="1" flipV="1">
+            <a:off x="4245112" y="4217900"/>
+            <a:ext cx="1730186" cy="494395"/>
+          </a:xfrm>
+          <a:prstGeom prst="line">
+            <a:avLst/>
+          </a:prstGeom>
+          <a:ln>
+            <a:headEnd type="none" w="med" len="med"/>
+            <a:tailEnd type="triangle" w="med" len="med"/>
+          </a:ln>
+        </p:spPr>
+        <p:style>
+          <a:lnRef idx="2">
+            <a:schemeClr val="accent5"/>
+          </a:lnRef>
+          <a:fillRef idx="0">
+            <a:schemeClr val="accent5"/>
+          </a:fillRef>
+          <a:effectRef idx="1">
+            <a:schemeClr val="accent5"/>
+          </a:effectRef>
+          <a:fontRef idx="minor">
+            <a:schemeClr val="tx1"/>
+          </a:fontRef>
+        </p:style>
+      </p:cxnSp>
+      <p:cxnSp>
+        <p:nvCxnSpPr>
+          <p:cNvPr id="114" name="Straight Connector 113">
+            <a:extLst>
+              <a:ext uri="{FF2B5EF4-FFF2-40B4-BE49-F238E27FC236}">
+                <a16:creationId xmlns:a16="http://schemas.microsoft.com/office/drawing/2014/main" id="{DEEB4D53-5524-B169-6859-D83949B01EED}"/>
+              </a:ext>
+            </a:extLst>
+          </p:cNvPr>
+          <p:cNvCxnSpPr>
+            <a:cxnSpLocks/>
+            <a:stCxn id="6" idx="1"/>
+            <a:endCxn id="65" idx="3"/>
+          </p:cNvCxnSpPr>
+          <p:nvPr/>
+        </p:nvCxnSpPr>
+        <p:spPr>
+          <a:xfrm flipH="1">
+            <a:off x="4245112" y="4712295"/>
+            <a:ext cx="1730186" cy="619264"/>
+          </a:xfrm>
+          <a:prstGeom prst="line">
+            <a:avLst/>
+          </a:prstGeom>
+          <a:ln>
+            <a:headEnd type="none" w="med" len="med"/>
+            <a:tailEnd type="triangle" w="med" len="med"/>
+          </a:ln>
+        </p:spPr>
+        <p:style>
+          <a:lnRef idx="2">
+            <a:schemeClr val="accent5"/>
+          </a:lnRef>
+          <a:fillRef idx="0">
+            <a:schemeClr val="accent5"/>
+          </a:fillRef>
+          <a:effectRef idx="1">
+            <a:schemeClr val="accent5"/>
+          </a:effectRef>
+          <a:fontRef idx="minor">
+            <a:schemeClr val="tx1"/>
+          </a:fontRef>
+        </p:style>
+      </p:cxnSp>
+      <p:cxnSp>
+        <p:nvCxnSpPr>
+          <p:cNvPr id="116" name="Straight Connector 115">
+            <a:extLst>
+              <a:ext uri="{FF2B5EF4-FFF2-40B4-BE49-F238E27FC236}">
+                <a16:creationId xmlns:a16="http://schemas.microsoft.com/office/drawing/2014/main" id="{308D4303-EB3B-150D-D6AE-8349DAF48395}"/>
+              </a:ext>
+            </a:extLst>
+          </p:cNvPr>
+          <p:cNvCxnSpPr>
+            <a:cxnSpLocks/>
+            <a:stCxn id="6" idx="1"/>
+            <a:endCxn id="66" idx="3"/>
+          </p:cNvCxnSpPr>
+          <p:nvPr/>
+        </p:nvCxnSpPr>
+        <p:spPr>
+          <a:xfrm flipH="1">
+            <a:off x="4245112" y="4712295"/>
+            <a:ext cx="1730186" cy="935438"/>
+          </a:xfrm>
+          <a:prstGeom prst="line">
+            <a:avLst/>
+          </a:prstGeom>
+          <a:ln>
+            <a:headEnd type="none" w="med" len="med"/>
+            <a:tailEnd type="triangle" w="med" len="med"/>
+          </a:ln>
+        </p:spPr>
+        <p:style>
+          <a:lnRef idx="2">
+            <a:schemeClr val="accent5"/>
+          </a:lnRef>
+          <a:fillRef idx="0">
+            <a:schemeClr val="accent5"/>
+          </a:fillRef>
+          <a:effectRef idx="1">
+            <a:schemeClr val="accent5"/>
+          </a:effectRef>
+          <a:fontRef idx="minor">
+            <a:schemeClr val="tx1"/>
+          </a:fontRef>
+        </p:style>
+      </p:cxnSp>
+      <p:cxnSp>
+        <p:nvCxnSpPr>
+          <p:cNvPr id="118" name="Straight Connector 117">
+            <a:extLst>
+              <a:ext uri="{FF2B5EF4-FFF2-40B4-BE49-F238E27FC236}">
+                <a16:creationId xmlns:a16="http://schemas.microsoft.com/office/drawing/2014/main" id="{BFEDD678-E12E-AFDF-6D48-ED36628B5C84}"/>
+              </a:ext>
+            </a:extLst>
+          </p:cNvPr>
+          <p:cNvCxnSpPr>
+            <a:cxnSpLocks/>
+            <a:stCxn id="6" idx="1"/>
+            <a:endCxn id="67" idx="3"/>
+          </p:cNvCxnSpPr>
+          <p:nvPr/>
+        </p:nvCxnSpPr>
+        <p:spPr>
+          <a:xfrm flipH="1">
+            <a:off x="4245112" y="4712295"/>
+            <a:ext cx="1730186" cy="1251612"/>
+          </a:xfrm>
+          <a:prstGeom prst="line">
+            <a:avLst/>
+          </a:prstGeom>
+          <a:ln>
+            <a:headEnd type="none" w="med" len="med"/>
+            <a:tailEnd type="triangle" w="med" len="med"/>
+          </a:ln>
+        </p:spPr>
+        <p:style>
+          <a:lnRef idx="2">
+            <a:schemeClr val="accent5"/>
+          </a:lnRef>
+          <a:fillRef idx="0">
+            <a:schemeClr val="accent5"/>
+          </a:fillRef>
+          <a:effectRef idx="1">
+            <a:schemeClr val="accent5"/>
+          </a:effectRef>
+          <a:fontRef idx="minor">
+            <a:schemeClr val="tx1"/>
+          </a:fontRef>
+        </p:style>
+      </p:cxnSp>
+      <p:cxnSp>
+        <p:nvCxnSpPr>
+          <p:cNvPr id="120" name="Straight Connector 119">
+            <a:extLst>
+              <a:ext uri="{FF2B5EF4-FFF2-40B4-BE49-F238E27FC236}">
+                <a16:creationId xmlns:a16="http://schemas.microsoft.com/office/drawing/2014/main" id="{823679CD-C441-343C-F998-EFA75E35D118}"/>
+              </a:ext>
+            </a:extLst>
+          </p:cNvPr>
+          <p:cNvCxnSpPr>
+            <a:cxnSpLocks/>
+            <a:stCxn id="6" idx="1"/>
+            <a:endCxn id="68" idx="3"/>
+          </p:cNvCxnSpPr>
+          <p:nvPr/>
+        </p:nvCxnSpPr>
+        <p:spPr>
+          <a:xfrm flipH="1">
+            <a:off x="4245112" y="4712295"/>
+            <a:ext cx="1730186" cy="1567786"/>
+          </a:xfrm>
+          <a:prstGeom prst="line">
+            <a:avLst/>
+          </a:prstGeom>
+          <a:ln>
+            <a:headEnd type="none" w="med" len="med"/>
+            <a:tailEnd type="triangle" w="med" len="med"/>
+          </a:ln>
+        </p:spPr>
+        <p:style>
+          <a:lnRef idx="2">
+            <a:schemeClr val="accent5"/>
+          </a:lnRef>
+          <a:fillRef idx="0">
+            <a:schemeClr val="accent5"/>
+          </a:fillRef>
+          <a:effectRef idx="1">
+            <a:schemeClr val="accent5"/>
+          </a:effectRef>
+          <a:fontRef idx="minor">
+            <a:schemeClr val="tx1"/>
+          </a:fontRef>
+        </p:style>
+      </p:cxnSp>
+      <p:sp>
+        <p:nvSpPr>
+          <p:cNvPr id="129" name="Rectangle 128">
+            <a:extLst>
+              <a:ext uri="{FF2B5EF4-FFF2-40B4-BE49-F238E27FC236}">
+                <a16:creationId xmlns:a16="http://schemas.microsoft.com/office/drawing/2014/main" id="{C391797E-57F5-D054-4AEA-E9C44ACEA5B1}"/>
+              </a:ext>
+            </a:extLst>
+          </p:cNvPr>
+          <p:cNvSpPr/>
+          <p:nvPr/>
+        </p:nvSpPr>
+        <p:spPr>
+          <a:xfrm>
+            <a:off x="350746" y="2965201"/>
+            <a:ext cx="900000" cy="180000"/>
+          </a:xfrm>
+          <a:prstGeom prst="rect">
+            <a:avLst/>
+          </a:prstGeom>
+          <a:noFill/>
+          <a:ln>
+            <a:noFill/>
+          </a:ln>
+        </p:spPr>
+        <p:style>
+          <a:lnRef idx="2">
+            <a:schemeClr val="dk1"/>
+          </a:lnRef>
+          <a:fillRef idx="1">
+            <a:schemeClr val="lt1"/>
+          </a:fillRef>
+          <a:effectRef idx="0">
+            <a:schemeClr val="dk1"/>
+          </a:effectRef>
+          <a:fontRef idx="minor">
+            <a:schemeClr val="dk1"/>
+          </a:fontRef>
+        </p:style>
+        <p:txBody>
+          <a:bodyPr lIns="0" tIns="0" rIns="0" bIns="0" rtlCol="0" anchor="ctr"/>
+          <a:lstStyle/>
+          <a:p>
+            <a:pPr algn="ctr"/>
+            <a:r>
+              <a:rPr lang="en-AU" sz="1200" dirty="0"/>
+              <a:t>Consumer 1</a:t>
+            </a:r>
+          </a:p>
+        </p:txBody>
+      </p:sp>
+      <p:pic>
+        <p:nvPicPr>
+          <p:cNvPr id="132" name="Graphic 131" descr="User with solid fill">
+            <a:extLst>
+              <a:ext uri="{FF2B5EF4-FFF2-40B4-BE49-F238E27FC236}">
+                <a16:creationId xmlns:a16="http://schemas.microsoft.com/office/drawing/2014/main" id="{C35D0225-22A7-F04C-CD00-CDC12F0CD91E}"/>
+              </a:ext>
+            </a:extLst>
+          </p:cNvPr>
+          <p:cNvPicPr>
+            <a:picLocks noChangeAspect="1"/>
+          </p:cNvPicPr>
+          <p:nvPr/>
+        </p:nvPicPr>
+        <p:blipFill>
+          <a:blip>
+            <a:extLst>
+              <a:ext uri="{96DAC541-7B7A-43D3-8B79-37D633B846F1}">
+                <asvg:svgBlip xmlns:asvg="http://schemas.microsoft.com/office/drawing/2016/SVG/main" r:embed="rId2"/>
+              </a:ext>
+            </a:extLst>
+          </a:blip>
+          <a:srcRect l="16685" t="13871" r="16727" b="13810"/>
+          <a:stretch>
+            <a:fillRect/>
+          </a:stretch>
+        </p:blipFill>
+        <p:spPr>
+          <a:xfrm>
+            <a:off x="561033" y="5325201"/>
+            <a:ext cx="479426" cy="520701"/>
+          </a:xfrm>
+          <a:prstGeom prst="rect">
+            <a:avLst/>
+          </a:prstGeom>
+        </p:spPr>
+      </p:pic>
+      <p:sp>
+        <p:nvSpPr>
+          <p:cNvPr id="133" name="Rectangle 132">
+            <a:extLst>
+              <a:ext uri="{FF2B5EF4-FFF2-40B4-BE49-F238E27FC236}">
+                <a16:creationId xmlns:a16="http://schemas.microsoft.com/office/drawing/2014/main" id="{140A226F-64A2-DF17-46D1-A956114DEA98}"/>
+              </a:ext>
+            </a:extLst>
+          </p:cNvPr>
+          <p:cNvSpPr/>
+          <p:nvPr/>
+        </p:nvSpPr>
+        <p:spPr>
+          <a:xfrm>
+            <a:off x="350746" y="5055201"/>
+            <a:ext cx="900000" cy="180000"/>
+          </a:xfrm>
+          <a:prstGeom prst="rect">
+            <a:avLst/>
+          </a:prstGeom>
+          <a:noFill/>
+          <a:ln>
+            <a:noFill/>
+          </a:ln>
+        </p:spPr>
+        <p:style>
+          <a:lnRef idx="2">
+            <a:schemeClr val="dk1"/>
+          </a:lnRef>
+          <a:fillRef idx="1">
+            <a:schemeClr val="lt1"/>
+          </a:fillRef>
+          <a:effectRef idx="0">
+            <a:schemeClr val="dk1"/>
+          </a:effectRef>
+          <a:fontRef idx="minor">
+            <a:schemeClr val="dk1"/>
+          </a:fontRef>
+        </p:style>
+        <p:txBody>
+          <a:bodyPr lIns="0" tIns="0" rIns="0" bIns="0" rtlCol="0" anchor="ctr"/>
+          <a:lstStyle/>
+          <a:p>
+            <a:pPr algn="ctr"/>
+            <a:r>
+              <a:rPr lang="en-AU" sz="1200" dirty="0"/>
+              <a:t>Consumer 2</a:t>
+            </a:r>
+          </a:p>
+        </p:txBody>
+      </p:sp>
+      <p:cxnSp>
+        <p:nvCxnSpPr>
+          <p:cNvPr id="135" name="Straight Connector 15">
+            <a:extLst>
+              <a:ext uri="{FF2B5EF4-FFF2-40B4-BE49-F238E27FC236}">
+                <a16:creationId xmlns:a16="http://schemas.microsoft.com/office/drawing/2014/main" id="{13E0AA1E-D72D-3A38-960F-BFED1990A187}"/>
+              </a:ext>
+            </a:extLst>
+          </p:cNvPr>
+          <p:cNvCxnSpPr>
+            <a:cxnSpLocks/>
+            <a:stCxn id="132" idx="3"/>
+            <a:endCxn id="66" idx="1"/>
+          </p:cNvCxnSpPr>
+          <p:nvPr/>
+        </p:nvCxnSpPr>
+        <p:spPr>
+          <a:xfrm>
+            <a:off x="1040459" y="5585552"/>
+            <a:ext cx="1764653" cy="62181"/>
+          </a:xfrm>
+          <a:prstGeom prst="straightConnector1">
+            <a:avLst/>
+          </a:prstGeom>
+          <a:ln>
+            <a:headEnd type="none" w="med" len="med"/>
+            <a:tailEnd type="triangle" w="med" len="med"/>
+          </a:ln>
+        </p:spPr>
+        <p:style>
+          <a:lnRef idx="2">
+            <a:schemeClr val="accent1"/>
+          </a:lnRef>
+          <a:fillRef idx="0">
+            <a:schemeClr val="accent1"/>
+          </a:fillRef>
+          <a:effectRef idx="1">
+            <a:schemeClr val="accent1"/>
+          </a:effectRef>
+          <a:fontRef idx="minor">
+            <a:schemeClr val="tx1"/>
+          </a:fontRef>
+        </p:style>
+      </p:cxnSp>
+    </p:spTree>
+    <p:extLst>
+      <p:ext uri="{BB962C8B-B14F-4D97-AF65-F5344CB8AC3E}">
+        <p14:creationId xmlns:p14="http://schemas.microsoft.com/office/powerpoint/2010/main" val="2442731799"/>
+      </p:ext>
+    </p:extLst>
+  </p:cSld>
+  <p:clrMapOvr>
+    <a:masterClrMapping/>
+  </p:clrMapOvr>
+</p:sld>
+</file>
+
+<file path=ppt/slides/slide7.xml><?xml version="1.0" encoding="utf-8"?>
+<p:sld xmlns:a="http://schemas.openxmlformats.org/drawingml/2006/main" xmlns:r="http://schemas.openxmlformats.org/officeDocument/2006/relationships" xmlns:p="http://schemas.openxmlformats.org/presentationml/2006/main">
+  <p:cSld>
+    <p:spTree>
+      <p:nvGrpSpPr>
+        <p:cNvPr id="1" name=""/>
+        <p:cNvGrpSpPr/>
+        <p:nvPr/>
+      </p:nvGrpSpPr>
+      <p:grpSpPr>
+        <a:xfrm>
+          <a:off x="0" y="0"/>
+          <a:ext cx="0" cy="0"/>
+          <a:chOff x="0" y="0"/>
+          <a:chExt cx="0" cy="0"/>
+        </a:xfrm>
+      </p:grpSpPr>
+      <p:sp>
+        <p:nvSpPr>
+          <p:cNvPr id="25" name="Rectangle 24">
+            <a:extLst>
+              <a:ext uri="{FF2B5EF4-FFF2-40B4-BE49-F238E27FC236}">
+                <a16:creationId xmlns:a16="http://schemas.microsoft.com/office/drawing/2014/main" id="{CCAC1AA1-DB65-5681-CBC5-D2CBD0CA9956}"/>
+              </a:ext>
+            </a:extLst>
+          </p:cNvPr>
+          <p:cNvSpPr/>
+          <p:nvPr/>
+        </p:nvSpPr>
+        <p:spPr>
+          <a:xfrm>
+            <a:off x="640734" y="1557000"/>
+            <a:ext cx="1725106" cy="1621512"/>
+          </a:xfrm>
+          <a:prstGeom prst="rect">
+            <a:avLst/>
+          </a:prstGeom>
+          <a:noFill/>
+          <a:ln/>
+        </p:spPr>
+        <p:style>
+          <a:lnRef idx="2">
+            <a:schemeClr val="dk1"/>
+          </a:lnRef>
+          <a:fillRef idx="1">
+            <a:schemeClr val="lt1"/>
+          </a:fillRef>
+          <a:effectRef idx="0">
+            <a:schemeClr val="dk1"/>
+          </a:effectRef>
+          <a:fontRef idx="minor">
+            <a:schemeClr val="dk1"/>
+          </a:fontRef>
+        </p:style>
+        <p:txBody>
+          <a:bodyPr lIns="36000" tIns="0" rIns="0" bIns="0" rtlCol="0" anchor="t"/>
+          <a:lstStyle/>
+          <a:p>
+            <a:pPr algn="ctr"/>
+            <a:r>
+              <a:rPr lang="en-AU" sz="1200" dirty="0"/>
+              <a:t>Consumer Devices</a:t>
+            </a:r>
+          </a:p>
+        </p:txBody>
+      </p:sp>
+      <p:sp>
+        <p:nvSpPr>
+          <p:cNvPr id="2" name="Title 1">
+            <a:extLst>
+              <a:ext uri="{FF2B5EF4-FFF2-40B4-BE49-F238E27FC236}">
+                <a16:creationId xmlns:a16="http://schemas.microsoft.com/office/drawing/2014/main" id="{276FA1F6-7169-8000-E35F-3A81898C9178}"/>
+              </a:ext>
+            </a:extLst>
+          </p:cNvPr>
+          <p:cNvSpPr>
+            <a:spLocks noGrp="1"/>
+          </p:cNvSpPr>
+          <p:nvPr>
+            <p:ph type="title"/>
+          </p:nvPr>
+        </p:nvSpPr>
+        <p:spPr/>
+        <p:txBody>
+          <a:bodyPr/>
+          <a:lstStyle/>
+          <a:p>
+            <a:r>
+              <a:rPr lang="en-AU" dirty="0"/>
+              <a:t>Zen LifeStream</a:t>
+            </a:r>
+          </a:p>
+        </p:txBody>
+      </p:sp>
+      <p:pic>
+        <p:nvPicPr>
+          <p:cNvPr id="4" name="Graphic 3" descr="User with solid fill">
+            <a:extLst>
+              <a:ext uri="{FF2B5EF4-FFF2-40B4-BE49-F238E27FC236}">
+                <a16:creationId xmlns:a16="http://schemas.microsoft.com/office/drawing/2014/main" id="{8CEC0E54-8592-ACEE-C8AB-953D451E4B68}"/>
+              </a:ext>
+            </a:extLst>
+          </p:cNvPr>
+          <p:cNvPicPr>
+            <a:picLocks noChangeAspect="1"/>
+          </p:cNvPicPr>
+          <p:nvPr/>
+        </p:nvPicPr>
+        <p:blipFill>
+          <a:blip>
+            <a:extLst>
+              <a:ext uri="{96DAC541-7B7A-43D3-8B79-37D633B846F1}">
+                <asvg:svgBlip xmlns:asvg="http://schemas.microsoft.com/office/drawing/2016/SVG/main" r:embed="rId2"/>
+              </a:ext>
+            </a:extLst>
+          </a:blip>
+          <a:srcRect l="16685" t="13871" r="16727" b="13810"/>
+          <a:stretch>
+            <a:fillRect/>
+          </a:stretch>
+        </p:blipFill>
+        <p:spPr>
+          <a:xfrm>
+            <a:off x="868178" y="1935470"/>
+            <a:ext cx="479426" cy="520701"/>
+          </a:xfrm>
+          <a:prstGeom prst="rect">
+            <a:avLst/>
+          </a:prstGeom>
+        </p:spPr>
+      </p:pic>
+      <p:sp>
+        <p:nvSpPr>
+          <p:cNvPr id="5" name="Rectangle 4">
+            <a:extLst>
+              <a:ext uri="{FF2B5EF4-FFF2-40B4-BE49-F238E27FC236}">
+                <a16:creationId xmlns:a16="http://schemas.microsoft.com/office/drawing/2014/main" id="{5B562E33-BD8A-FC60-F087-1776ED2A98B9}"/>
+              </a:ext>
+            </a:extLst>
+          </p:cNvPr>
+          <p:cNvSpPr/>
+          <p:nvPr/>
+        </p:nvSpPr>
+        <p:spPr>
+          <a:xfrm>
+            <a:off x="3136450" y="1556999"/>
+            <a:ext cx="4008571" cy="3401975"/>
+          </a:xfrm>
+          <a:prstGeom prst="rect">
+            <a:avLst/>
+          </a:prstGeom>
+          <a:noFill/>
+          <a:ln/>
+        </p:spPr>
+        <p:style>
+          <a:lnRef idx="2">
+            <a:schemeClr val="dk1"/>
+          </a:lnRef>
+          <a:fillRef idx="1">
+            <a:schemeClr val="lt1"/>
+          </a:fillRef>
+          <a:effectRef idx="0">
+            <a:schemeClr val="dk1"/>
+          </a:effectRef>
+          <a:fontRef idx="minor">
+            <a:schemeClr val="dk1"/>
+          </a:fontRef>
+        </p:style>
+        <p:txBody>
+          <a:bodyPr lIns="36000" tIns="0" rIns="0" bIns="0" rtlCol="0" anchor="t"/>
+          <a:lstStyle/>
+          <a:p>
+            <a:pPr algn="ctr"/>
+            <a:r>
+              <a:rPr lang="en-AU" sz="1200" dirty="0"/>
+              <a:t>Zenme Host Provider</a:t>
+            </a:r>
+          </a:p>
+        </p:txBody>
+      </p:sp>
+      <p:sp>
+        <p:nvSpPr>
+          <p:cNvPr id="9" name="Rectangle: Rounded Corners 8">
+            <a:extLst>
+              <a:ext uri="{FF2B5EF4-FFF2-40B4-BE49-F238E27FC236}">
+                <a16:creationId xmlns:a16="http://schemas.microsoft.com/office/drawing/2014/main" id="{59AF5557-655D-C955-886A-35DAA72816AA}"/>
+              </a:ext>
+            </a:extLst>
+          </p:cNvPr>
+          <p:cNvSpPr/>
+          <p:nvPr/>
+        </p:nvSpPr>
+        <p:spPr>
+          <a:xfrm>
+            <a:off x="3476274" y="2051182"/>
+            <a:ext cx="360000" cy="180000"/>
+          </a:xfrm>
+          <a:prstGeom prst="roundRect">
+            <a:avLst/>
+          </a:prstGeom>
+        </p:spPr>
+        <p:style>
+          <a:lnRef idx="2">
+            <a:schemeClr val="dk1"/>
+          </a:lnRef>
+          <a:fillRef idx="1">
+            <a:schemeClr val="lt1"/>
+          </a:fillRef>
+          <a:effectRef idx="0">
+            <a:schemeClr val="dk1"/>
+          </a:effectRef>
+          <a:fontRef idx="minor">
+            <a:schemeClr val="dk1"/>
+          </a:fontRef>
+        </p:style>
+        <p:txBody>
+          <a:bodyPr lIns="0" tIns="0" rIns="0" bIns="0" rtlCol="0" anchor="ctr"/>
+          <a:lstStyle/>
+          <a:p>
+            <a:pPr algn="ctr"/>
+            <a:r>
+              <a:rPr lang="en-AU" sz="1200" dirty="0"/>
+              <a:t>UI</a:t>
+            </a:r>
+          </a:p>
+        </p:txBody>
+      </p:sp>
+      <p:cxnSp>
+        <p:nvCxnSpPr>
+          <p:cNvPr id="10" name="Straight Connector 15">
+            <a:extLst>
+              <a:ext uri="{FF2B5EF4-FFF2-40B4-BE49-F238E27FC236}">
+                <a16:creationId xmlns:a16="http://schemas.microsoft.com/office/drawing/2014/main" id="{5209DEF3-7CBF-96E0-23AC-6B71C8F8CB4A}"/>
+              </a:ext>
+            </a:extLst>
+          </p:cNvPr>
+          <p:cNvCxnSpPr>
+            <a:cxnSpLocks/>
+            <a:stCxn id="23" idx="3"/>
+            <a:endCxn id="98" idx="1"/>
+          </p:cNvCxnSpPr>
+          <p:nvPr/>
+        </p:nvCxnSpPr>
+        <p:spPr>
+          <a:xfrm>
+            <a:off x="1972021" y="2006040"/>
+            <a:ext cx="1458044" cy="67000"/>
+          </a:xfrm>
+          <a:prstGeom prst="straightConnector1">
+            <a:avLst/>
+          </a:prstGeom>
+          <a:ln>
+            <a:headEnd type="none" w="med" len="med"/>
+            <a:tailEnd type="triangle" w="med" len="med"/>
+          </a:ln>
+        </p:spPr>
+        <p:style>
+          <a:lnRef idx="2">
+            <a:schemeClr val="accent1"/>
+          </a:lnRef>
+          <a:fillRef idx="0">
+            <a:schemeClr val="accent1"/>
+          </a:fillRef>
+          <a:effectRef idx="1">
+            <a:schemeClr val="accent1"/>
+          </a:effectRef>
+          <a:fontRef idx="minor">
+            <a:schemeClr val="tx1"/>
+          </a:fontRef>
+        </p:style>
+      </p:cxnSp>
+      <p:sp>
+        <p:nvSpPr>
+          <p:cNvPr id="12" name="Rectangle 11">
+            <a:extLst>
+              <a:ext uri="{FF2B5EF4-FFF2-40B4-BE49-F238E27FC236}">
+                <a16:creationId xmlns:a16="http://schemas.microsoft.com/office/drawing/2014/main" id="{831600B5-4EAA-8CC6-DBC2-35BFA396C545}"/>
+              </a:ext>
+            </a:extLst>
+          </p:cNvPr>
+          <p:cNvSpPr/>
+          <p:nvPr/>
+        </p:nvSpPr>
+        <p:spPr>
+          <a:xfrm>
+            <a:off x="635654" y="3647973"/>
+            <a:ext cx="1730185" cy="1311001"/>
+          </a:xfrm>
+          <a:prstGeom prst="rect">
+            <a:avLst/>
+          </a:prstGeom>
+          <a:ln/>
+        </p:spPr>
+        <p:style>
+          <a:lnRef idx="2">
+            <a:schemeClr val="dk1"/>
+          </a:lnRef>
+          <a:fillRef idx="1">
+            <a:schemeClr val="lt1"/>
+          </a:fillRef>
+          <a:effectRef idx="0">
+            <a:schemeClr val="dk1"/>
+          </a:effectRef>
+          <a:fontRef idx="minor">
+            <a:schemeClr val="dk1"/>
+          </a:fontRef>
+        </p:style>
+        <p:txBody>
+          <a:bodyPr lIns="36000" tIns="0" rIns="0" bIns="0" rtlCol="0" anchor="t"/>
+          <a:lstStyle/>
+          <a:p>
+            <a:pPr algn="ctr"/>
+            <a:r>
+              <a:rPr lang="en-AU" sz="1200" dirty="0"/>
+              <a:t>Consumer Cloud Storage</a:t>
+            </a:r>
+          </a:p>
+        </p:txBody>
+      </p:sp>
+      <p:sp>
+        <p:nvSpPr>
+          <p:cNvPr id="14" name="Rectangle: Rounded Corners 13">
+            <a:extLst>
+              <a:ext uri="{FF2B5EF4-FFF2-40B4-BE49-F238E27FC236}">
+                <a16:creationId xmlns:a16="http://schemas.microsoft.com/office/drawing/2014/main" id="{E87568E9-3C55-1FB2-EEAA-919F0F9D85FC}"/>
+              </a:ext>
+            </a:extLst>
+          </p:cNvPr>
+          <p:cNvSpPr/>
+          <p:nvPr/>
+        </p:nvSpPr>
+        <p:spPr>
+          <a:xfrm>
+            <a:off x="820696" y="4024840"/>
+            <a:ext cx="1440000" cy="180000"/>
+          </a:xfrm>
+          <a:prstGeom prst="roundRect">
+            <a:avLst/>
+          </a:prstGeom>
+        </p:spPr>
+        <p:style>
+          <a:lnRef idx="2">
+            <a:schemeClr val="dk1"/>
+          </a:lnRef>
+          <a:fillRef idx="1">
+            <a:schemeClr val="lt1"/>
+          </a:fillRef>
+          <a:effectRef idx="0">
+            <a:schemeClr val="dk1"/>
+          </a:effectRef>
+          <a:fontRef idx="minor">
+            <a:schemeClr val="dk1"/>
+          </a:fontRef>
+        </p:style>
+        <p:txBody>
+          <a:bodyPr lIns="0" tIns="0" rIns="0" bIns="0" rtlCol="0" anchor="ctr"/>
+          <a:lstStyle/>
+          <a:p>
+            <a:pPr algn="ctr"/>
+            <a:r>
+              <a:rPr lang="en-AU" sz="1200" dirty="0"/>
+              <a:t>OneDrive</a:t>
+            </a:r>
+          </a:p>
+        </p:txBody>
+      </p:sp>
+      <p:sp>
+        <p:nvSpPr>
+          <p:cNvPr id="15" name="Rectangle: Rounded Corners 14">
+            <a:extLst>
+              <a:ext uri="{FF2B5EF4-FFF2-40B4-BE49-F238E27FC236}">
+                <a16:creationId xmlns:a16="http://schemas.microsoft.com/office/drawing/2014/main" id="{022591CC-FBC7-F017-AA67-C72948286098}"/>
+              </a:ext>
+            </a:extLst>
+          </p:cNvPr>
+          <p:cNvSpPr/>
+          <p:nvPr/>
+        </p:nvSpPr>
+        <p:spPr>
+          <a:xfrm>
+            <a:off x="820696" y="4341014"/>
+            <a:ext cx="1440000" cy="180000"/>
+          </a:xfrm>
+          <a:prstGeom prst="roundRect">
+            <a:avLst/>
+          </a:prstGeom>
+        </p:spPr>
+        <p:style>
+          <a:lnRef idx="2">
+            <a:schemeClr val="dk1"/>
+          </a:lnRef>
+          <a:fillRef idx="1">
+            <a:schemeClr val="lt1"/>
+          </a:fillRef>
+          <a:effectRef idx="0">
+            <a:schemeClr val="dk1"/>
+          </a:effectRef>
+          <a:fontRef idx="minor">
+            <a:schemeClr val="dk1"/>
+          </a:fontRef>
+        </p:style>
+        <p:txBody>
+          <a:bodyPr lIns="0" tIns="0" rIns="0" bIns="0" rtlCol="0" anchor="ctr"/>
+          <a:lstStyle/>
+          <a:p>
+            <a:pPr algn="ctr"/>
+            <a:r>
+              <a:rPr lang="en-AU" sz="1200" dirty="0"/>
+              <a:t>iCloud Drive</a:t>
+            </a:r>
+          </a:p>
+        </p:txBody>
+      </p:sp>
+      <p:sp>
+        <p:nvSpPr>
+          <p:cNvPr id="16" name="Rectangle: Rounded Corners 15">
+            <a:extLst>
+              <a:ext uri="{FF2B5EF4-FFF2-40B4-BE49-F238E27FC236}">
+                <a16:creationId xmlns:a16="http://schemas.microsoft.com/office/drawing/2014/main" id="{243EFFE6-CE72-6953-717E-AB043B7AC486}"/>
+              </a:ext>
+            </a:extLst>
+          </p:cNvPr>
+          <p:cNvSpPr/>
+          <p:nvPr/>
+        </p:nvSpPr>
+        <p:spPr>
+          <a:xfrm>
+            <a:off x="820696" y="4657188"/>
+            <a:ext cx="1440000" cy="180000"/>
+          </a:xfrm>
+          <a:prstGeom prst="roundRect">
+            <a:avLst/>
+          </a:prstGeom>
+        </p:spPr>
+        <p:style>
+          <a:lnRef idx="2">
+            <a:schemeClr val="dk1"/>
+          </a:lnRef>
+          <a:fillRef idx="1">
+            <a:schemeClr val="lt1"/>
+          </a:fillRef>
+          <a:effectRef idx="0">
+            <a:schemeClr val="dk1"/>
+          </a:effectRef>
+          <a:fontRef idx="minor">
+            <a:schemeClr val="dk1"/>
+          </a:fontRef>
+        </p:style>
+        <p:txBody>
+          <a:bodyPr lIns="0" tIns="0" rIns="0" bIns="0" rtlCol="0" anchor="ctr"/>
+          <a:lstStyle/>
+          <a:p>
+            <a:pPr algn="ctr"/>
+            <a:r>
+              <a:rPr lang="en-AU" sz="1200" dirty="0"/>
+              <a:t>Google Drive</a:t>
+            </a:r>
+          </a:p>
+        </p:txBody>
+      </p:sp>
+      <p:pic>
+        <p:nvPicPr>
+          <p:cNvPr id="22" name="Content Placeholder 18" descr="Laptop with solid fill">
+            <a:extLst>
+              <a:ext uri="{FF2B5EF4-FFF2-40B4-BE49-F238E27FC236}">
+                <a16:creationId xmlns:a16="http://schemas.microsoft.com/office/drawing/2014/main" id="{A44EA5B1-16CF-0497-0C11-6A30D30641F1}"/>
+              </a:ext>
+            </a:extLst>
+          </p:cNvPr>
+          <p:cNvPicPr>
+            <a:picLocks noChangeAspect="1"/>
+          </p:cNvPicPr>
+          <p:nvPr/>
+        </p:nvPicPr>
+        <p:blipFill>
+          <a:blip>
+            <a:extLst>
+              <a:ext uri="{96DAC541-7B7A-43D3-8B79-37D633B846F1}">
+                <asvg:svgBlip xmlns:asvg="http://schemas.microsoft.com/office/drawing/2016/SVG/main" r:embed="rId3"/>
+              </a:ext>
+            </a:extLst>
+          </a:blip>
+          <a:srcRect t="18370" b="17489"/>
+          <a:stretch>
+            <a:fillRect/>
+          </a:stretch>
+        </p:blipFill>
+        <p:spPr>
+          <a:xfrm>
+            <a:off x="1604884" y="2315150"/>
+            <a:ext cx="504000" cy="323272"/>
+          </a:xfrm>
+          <a:prstGeom prst="rect">
+            <a:avLst/>
+          </a:prstGeom>
+        </p:spPr>
+      </p:pic>
+      <p:pic>
+        <p:nvPicPr>
+          <p:cNvPr id="23" name="Graphic 22" descr="Smart Phone with solid fill">
+            <a:extLst>
+              <a:ext uri="{FF2B5EF4-FFF2-40B4-BE49-F238E27FC236}">
+                <a16:creationId xmlns:a16="http://schemas.microsoft.com/office/drawing/2014/main" id="{21EA22C6-02FA-285B-2221-04F180F452B8}"/>
+              </a:ext>
+            </a:extLst>
+          </p:cNvPr>
+          <p:cNvPicPr>
+            <a:picLocks noChangeAspect="1"/>
+          </p:cNvPicPr>
+          <p:nvPr/>
+        </p:nvPicPr>
+        <p:blipFill>
+          <a:blip>
+            <a:extLst>
+              <a:ext uri="{96DAC541-7B7A-43D3-8B79-37D633B846F1}">
+                <asvg:svgBlip xmlns:asvg="http://schemas.microsoft.com/office/drawing/2016/SVG/main" r:embed="rId4"/>
+              </a:ext>
+            </a:extLst>
+          </a:blip>
+          <a:srcRect l="22782" r="25092"/>
+          <a:stretch>
+            <a:fillRect/>
+          </a:stretch>
+        </p:blipFill>
+        <p:spPr>
+          <a:xfrm>
+            <a:off x="1741423" y="1784848"/>
+            <a:ext cx="230598" cy="442383"/>
+          </a:xfrm>
+          <a:prstGeom prst="rect">
+            <a:avLst/>
+          </a:prstGeom>
+        </p:spPr>
+      </p:pic>
+      <p:pic>
+        <p:nvPicPr>
+          <p:cNvPr id="29" name="Graphic 28" descr="Work from home Wi-Fi with solid fill">
+            <a:extLst>
+              <a:ext uri="{FF2B5EF4-FFF2-40B4-BE49-F238E27FC236}">
+                <a16:creationId xmlns:a16="http://schemas.microsoft.com/office/drawing/2014/main" id="{28AA07DA-29D5-ED26-279B-A62985B66F51}"/>
+              </a:ext>
+            </a:extLst>
+          </p:cNvPr>
+          <p:cNvPicPr>
+            <a:picLocks noChangeAspect="1"/>
+          </p:cNvPicPr>
+          <p:nvPr/>
+        </p:nvPicPr>
+        <p:blipFill>
+          <a:blip>
+            <a:extLst>
+              <a:ext uri="{96DAC541-7B7A-43D3-8B79-37D633B846F1}">
+                <asvg:svgBlip xmlns:asvg="http://schemas.microsoft.com/office/drawing/2016/SVG/main" r:embed="rId5"/>
+              </a:ext>
+            </a:extLst>
+          </a:blip>
+          <a:stretch>
+            <a:fillRect/>
+          </a:stretch>
+        </p:blipFill>
+        <p:spPr>
+          <a:xfrm>
+            <a:off x="1672285" y="2727137"/>
+            <a:ext cx="360000" cy="360000"/>
+          </a:xfrm>
+          <a:prstGeom prst="rect">
+            <a:avLst/>
+          </a:prstGeom>
+        </p:spPr>
+      </p:pic>
+      <p:cxnSp>
+        <p:nvCxnSpPr>
+          <p:cNvPr id="30" name="Straight Connector 15">
+            <a:extLst>
+              <a:ext uri="{FF2B5EF4-FFF2-40B4-BE49-F238E27FC236}">
+                <a16:creationId xmlns:a16="http://schemas.microsoft.com/office/drawing/2014/main" id="{28B5AA83-D786-9BC8-B343-F2F3E51BF955}"/>
+              </a:ext>
+            </a:extLst>
+          </p:cNvPr>
+          <p:cNvCxnSpPr>
+            <a:cxnSpLocks/>
+            <a:stCxn id="25" idx="2"/>
+            <a:endCxn id="12" idx="0"/>
+          </p:cNvCxnSpPr>
+          <p:nvPr/>
+        </p:nvCxnSpPr>
+        <p:spPr>
+          <a:xfrm flipH="1">
+            <a:off x="1500747" y="3178512"/>
+            <a:ext cx="2540" cy="469461"/>
+          </a:xfrm>
+          <a:prstGeom prst="straightConnector1">
+            <a:avLst/>
+          </a:prstGeom>
+          <a:ln>
+            <a:headEnd type="none" w="med" len="med"/>
+            <a:tailEnd type="triangle" w="med" len="med"/>
+          </a:ln>
+        </p:spPr>
+        <p:style>
+          <a:lnRef idx="2">
+            <a:schemeClr val="accent1"/>
+          </a:lnRef>
+          <a:fillRef idx="0">
+            <a:schemeClr val="accent1"/>
+          </a:fillRef>
+          <a:effectRef idx="1">
+            <a:schemeClr val="accent1"/>
+          </a:effectRef>
+          <a:fontRef idx="minor">
+            <a:schemeClr val="tx1"/>
+          </a:fontRef>
+        </p:style>
+      </p:cxnSp>
+      <p:cxnSp>
+        <p:nvCxnSpPr>
+          <p:cNvPr id="37" name="Straight Connector 15">
+            <a:extLst>
+              <a:ext uri="{FF2B5EF4-FFF2-40B4-BE49-F238E27FC236}">
+                <a16:creationId xmlns:a16="http://schemas.microsoft.com/office/drawing/2014/main" id="{08359110-461F-8B67-3A50-E0061B828527}"/>
+              </a:ext>
+            </a:extLst>
+          </p:cNvPr>
+          <p:cNvCxnSpPr>
+            <a:cxnSpLocks/>
+            <a:stCxn id="70" idx="1"/>
+            <a:endCxn id="12" idx="3"/>
+          </p:cNvCxnSpPr>
+          <p:nvPr/>
+        </p:nvCxnSpPr>
+        <p:spPr>
+          <a:xfrm flipH="1">
+            <a:off x="2365839" y="4015411"/>
+            <a:ext cx="1184584" cy="288063"/>
+          </a:xfrm>
+          <a:prstGeom prst="straightConnector1">
+            <a:avLst/>
+          </a:prstGeom>
+          <a:ln>
+            <a:headEnd type="none" w="med" len="med"/>
+            <a:tailEnd type="triangle" w="med" len="med"/>
+          </a:ln>
+        </p:spPr>
+        <p:style>
+          <a:lnRef idx="2">
+            <a:schemeClr val="accent1"/>
+          </a:lnRef>
+          <a:fillRef idx="0">
+            <a:schemeClr val="accent1"/>
+          </a:fillRef>
+          <a:effectRef idx="1">
+            <a:schemeClr val="accent1"/>
+          </a:effectRef>
+          <a:fontRef idx="minor">
+            <a:schemeClr val="tx1"/>
+          </a:fontRef>
+        </p:style>
+      </p:cxnSp>
+      <p:sp>
+        <p:nvSpPr>
+          <p:cNvPr id="43" name="Rectangle 42">
+            <a:extLst>
+              <a:ext uri="{FF2B5EF4-FFF2-40B4-BE49-F238E27FC236}">
+                <a16:creationId xmlns:a16="http://schemas.microsoft.com/office/drawing/2014/main" id="{F6B4B32E-B54D-3B5F-43DB-AE66DBD603F5}"/>
+              </a:ext>
+            </a:extLst>
+          </p:cNvPr>
+          <p:cNvSpPr/>
+          <p:nvPr/>
+        </p:nvSpPr>
+        <p:spPr>
+          <a:xfrm>
+            <a:off x="1357918" y="3353257"/>
+            <a:ext cx="988734" cy="188769"/>
+          </a:xfrm>
+          <a:prstGeom prst="rect">
+            <a:avLst/>
+          </a:prstGeom>
+          <a:noFill/>
+          <a:ln>
+            <a:noFill/>
+          </a:ln>
+        </p:spPr>
+        <p:style>
+          <a:lnRef idx="2">
+            <a:schemeClr val="dk1"/>
+          </a:lnRef>
+          <a:fillRef idx="1">
+            <a:schemeClr val="lt1"/>
+          </a:fillRef>
+          <a:effectRef idx="0">
+            <a:schemeClr val="dk1"/>
+          </a:effectRef>
+          <a:fontRef idx="minor">
+            <a:schemeClr val="dk1"/>
+          </a:fontRef>
+        </p:style>
+        <p:txBody>
+          <a:bodyPr lIns="0" tIns="0" rIns="0" bIns="0" rtlCol="0" anchor="ctr"/>
+          <a:lstStyle/>
+          <a:p>
+            <a:pPr algn="ctr"/>
+            <a:r>
+              <a:rPr lang="en-AU" sz="1200" dirty="0"/>
+              <a:t>App data</a:t>
+            </a:r>
+          </a:p>
+        </p:txBody>
+      </p:sp>
+      <p:sp>
+        <p:nvSpPr>
+          <p:cNvPr id="52" name="Rectangle 51">
+            <a:extLst>
+              <a:ext uri="{FF2B5EF4-FFF2-40B4-BE49-F238E27FC236}">
+                <a16:creationId xmlns:a16="http://schemas.microsoft.com/office/drawing/2014/main" id="{5BE7B46C-8DA4-98E3-D84D-6E778B176D47}"/>
+              </a:ext>
+            </a:extLst>
+          </p:cNvPr>
+          <p:cNvSpPr/>
+          <p:nvPr/>
+        </p:nvSpPr>
+        <p:spPr>
+          <a:xfrm>
+            <a:off x="640732" y="5333163"/>
+            <a:ext cx="1730185" cy="1311001"/>
+          </a:xfrm>
+          <a:prstGeom prst="rect">
+            <a:avLst/>
+          </a:prstGeom>
+          <a:ln/>
+        </p:spPr>
+        <p:style>
+          <a:lnRef idx="2">
+            <a:schemeClr val="dk1"/>
+          </a:lnRef>
+          <a:fillRef idx="1">
+            <a:schemeClr val="lt1"/>
+          </a:fillRef>
+          <a:effectRef idx="0">
+            <a:schemeClr val="dk1"/>
+          </a:effectRef>
+          <a:fontRef idx="minor">
+            <a:schemeClr val="dk1"/>
+          </a:fontRef>
+        </p:style>
+        <p:txBody>
+          <a:bodyPr lIns="36000" tIns="0" rIns="0" bIns="0" rtlCol="0" anchor="t"/>
+          <a:lstStyle/>
+          <a:p>
+            <a:pPr algn="ctr"/>
+            <a:r>
+              <a:rPr lang="en-AU" sz="1200" dirty="0"/>
+              <a:t>Consumer Cloud Services</a:t>
+            </a:r>
+          </a:p>
+        </p:txBody>
+      </p:sp>
+      <p:sp>
+        <p:nvSpPr>
+          <p:cNvPr id="53" name="Rectangle: Rounded Corners 52">
+            <a:extLst>
+              <a:ext uri="{FF2B5EF4-FFF2-40B4-BE49-F238E27FC236}">
+                <a16:creationId xmlns:a16="http://schemas.microsoft.com/office/drawing/2014/main" id="{8D3017F8-F895-3360-6991-86C5E25468DF}"/>
+              </a:ext>
+            </a:extLst>
+          </p:cNvPr>
+          <p:cNvSpPr/>
+          <p:nvPr/>
+        </p:nvSpPr>
+        <p:spPr>
+          <a:xfrm>
+            <a:off x="825774" y="5710030"/>
+            <a:ext cx="1440000" cy="180000"/>
+          </a:xfrm>
+          <a:prstGeom prst="roundRect">
+            <a:avLst/>
+          </a:prstGeom>
+        </p:spPr>
+        <p:style>
+          <a:lnRef idx="2">
+            <a:schemeClr val="dk1"/>
+          </a:lnRef>
+          <a:fillRef idx="1">
+            <a:schemeClr val="lt1"/>
+          </a:fillRef>
+          <a:effectRef idx="0">
+            <a:schemeClr val="dk1"/>
+          </a:effectRef>
+          <a:fontRef idx="minor">
+            <a:schemeClr val="dk1"/>
+          </a:fontRef>
+        </p:style>
+        <p:txBody>
+          <a:bodyPr lIns="0" tIns="0" rIns="0" bIns="0" rtlCol="0" anchor="ctr"/>
+          <a:lstStyle/>
+          <a:p>
+            <a:pPr algn="ctr"/>
+            <a:r>
+              <a:rPr lang="en-AU" sz="1200" dirty="0"/>
+              <a:t>Email</a:t>
+            </a:r>
+          </a:p>
+        </p:txBody>
+      </p:sp>
+      <p:sp>
+        <p:nvSpPr>
+          <p:cNvPr id="54" name="Rectangle: Rounded Corners 53">
+            <a:extLst>
+              <a:ext uri="{FF2B5EF4-FFF2-40B4-BE49-F238E27FC236}">
+                <a16:creationId xmlns:a16="http://schemas.microsoft.com/office/drawing/2014/main" id="{778ECC5E-A315-3307-436A-4F7D154EEE7F}"/>
+              </a:ext>
+            </a:extLst>
+          </p:cNvPr>
+          <p:cNvSpPr/>
+          <p:nvPr/>
+        </p:nvSpPr>
+        <p:spPr>
+          <a:xfrm>
+            <a:off x="825774" y="6026204"/>
+            <a:ext cx="1440000" cy="180000"/>
+          </a:xfrm>
+          <a:prstGeom prst="roundRect">
+            <a:avLst/>
+          </a:prstGeom>
+        </p:spPr>
+        <p:style>
+          <a:lnRef idx="2">
+            <a:schemeClr val="dk1"/>
+          </a:lnRef>
+          <a:fillRef idx="1">
+            <a:schemeClr val="lt1"/>
+          </a:fillRef>
+          <a:effectRef idx="0">
+            <a:schemeClr val="dk1"/>
+          </a:effectRef>
+          <a:fontRef idx="minor">
+            <a:schemeClr val="dk1"/>
+          </a:fontRef>
+        </p:style>
+        <p:txBody>
+          <a:bodyPr lIns="0" tIns="0" rIns="0" bIns="0" rtlCol="0" anchor="ctr"/>
+          <a:lstStyle/>
+          <a:p>
+            <a:pPr algn="ctr"/>
+            <a:r>
+              <a:rPr lang="en-AU" sz="1200" dirty="0"/>
+              <a:t>Callendar</a:t>
+            </a:r>
+          </a:p>
+        </p:txBody>
+      </p:sp>
+      <p:sp>
+        <p:nvSpPr>
+          <p:cNvPr id="55" name="Rectangle: Rounded Corners 54">
+            <a:extLst>
+              <a:ext uri="{FF2B5EF4-FFF2-40B4-BE49-F238E27FC236}">
+                <a16:creationId xmlns:a16="http://schemas.microsoft.com/office/drawing/2014/main" id="{653062A2-34C1-E862-F14C-13E2FC182EDB}"/>
+              </a:ext>
+            </a:extLst>
+          </p:cNvPr>
+          <p:cNvSpPr/>
+          <p:nvPr/>
+        </p:nvSpPr>
+        <p:spPr>
+          <a:xfrm>
+            <a:off x="825774" y="6342378"/>
+            <a:ext cx="1440000" cy="180000"/>
+          </a:xfrm>
+          <a:prstGeom prst="roundRect">
+            <a:avLst/>
+          </a:prstGeom>
+        </p:spPr>
+        <p:style>
+          <a:lnRef idx="2">
+            <a:schemeClr val="dk1"/>
+          </a:lnRef>
+          <a:fillRef idx="1">
+            <a:schemeClr val="lt1"/>
+          </a:fillRef>
+          <a:effectRef idx="0">
+            <a:schemeClr val="dk1"/>
+          </a:effectRef>
+          <a:fontRef idx="minor">
+            <a:schemeClr val="dk1"/>
+          </a:fontRef>
+        </p:style>
+        <p:txBody>
+          <a:bodyPr lIns="0" tIns="0" rIns="0" bIns="0" rtlCol="0" anchor="ctr"/>
+          <a:lstStyle/>
+          <a:p>
+            <a:pPr algn="ctr"/>
+            <a:r>
+              <a:rPr lang="en-AU" sz="1200" dirty="0"/>
+              <a:t>Messaging</a:t>
+            </a:r>
+          </a:p>
+        </p:txBody>
+      </p:sp>
+      <p:cxnSp>
+        <p:nvCxnSpPr>
+          <p:cNvPr id="58" name="Straight Connector 15">
+            <a:extLst>
+              <a:ext uri="{FF2B5EF4-FFF2-40B4-BE49-F238E27FC236}">
+                <a16:creationId xmlns:a16="http://schemas.microsoft.com/office/drawing/2014/main" id="{8679C81B-94AE-3DEE-7E93-2F96008675E7}"/>
+              </a:ext>
+            </a:extLst>
+          </p:cNvPr>
+          <p:cNvCxnSpPr>
+            <a:cxnSpLocks/>
+            <a:stCxn id="52" idx="1"/>
+            <a:endCxn id="25" idx="1"/>
+          </p:cNvCxnSpPr>
+          <p:nvPr/>
+        </p:nvCxnSpPr>
+        <p:spPr>
+          <a:xfrm rot="10800000" flipH="1">
+            <a:off x="640732" y="2367756"/>
+            <a:ext cx="2" cy="3620908"/>
+          </a:xfrm>
+          <a:prstGeom prst="bentConnector3">
+            <a:avLst>
+              <a:gd name="adj1" fmla="val -11430000000"/>
+            </a:avLst>
+          </a:prstGeom>
+          <a:ln>
+            <a:headEnd type="none" w="med" len="med"/>
+            <a:tailEnd type="triangle" w="med" len="med"/>
+          </a:ln>
+        </p:spPr>
+        <p:style>
+          <a:lnRef idx="2">
+            <a:schemeClr val="accent1"/>
+          </a:lnRef>
+          <a:fillRef idx="0">
+            <a:schemeClr val="accent1"/>
+          </a:fillRef>
+          <a:effectRef idx="1">
+            <a:schemeClr val="accent1"/>
+          </a:effectRef>
+          <a:fontRef idx="minor">
+            <a:schemeClr val="tx1"/>
+          </a:fontRef>
+        </p:style>
+      </p:cxnSp>
+      <p:cxnSp>
+        <p:nvCxnSpPr>
+          <p:cNvPr id="63" name="Straight Connector 15">
+            <a:extLst>
+              <a:ext uri="{FF2B5EF4-FFF2-40B4-BE49-F238E27FC236}">
+                <a16:creationId xmlns:a16="http://schemas.microsoft.com/office/drawing/2014/main" id="{0E689110-3696-0C50-269A-3062DDB48123}"/>
+              </a:ext>
+            </a:extLst>
+          </p:cNvPr>
+          <p:cNvCxnSpPr>
+            <a:cxnSpLocks/>
+            <a:stCxn id="52" idx="3"/>
+            <a:endCxn id="67" idx="2"/>
+          </p:cNvCxnSpPr>
+          <p:nvPr/>
+        </p:nvCxnSpPr>
+        <p:spPr>
+          <a:xfrm flipV="1">
+            <a:off x="2370917" y="4651861"/>
+            <a:ext cx="2079506" cy="1336803"/>
+          </a:xfrm>
+          <a:prstGeom prst="straightConnector1">
+            <a:avLst/>
+          </a:prstGeom>
+          <a:ln>
+            <a:headEnd type="none" w="med" len="med"/>
+            <a:tailEnd type="triangle" w="med" len="med"/>
+          </a:ln>
+        </p:spPr>
+        <p:style>
+          <a:lnRef idx="2">
+            <a:schemeClr val="accent1"/>
+          </a:lnRef>
+          <a:fillRef idx="0">
+            <a:schemeClr val="accent1"/>
+          </a:fillRef>
+          <a:effectRef idx="1">
+            <a:schemeClr val="accent1"/>
+          </a:effectRef>
+          <a:fontRef idx="minor">
+            <a:schemeClr val="tx1"/>
+          </a:fontRef>
+        </p:style>
+      </p:cxnSp>
+      <p:sp>
+        <p:nvSpPr>
+          <p:cNvPr id="67" name="Rectangle: Rounded Corners 66">
+            <a:extLst>
+              <a:ext uri="{FF2B5EF4-FFF2-40B4-BE49-F238E27FC236}">
+                <a16:creationId xmlns:a16="http://schemas.microsoft.com/office/drawing/2014/main" id="{874B6B7A-E995-BAB9-AAB3-690B94D1556E}"/>
+              </a:ext>
+            </a:extLst>
+          </p:cNvPr>
+          <p:cNvSpPr/>
+          <p:nvPr/>
+        </p:nvSpPr>
+        <p:spPr>
+          <a:xfrm>
+            <a:off x="3550423" y="4291861"/>
+            <a:ext cx="1800000" cy="360000"/>
+          </a:xfrm>
+          <a:prstGeom prst="roundRect">
+            <a:avLst/>
+          </a:prstGeom>
+        </p:spPr>
+        <p:style>
+          <a:lnRef idx="2">
+            <a:schemeClr val="dk1"/>
+          </a:lnRef>
+          <a:fillRef idx="1">
+            <a:schemeClr val="lt1"/>
+          </a:fillRef>
+          <a:effectRef idx="0">
+            <a:schemeClr val="dk1"/>
+          </a:effectRef>
+          <a:fontRef idx="minor">
+            <a:schemeClr val="dk1"/>
+          </a:fontRef>
+        </p:style>
+        <p:txBody>
+          <a:bodyPr lIns="0" tIns="0" rIns="0" bIns="0" rtlCol="0" anchor="ctr"/>
+          <a:lstStyle/>
+          <a:p>
+            <a:pPr algn="ctr"/>
+            <a:r>
+              <a:rPr lang="en-AU" sz="1200" dirty="0"/>
+              <a:t>Source Event </a:t>
+            </a:r>
+            <a:br>
+              <a:rPr lang="en-AU" sz="1200" dirty="0"/>
+            </a:br>
+            <a:r>
+              <a:rPr lang="en-AU" sz="1200" dirty="0"/>
+              <a:t>Polling Agents</a:t>
+            </a:r>
+          </a:p>
+        </p:txBody>
+      </p:sp>
+      <p:sp>
+        <p:nvSpPr>
+          <p:cNvPr id="70" name="Rectangle: Rounded Corners 69">
+            <a:extLst>
+              <a:ext uri="{FF2B5EF4-FFF2-40B4-BE49-F238E27FC236}">
+                <a16:creationId xmlns:a16="http://schemas.microsoft.com/office/drawing/2014/main" id="{834151C7-CCFE-C4E1-A666-E6CB4EA66D7D}"/>
+              </a:ext>
+            </a:extLst>
+          </p:cNvPr>
+          <p:cNvSpPr/>
+          <p:nvPr/>
+        </p:nvSpPr>
+        <p:spPr>
+          <a:xfrm>
+            <a:off x="3550423" y="3835411"/>
+            <a:ext cx="1800000" cy="360000"/>
+          </a:xfrm>
+          <a:prstGeom prst="roundRect">
+            <a:avLst/>
+          </a:prstGeom>
+        </p:spPr>
+        <p:style>
+          <a:lnRef idx="2">
+            <a:schemeClr val="dk1"/>
+          </a:lnRef>
+          <a:fillRef idx="1">
+            <a:schemeClr val="lt1"/>
+          </a:fillRef>
+          <a:effectRef idx="0">
+            <a:schemeClr val="dk1"/>
+          </a:effectRef>
+          <a:fontRef idx="minor">
+            <a:schemeClr val="dk1"/>
+          </a:fontRef>
+        </p:style>
+        <p:txBody>
+          <a:bodyPr lIns="0" tIns="0" rIns="0" bIns="0" rtlCol="0" anchor="ctr"/>
+          <a:lstStyle/>
+          <a:p>
+            <a:pPr algn="ctr"/>
+            <a:r>
+              <a:rPr lang="en-AU" sz="1200" dirty="0"/>
+              <a:t>Backup data</a:t>
+            </a:r>
+            <a:br>
+              <a:rPr lang="en-AU" sz="1200" dirty="0"/>
+            </a:br>
+            <a:r>
+              <a:rPr lang="en-AU" sz="1200" dirty="0"/>
+              <a:t> to owner</a:t>
+            </a:r>
+          </a:p>
+        </p:txBody>
+      </p:sp>
+      <p:sp>
+        <p:nvSpPr>
+          <p:cNvPr id="76" name="Rectangle 75">
+            <a:extLst>
+              <a:ext uri="{FF2B5EF4-FFF2-40B4-BE49-F238E27FC236}">
+                <a16:creationId xmlns:a16="http://schemas.microsoft.com/office/drawing/2014/main" id="{724B7843-6E48-3E6A-3291-AEB87E9085D9}"/>
+              </a:ext>
+            </a:extLst>
+          </p:cNvPr>
+          <p:cNvSpPr/>
+          <p:nvPr/>
+        </p:nvSpPr>
+        <p:spPr>
+          <a:xfrm>
+            <a:off x="3437342" y="2917433"/>
+            <a:ext cx="2294591" cy="1823317"/>
+          </a:xfrm>
+          <a:prstGeom prst="rect">
+            <a:avLst/>
+          </a:prstGeom>
+          <a:noFill/>
+          <a:ln/>
+        </p:spPr>
+        <p:style>
+          <a:lnRef idx="2">
+            <a:schemeClr val="dk1"/>
+          </a:lnRef>
+          <a:fillRef idx="1">
+            <a:schemeClr val="lt1"/>
+          </a:fillRef>
+          <a:effectRef idx="0">
+            <a:schemeClr val="dk1"/>
+          </a:effectRef>
+          <a:fontRef idx="minor">
+            <a:schemeClr val="dk1"/>
+          </a:fontRef>
+        </p:style>
+        <p:txBody>
+          <a:bodyPr lIns="36000" tIns="0" rIns="0" bIns="0" rtlCol="0" anchor="t"/>
+          <a:lstStyle/>
+          <a:p>
+            <a:r>
+              <a:rPr lang="en-AU" sz="1200" dirty="0"/>
+              <a:t>Zenme Framework</a:t>
+            </a:r>
+          </a:p>
+        </p:txBody>
+      </p:sp>
+      <p:sp>
+        <p:nvSpPr>
+          <p:cNvPr id="90" name="Rectangle: Rounded Corners 89">
+            <a:extLst>
+              <a:ext uri="{FF2B5EF4-FFF2-40B4-BE49-F238E27FC236}">
+                <a16:creationId xmlns:a16="http://schemas.microsoft.com/office/drawing/2014/main" id="{31070624-CB01-A66B-5FD7-5F9791BAE16A}"/>
+              </a:ext>
+            </a:extLst>
+          </p:cNvPr>
+          <p:cNvSpPr/>
+          <p:nvPr/>
+        </p:nvSpPr>
+        <p:spPr>
+          <a:xfrm>
+            <a:off x="3550423" y="3369832"/>
+            <a:ext cx="1800000" cy="360000"/>
+          </a:xfrm>
+          <a:prstGeom prst="roundRect">
+            <a:avLst/>
+          </a:prstGeom>
+        </p:spPr>
+        <p:style>
+          <a:lnRef idx="2">
+            <a:schemeClr val="dk1"/>
+          </a:lnRef>
+          <a:fillRef idx="1">
+            <a:schemeClr val="lt1"/>
+          </a:fillRef>
+          <a:effectRef idx="0">
+            <a:schemeClr val="dk1"/>
+          </a:effectRef>
+          <a:fontRef idx="minor">
+            <a:schemeClr val="dk1"/>
+          </a:fontRef>
+        </p:style>
+        <p:txBody>
+          <a:bodyPr lIns="0" tIns="0" rIns="0" bIns="0" rtlCol="0" anchor="ctr"/>
+          <a:lstStyle/>
+          <a:p>
+            <a:pPr algn="ctr"/>
+            <a:r>
+              <a:rPr lang="en-AU" sz="1200" dirty="0"/>
+              <a:t>Realtime Event Stream</a:t>
+            </a:r>
+          </a:p>
+        </p:txBody>
+      </p:sp>
+      <p:sp>
+        <p:nvSpPr>
+          <p:cNvPr id="98" name="Rectangle 97">
+            <a:extLst>
+              <a:ext uri="{FF2B5EF4-FFF2-40B4-BE49-F238E27FC236}">
+                <a16:creationId xmlns:a16="http://schemas.microsoft.com/office/drawing/2014/main" id="{7B817A62-90FC-A270-3F94-9748CBD7F27D}"/>
+              </a:ext>
+            </a:extLst>
+          </p:cNvPr>
+          <p:cNvSpPr/>
+          <p:nvPr/>
+        </p:nvSpPr>
+        <p:spPr>
+          <a:xfrm>
+            <a:off x="3430065" y="1857040"/>
+            <a:ext cx="1544571" cy="432000"/>
+          </a:xfrm>
+          <a:prstGeom prst="rect">
+            <a:avLst/>
+          </a:prstGeom>
+          <a:noFill/>
+          <a:ln/>
+        </p:spPr>
+        <p:style>
+          <a:lnRef idx="2">
+            <a:schemeClr val="dk1"/>
+          </a:lnRef>
+          <a:fillRef idx="1">
+            <a:schemeClr val="lt1"/>
+          </a:fillRef>
+          <a:effectRef idx="0">
+            <a:schemeClr val="dk1"/>
+          </a:effectRef>
+          <a:fontRef idx="minor">
+            <a:schemeClr val="dk1"/>
+          </a:fontRef>
+        </p:style>
+        <p:txBody>
+          <a:bodyPr lIns="36000" tIns="0" rIns="0" bIns="0" rtlCol="0" anchor="t"/>
+          <a:lstStyle/>
+          <a:p>
+            <a:r>
+              <a:rPr lang="en-AU" sz="1200" dirty="0"/>
+              <a:t>Zenme App</a:t>
+            </a:r>
+          </a:p>
+        </p:txBody>
+      </p:sp>
+      <p:sp>
+        <p:nvSpPr>
+          <p:cNvPr id="99" name="Rectangle 98">
+            <a:extLst>
+              <a:ext uri="{FF2B5EF4-FFF2-40B4-BE49-F238E27FC236}">
+                <a16:creationId xmlns:a16="http://schemas.microsoft.com/office/drawing/2014/main" id="{9F2BCE2E-6A1B-2AD9-A766-1E02E5D7D493}"/>
+              </a:ext>
+            </a:extLst>
+          </p:cNvPr>
+          <p:cNvSpPr/>
+          <p:nvPr/>
+        </p:nvSpPr>
+        <p:spPr>
+          <a:xfrm>
+            <a:off x="5941496" y="3089628"/>
+            <a:ext cx="1080000" cy="720000"/>
+          </a:xfrm>
+          <a:prstGeom prst="rect">
+            <a:avLst/>
+          </a:prstGeom>
+          <a:noFill/>
+          <a:ln/>
+        </p:spPr>
+        <p:style>
+          <a:lnRef idx="2">
+            <a:schemeClr val="dk1"/>
+          </a:lnRef>
+          <a:fillRef idx="1">
+            <a:schemeClr val="lt1"/>
+          </a:fillRef>
+          <a:effectRef idx="0">
+            <a:schemeClr val="dk1"/>
+          </a:effectRef>
+          <a:fontRef idx="minor">
+            <a:schemeClr val="dk1"/>
+          </a:fontRef>
+        </p:style>
+        <p:txBody>
+          <a:bodyPr lIns="36000" tIns="0" rIns="0" bIns="0" rtlCol="0" anchor="t"/>
+          <a:lstStyle/>
+          <a:p>
+            <a:r>
+              <a:rPr lang="en-AU" sz="1200" dirty="0"/>
+              <a:t>Zenme AI</a:t>
+            </a:r>
+          </a:p>
+        </p:txBody>
+      </p:sp>
+      <p:sp>
+        <p:nvSpPr>
+          <p:cNvPr id="100" name="Rectangle 99">
+            <a:extLst>
+              <a:ext uri="{FF2B5EF4-FFF2-40B4-BE49-F238E27FC236}">
+                <a16:creationId xmlns:a16="http://schemas.microsoft.com/office/drawing/2014/main" id="{7F5DB17D-6A97-2690-5D0E-84F2520FF0F1}"/>
+              </a:ext>
+            </a:extLst>
+          </p:cNvPr>
+          <p:cNvSpPr/>
+          <p:nvPr/>
+        </p:nvSpPr>
+        <p:spPr>
+          <a:xfrm>
+            <a:off x="5948785" y="3992781"/>
+            <a:ext cx="1080000" cy="720000"/>
+          </a:xfrm>
+          <a:prstGeom prst="rect">
+            <a:avLst/>
+          </a:prstGeom>
+          <a:noFill/>
+          <a:ln/>
+        </p:spPr>
+        <p:style>
+          <a:lnRef idx="2">
+            <a:schemeClr val="dk1"/>
+          </a:lnRef>
+          <a:fillRef idx="1">
+            <a:schemeClr val="lt1"/>
+          </a:fillRef>
+          <a:effectRef idx="0">
+            <a:schemeClr val="dk1"/>
+          </a:effectRef>
+          <a:fontRef idx="minor">
+            <a:schemeClr val="dk1"/>
+          </a:fontRef>
+        </p:style>
+        <p:txBody>
+          <a:bodyPr lIns="36000" tIns="0" rIns="0" bIns="0" rtlCol="0" anchor="t"/>
+          <a:lstStyle/>
+          <a:p>
+            <a:r>
+              <a:rPr lang="en-AU" sz="1200" dirty="0"/>
+              <a:t>Abc AI</a:t>
+            </a:r>
+          </a:p>
+        </p:txBody>
+      </p:sp>
+      <p:sp>
+        <p:nvSpPr>
+          <p:cNvPr id="101" name="Rectangle 100">
+            <a:extLst>
+              <a:ext uri="{FF2B5EF4-FFF2-40B4-BE49-F238E27FC236}">
+                <a16:creationId xmlns:a16="http://schemas.microsoft.com/office/drawing/2014/main" id="{265294D0-B239-7B45-270B-75FEF716047D}"/>
+              </a:ext>
+            </a:extLst>
+          </p:cNvPr>
+          <p:cNvSpPr/>
+          <p:nvPr/>
+        </p:nvSpPr>
+        <p:spPr>
+          <a:xfrm>
+            <a:off x="3430065" y="2398217"/>
+            <a:ext cx="1544571" cy="432000"/>
+          </a:xfrm>
+          <a:prstGeom prst="rect">
+            <a:avLst/>
+          </a:prstGeom>
+          <a:noFill/>
+          <a:ln/>
+        </p:spPr>
+        <p:style>
+          <a:lnRef idx="2">
+            <a:schemeClr val="dk1"/>
+          </a:lnRef>
+          <a:fillRef idx="1">
+            <a:schemeClr val="lt1"/>
+          </a:fillRef>
+          <a:effectRef idx="0">
+            <a:schemeClr val="dk1"/>
+          </a:effectRef>
+          <a:fontRef idx="minor">
+            <a:schemeClr val="dk1"/>
+          </a:fontRef>
+        </p:style>
+        <p:txBody>
+          <a:bodyPr lIns="36000" tIns="0" rIns="0" bIns="0" rtlCol="0" anchor="t"/>
+          <a:lstStyle/>
+          <a:p>
+            <a:r>
+              <a:rPr lang="en-AU" sz="1200" dirty="0"/>
+              <a:t>Abc App</a:t>
+            </a:r>
+          </a:p>
+        </p:txBody>
+      </p:sp>
+      <p:sp>
+        <p:nvSpPr>
+          <p:cNvPr id="103" name="Rectangle: Rounded Corners 102">
+            <a:extLst>
+              <a:ext uri="{FF2B5EF4-FFF2-40B4-BE49-F238E27FC236}">
+                <a16:creationId xmlns:a16="http://schemas.microsoft.com/office/drawing/2014/main" id="{85EAE65F-3FFF-F4E3-632F-E2AECDDA8BF2}"/>
+              </a:ext>
+            </a:extLst>
+          </p:cNvPr>
+          <p:cNvSpPr/>
+          <p:nvPr/>
+        </p:nvSpPr>
+        <p:spPr>
+          <a:xfrm>
+            <a:off x="3910423" y="2058738"/>
+            <a:ext cx="540000" cy="180000"/>
+          </a:xfrm>
+          <a:prstGeom prst="roundRect">
+            <a:avLst/>
+          </a:prstGeom>
+        </p:spPr>
+        <p:style>
+          <a:lnRef idx="2">
+            <a:schemeClr val="dk1"/>
+          </a:lnRef>
+          <a:fillRef idx="1">
+            <a:schemeClr val="lt1"/>
+          </a:fillRef>
+          <a:effectRef idx="0">
+            <a:schemeClr val="dk1"/>
+          </a:effectRef>
+          <a:fontRef idx="minor">
+            <a:schemeClr val="dk1"/>
+          </a:fontRef>
+        </p:style>
+        <p:txBody>
+          <a:bodyPr lIns="0" tIns="0" rIns="0" bIns="0" rtlCol="0" anchor="ctr"/>
+          <a:lstStyle/>
+          <a:p>
+            <a:pPr algn="ctr"/>
+            <a:r>
+              <a:rPr lang="en-AU" sz="1200" dirty="0"/>
+              <a:t>Logic</a:t>
+            </a:r>
+          </a:p>
+        </p:txBody>
+      </p:sp>
+      <p:sp>
+        <p:nvSpPr>
+          <p:cNvPr id="104" name="Rectangle: Rounded Corners 103">
+            <a:extLst>
+              <a:ext uri="{FF2B5EF4-FFF2-40B4-BE49-F238E27FC236}">
+                <a16:creationId xmlns:a16="http://schemas.microsoft.com/office/drawing/2014/main" id="{98E73CF3-3AD4-AB8D-82A9-C090D517854A}"/>
+              </a:ext>
+            </a:extLst>
+          </p:cNvPr>
+          <p:cNvSpPr/>
+          <p:nvPr/>
+        </p:nvSpPr>
+        <p:spPr>
+          <a:xfrm>
+            <a:off x="4534173" y="2051182"/>
+            <a:ext cx="360000" cy="180000"/>
+          </a:xfrm>
+          <a:prstGeom prst="roundRect">
+            <a:avLst/>
+          </a:prstGeom>
+        </p:spPr>
+        <p:style>
+          <a:lnRef idx="2">
+            <a:schemeClr val="dk1"/>
+          </a:lnRef>
+          <a:fillRef idx="1">
+            <a:schemeClr val="lt1"/>
+          </a:fillRef>
+          <a:effectRef idx="0">
+            <a:schemeClr val="dk1"/>
+          </a:effectRef>
+          <a:fontRef idx="minor">
+            <a:schemeClr val="dk1"/>
+          </a:fontRef>
+        </p:style>
+        <p:txBody>
+          <a:bodyPr lIns="0" tIns="0" rIns="0" bIns="0" rtlCol="0" anchor="ctr"/>
+          <a:lstStyle/>
+          <a:p>
+            <a:pPr algn="ctr"/>
+            <a:r>
+              <a:rPr lang="en-AU" sz="1200" dirty="0"/>
+              <a:t>DB</a:t>
+            </a:r>
+          </a:p>
+        </p:txBody>
+      </p:sp>
+      <p:sp>
+        <p:nvSpPr>
+          <p:cNvPr id="105" name="Rectangle: Rounded Corners 104">
+            <a:extLst>
+              <a:ext uri="{FF2B5EF4-FFF2-40B4-BE49-F238E27FC236}">
+                <a16:creationId xmlns:a16="http://schemas.microsoft.com/office/drawing/2014/main" id="{63256F0C-B15D-E584-89B5-8BFF6D68B4AB}"/>
+              </a:ext>
+            </a:extLst>
+          </p:cNvPr>
+          <p:cNvSpPr/>
+          <p:nvPr/>
+        </p:nvSpPr>
+        <p:spPr>
+          <a:xfrm>
+            <a:off x="3476274" y="2591344"/>
+            <a:ext cx="360000" cy="180000"/>
+          </a:xfrm>
+          <a:prstGeom prst="roundRect">
+            <a:avLst/>
+          </a:prstGeom>
+        </p:spPr>
+        <p:style>
+          <a:lnRef idx="2">
+            <a:schemeClr val="dk1"/>
+          </a:lnRef>
+          <a:fillRef idx="1">
+            <a:schemeClr val="lt1"/>
+          </a:fillRef>
+          <a:effectRef idx="0">
+            <a:schemeClr val="dk1"/>
+          </a:effectRef>
+          <a:fontRef idx="minor">
+            <a:schemeClr val="dk1"/>
+          </a:fontRef>
+        </p:style>
+        <p:txBody>
+          <a:bodyPr lIns="0" tIns="0" rIns="0" bIns="0" rtlCol="0" anchor="ctr"/>
+          <a:lstStyle/>
+          <a:p>
+            <a:pPr algn="ctr"/>
+            <a:r>
+              <a:rPr lang="en-AU" sz="1200" dirty="0"/>
+              <a:t>UI</a:t>
+            </a:r>
+          </a:p>
+        </p:txBody>
+      </p:sp>
+      <p:sp>
+        <p:nvSpPr>
+          <p:cNvPr id="106" name="Rectangle: Rounded Corners 105">
+            <a:extLst>
+              <a:ext uri="{FF2B5EF4-FFF2-40B4-BE49-F238E27FC236}">
+                <a16:creationId xmlns:a16="http://schemas.microsoft.com/office/drawing/2014/main" id="{7016E157-2815-6DEE-D6C3-074DEDD38EE6}"/>
+              </a:ext>
+            </a:extLst>
+          </p:cNvPr>
+          <p:cNvSpPr/>
+          <p:nvPr/>
+        </p:nvSpPr>
+        <p:spPr>
+          <a:xfrm>
+            <a:off x="3910423" y="2598900"/>
+            <a:ext cx="540000" cy="180000"/>
+          </a:xfrm>
+          <a:prstGeom prst="roundRect">
+            <a:avLst/>
+          </a:prstGeom>
+        </p:spPr>
+        <p:style>
+          <a:lnRef idx="2">
+            <a:schemeClr val="dk1"/>
+          </a:lnRef>
+          <a:fillRef idx="1">
+            <a:schemeClr val="lt1"/>
+          </a:fillRef>
+          <a:effectRef idx="0">
+            <a:schemeClr val="dk1"/>
+          </a:effectRef>
+          <a:fontRef idx="minor">
+            <a:schemeClr val="dk1"/>
+          </a:fontRef>
+        </p:style>
+        <p:txBody>
+          <a:bodyPr lIns="0" tIns="0" rIns="0" bIns="0" rtlCol="0" anchor="ctr"/>
+          <a:lstStyle/>
+          <a:p>
+            <a:pPr algn="ctr"/>
+            <a:r>
+              <a:rPr lang="en-AU" sz="1200" dirty="0"/>
+              <a:t>Logic</a:t>
+            </a:r>
+          </a:p>
+        </p:txBody>
+      </p:sp>
+      <p:sp>
+        <p:nvSpPr>
+          <p:cNvPr id="107" name="Rectangle: Rounded Corners 106">
+            <a:extLst>
+              <a:ext uri="{FF2B5EF4-FFF2-40B4-BE49-F238E27FC236}">
+                <a16:creationId xmlns:a16="http://schemas.microsoft.com/office/drawing/2014/main" id="{072FD108-80E4-3674-DA7F-3B033DE2AF05}"/>
+              </a:ext>
+            </a:extLst>
+          </p:cNvPr>
+          <p:cNvSpPr/>
+          <p:nvPr/>
+        </p:nvSpPr>
+        <p:spPr>
+          <a:xfrm>
+            <a:off x="4534173" y="2591344"/>
+            <a:ext cx="360000" cy="180000"/>
+          </a:xfrm>
+          <a:prstGeom prst="roundRect">
+            <a:avLst/>
+          </a:prstGeom>
+        </p:spPr>
+        <p:style>
+          <a:lnRef idx="2">
+            <a:schemeClr val="dk1"/>
+          </a:lnRef>
+          <a:fillRef idx="1">
+            <a:schemeClr val="lt1"/>
+          </a:fillRef>
+          <a:effectRef idx="0">
+            <a:schemeClr val="dk1"/>
+          </a:effectRef>
+          <a:fontRef idx="minor">
+            <a:schemeClr val="dk1"/>
+          </a:fontRef>
+        </p:style>
+        <p:txBody>
+          <a:bodyPr lIns="0" tIns="0" rIns="0" bIns="0" rtlCol="0" anchor="ctr"/>
+          <a:lstStyle/>
+          <a:p>
+            <a:pPr algn="ctr"/>
+            <a:r>
+              <a:rPr lang="en-AU" sz="1200" dirty="0"/>
+              <a:t>DB</a:t>
+            </a:r>
+          </a:p>
+        </p:txBody>
+      </p:sp>
+      <p:cxnSp>
+        <p:nvCxnSpPr>
+          <p:cNvPr id="108" name="Straight Connector 15">
+            <a:extLst>
+              <a:ext uri="{FF2B5EF4-FFF2-40B4-BE49-F238E27FC236}">
+                <a16:creationId xmlns:a16="http://schemas.microsoft.com/office/drawing/2014/main" id="{4B3B2275-603F-1AEB-7B1B-7BBD6F96CACC}"/>
+              </a:ext>
+            </a:extLst>
+          </p:cNvPr>
+          <p:cNvCxnSpPr>
+            <a:cxnSpLocks/>
+            <a:stCxn id="98" idx="3"/>
+            <a:endCxn id="90" idx="3"/>
+          </p:cNvCxnSpPr>
+          <p:nvPr/>
+        </p:nvCxnSpPr>
+        <p:spPr>
+          <a:xfrm>
+            <a:off x="4974636" y="2073040"/>
+            <a:ext cx="375787" cy="1476792"/>
+          </a:xfrm>
+          <a:prstGeom prst="curvedConnector3">
+            <a:avLst>
+              <a:gd name="adj1" fmla="val 160832"/>
+            </a:avLst>
+          </a:prstGeom>
+          <a:ln>
+            <a:headEnd type="none" w="med" len="med"/>
+            <a:tailEnd type="triangle" w="med" len="med"/>
+          </a:ln>
+        </p:spPr>
+        <p:style>
+          <a:lnRef idx="2">
+            <a:schemeClr val="accent6"/>
+          </a:lnRef>
+          <a:fillRef idx="0">
+            <a:schemeClr val="accent6"/>
+          </a:fillRef>
+          <a:effectRef idx="1">
+            <a:schemeClr val="accent6"/>
+          </a:effectRef>
+          <a:fontRef idx="minor">
+            <a:schemeClr val="tx1"/>
+          </a:fontRef>
+        </p:style>
+      </p:cxnSp>
+      <p:cxnSp>
+        <p:nvCxnSpPr>
+          <p:cNvPr id="112" name="Straight Connector 15">
+            <a:extLst>
+              <a:ext uri="{FF2B5EF4-FFF2-40B4-BE49-F238E27FC236}">
+                <a16:creationId xmlns:a16="http://schemas.microsoft.com/office/drawing/2014/main" id="{0CB00353-7316-7984-80B2-7578697F3026}"/>
+              </a:ext>
+            </a:extLst>
+          </p:cNvPr>
+          <p:cNvCxnSpPr>
+            <a:cxnSpLocks/>
+            <a:stCxn id="101" idx="3"/>
+            <a:endCxn id="90" idx="3"/>
+          </p:cNvCxnSpPr>
+          <p:nvPr/>
+        </p:nvCxnSpPr>
+        <p:spPr>
+          <a:xfrm>
+            <a:off x="4974636" y="2614217"/>
+            <a:ext cx="375787" cy="935615"/>
+          </a:xfrm>
+          <a:prstGeom prst="curvedConnector3">
+            <a:avLst>
+              <a:gd name="adj1" fmla="val 160832"/>
+            </a:avLst>
+          </a:prstGeom>
+          <a:ln>
+            <a:headEnd type="none" w="med" len="med"/>
+            <a:tailEnd type="triangle" w="med" len="med"/>
+          </a:ln>
+        </p:spPr>
+        <p:style>
+          <a:lnRef idx="2">
+            <a:schemeClr val="accent6"/>
+          </a:lnRef>
+          <a:fillRef idx="0">
+            <a:schemeClr val="accent6"/>
+          </a:fillRef>
+          <a:effectRef idx="1">
+            <a:schemeClr val="accent6"/>
+          </a:effectRef>
+          <a:fontRef idx="minor">
+            <a:schemeClr val="tx1"/>
+          </a:fontRef>
+        </p:style>
+      </p:cxnSp>
+      <p:cxnSp>
+        <p:nvCxnSpPr>
+          <p:cNvPr id="118" name="Straight Connector 15">
+            <a:extLst>
+              <a:ext uri="{FF2B5EF4-FFF2-40B4-BE49-F238E27FC236}">
+                <a16:creationId xmlns:a16="http://schemas.microsoft.com/office/drawing/2014/main" id="{029CFFE3-E67A-3F15-7DE8-0008AB0C4F61}"/>
+              </a:ext>
+            </a:extLst>
+          </p:cNvPr>
+          <p:cNvCxnSpPr>
+            <a:cxnSpLocks/>
+            <a:stCxn id="90" idx="3"/>
+            <a:endCxn id="100" idx="1"/>
+          </p:cNvCxnSpPr>
+          <p:nvPr/>
+        </p:nvCxnSpPr>
+        <p:spPr>
+          <a:xfrm>
+            <a:off x="5350423" y="3549832"/>
+            <a:ext cx="598362" cy="802949"/>
+          </a:xfrm>
+          <a:prstGeom prst="curvedConnector3">
+            <a:avLst>
+              <a:gd name="adj1" fmla="val 50000"/>
+            </a:avLst>
+          </a:prstGeom>
+          <a:ln>
+            <a:headEnd type="none" w="med" len="med"/>
+            <a:tailEnd type="triangle" w="med" len="med"/>
+          </a:ln>
+        </p:spPr>
+        <p:style>
+          <a:lnRef idx="2">
+            <a:schemeClr val="accent6"/>
+          </a:lnRef>
+          <a:fillRef idx="0">
+            <a:schemeClr val="accent6"/>
+          </a:fillRef>
+          <a:effectRef idx="1">
+            <a:schemeClr val="accent6"/>
+          </a:effectRef>
+          <a:fontRef idx="minor">
+            <a:schemeClr val="tx1"/>
+          </a:fontRef>
+        </p:style>
+      </p:cxnSp>
+      <p:cxnSp>
+        <p:nvCxnSpPr>
+          <p:cNvPr id="123" name="Straight Connector 15">
+            <a:extLst>
+              <a:ext uri="{FF2B5EF4-FFF2-40B4-BE49-F238E27FC236}">
+                <a16:creationId xmlns:a16="http://schemas.microsoft.com/office/drawing/2014/main" id="{F3F16143-F94E-F186-1426-C6D14A79BE2F}"/>
+              </a:ext>
+            </a:extLst>
+          </p:cNvPr>
+          <p:cNvCxnSpPr>
+            <a:cxnSpLocks/>
+            <a:stCxn id="90" idx="3"/>
+            <a:endCxn id="99" idx="1"/>
+          </p:cNvCxnSpPr>
+          <p:nvPr/>
+        </p:nvCxnSpPr>
+        <p:spPr>
+          <a:xfrm flipV="1">
+            <a:off x="5350423" y="3449628"/>
+            <a:ext cx="591073" cy="100204"/>
+          </a:xfrm>
+          <a:prstGeom prst="curvedConnector3">
+            <a:avLst>
+              <a:gd name="adj1" fmla="val 50000"/>
+            </a:avLst>
+          </a:prstGeom>
+          <a:ln>
+            <a:headEnd type="none" w="med" len="med"/>
+            <a:tailEnd type="triangle" w="med" len="med"/>
+          </a:ln>
+        </p:spPr>
+        <p:style>
+          <a:lnRef idx="2">
+            <a:schemeClr val="accent6"/>
+          </a:lnRef>
+          <a:fillRef idx="0">
+            <a:schemeClr val="accent6"/>
+          </a:fillRef>
+          <a:effectRef idx="1">
+            <a:schemeClr val="accent6"/>
+          </a:effectRef>
+          <a:fontRef idx="minor">
+            <a:schemeClr val="tx1"/>
+          </a:fontRef>
+        </p:style>
+      </p:cxnSp>
+      <p:cxnSp>
+        <p:nvCxnSpPr>
+          <p:cNvPr id="127" name="Straight Connector 15">
+            <a:extLst>
+              <a:ext uri="{FF2B5EF4-FFF2-40B4-BE49-F238E27FC236}">
+                <a16:creationId xmlns:a16="http://schemas.microsoft.com/office/drawing/2014/main" id="{6BEAB1C6-79A5-EEC9-1CB8-90DB182AB0B0}"/>
+              </a:ext>
+            </a:extLst>
+          </p:cNvPr>
+          <p:cNvCxnSpPr>
+            <a:cxnSpLocks/>
+            <a:stCxn id="29" idx="3"/>
+            <a:endCxn id="90" idx="1"/>
+          </p:cNvCxnSpPr>
+          <p:nvPr/>
+        </p:nvCxnSpPr>
+        <p:spPr>
+          <a:xfrm>
+            <a:off x="2032285" y="2907137"/>
+            <a:ext cx="1518138" cy="642695"/>
+          </a:xfrm>
+          <a:prstGeom prst="straightConnector1">
+            <a:avLst/>
+          </a:prstGeom>
+          <a:ln>
+            <a:headEnd type="none" w="med" len="med"/>
+            <a:tailEnd type="triangle" w="med" len="med"/>
+          </a:ln>
+        </p:spPr>
+        <p:style>
+          <a:lnRef idx="2">
+            <a:schemeClr val="accent6"/>
+          </a:lnRef>
+          <a:fillRef idx="0">
+            <a:schemeClr val="accent6"/>
+          </a:fillRef>
+          <a:effectRef idx="1">
+            <a:schemeClr val="accent6"/>
+          </a:effectRef>
+          <a:fontRef idx="minor">
+            <a:schemeClr val="tx1"/>
+          </a:fontRef>
+        </p:style>
+      </p:cxnSp>
+      <p:cxnSp>
+        <p:nvCxnSpPr>
+          <p:cNvPr id="130" name="Straight Connector 15">
+            <a:extLst>
+              <a:ext uri="{FF2B5EF4-FFF2-40B4-BE49-F238E27FC236}">
+                <a16:creationId xmlns:a16="http://schemas.microsoft.com/office/drawing/2014/main" id="{4C402B66-A4B5-90BA-5520-C7D82E6D7B02}"/>
+              </a:ext>
+            </a:extLst>
+          </p:cNvPr>
+          <p:cNvCxnSpPr>
+            <a:cxnSpLocks/>
+            <a:stCxn id="23" idx="3"/>
+            <a:endCxn id="101" idx="1"/>
+          </p:cNvCxnSpPr>
+          <p:nvPr/>
+        </p:nvCxnSpPr>
+        <p:spPr>
+          <a:xfrm>
+            <a:off x="1972021" y="2006040"/>
+            <a:ext cx="1458044" cy="608177"/>
+          </a:xfrm>
+          <a:prstGeom prst="straightConnector1">
+            <a:avLst/>
+          </a:prstGeom>
+          <a:ln>
+            <a:headEnd type="none" w="med" len="med"/>
+            <a:tailEnd type="triangle" w="med" len="med"/>
+          </a:ln>
+        </p:spPr>
+        <p:style>
+          <a:lnRef idx="2">
+            <a:schemeClr val="accent1"/>
+          </a:lnRef>
+          <a:fillRef idx="0">
+            <a:schemeClr val="accent1"/>
+          </a:fillRef>
+          <a:effectRef idx="1">
+            <a:schemeClr val="accent1"/>
+          </a:effectRef>
+          <a:fontRef idx="minor">
+            <a:schemeClr val="tx1"/>
+          </a:fontRef>
+        </p:style>
+      </p:cxnSp>
+      <p:sp>
+        <p:nvSpPr>
+          <p:cNvPr id="153" name="Rectangle: Rounded Corners 152">
+            <a:extLst>
+              <a:ext uri="{FF2B5EF4-FFF2-40B4-BE49-F238E27FC236}">
+                <a16:creationId xmlns:a16="http://schemas.microsoft.com/office/drawing/2014/main" id="{951C5EA6-0A49-BBDC-845E-FB1B6A6DD309}"/>
+              </a:ext>
+            </a:extLst>
+          </p:cNvPr>
+          <p:cNvSpPr/>
+          <p:nvPr/>
+        </p:nvSpPr>
+        <p:spPr>
+          <a:xfrm>
+            <a:off x="5998926" y="3331676"/>
+            <a:ext cx="972000" cy="180000"/>
+          </a:xfrm>
+          <a:prstGeom prst="roundRect">
+            <a:avLst/>
+          </a:prstGeom>
+        </p:spPr>
+        <p:style>
+          <a:lnRef idx="2">
+            <a:schemeClr val="dk1"/>
+          </a:lnRef>
+          <a:fillRef idx="1">
+            <a:schemeClr val="lt1"/>
+          </a:fillRef>
+          <a:effectRef idx="0">
+            <a:schemeClr val="dk1"/>
+          </a:effectRef>
+          <a:fontRef idx="minor">
+            <a:schemeClr val="dk1"/>
+          </a:fontRef>
+        </p:style>
+        <p:txBody>
+          <a:bodyPr lIns="0" tIns="0" rIns="0" bIns="0" rtlCol="0" anchor="ctr"/>
+          <a:lstStyle/>
+          <a:p>
+            <a:pPr algn="ctr"/>
+            <a:r>
+              <a:rPr lang="en-AU" sz="1200" dirty="0"/>
+              <a:t>Inference</a:t>
+            </a:r>
+          </a:p>
+        </p:txBody>
+      </p:sp>
+      <p:sp>
+        <p:nvSpPr>
+          <p:cNvPr id="154" name="Rectangle: Rounded Corners 153">
+            <a:extLst>
+              <a:ext uri="{FF2B5EF4-FFF2-40B4-BE49-F238E27FC236}">
+                <a16:creationId xmlns:a16="http://schemas.microsoft.com/office/drawing/2014/main" id="{7C2EED13-585E-0FF2-10B7-804E1E49C80A}"/>
+              </a:ext>
+            </a:extLst>
+          </p:cNvPr>
+          <p:cNvSpPr/>
+          <p:nvPr/>
+        </p:nvSpPr>
+        <p:spPr>
+          <a:xfrm>
+            <a:off x="5998926" y="3564330"/>
+            <a:ext cx="972000" cy="180000"/>
+          </a:xfrm>
+          <a:prstGeom prst="roundRect">
+            <a:avLst/>
+          </a:prstGeom>
+        </p:spPr>
+        <p:style>
+          <a:lnRef idx="2">
+            <a:schemeClr val="dk1"/>
+          </a:lnRef>
+          <a:fillRef idx="1">
+            <a:schemeClr val="lt1"/>
+          </a:fillRef>
+          <a:effectRef idx="0">
+            <a:schemeClr val="dk1"/>
+          </a:effectRef>
+          <a:fontRef idx="minor">
+            <a:schemeClr val="dk1"/>
+          </a:fontRef>
+        </p:style>
+        <p:txBody>
+          <a:bodyPr lIns="0" tIns="0" rIns="0" bIns="0" rtlCol="0" anchor="ctr"/>
+          <a:lstStyle/>
+          <a:p>
+            <a:pPr algn="ctr"/>
+            <a:r>
+              <a:rPr lang="en-AU" sz="1200" dirty="0"/>
+              <a:t>Fed Training</a:t>
+            </a:r>
+          </a:p>
+        </p:txBody>
+      </p:sp>
+      <p:sp>
+        <p:nvSpPr>
+          <p:cNvPr id="155" name="Rectangle: Rounded Corners 154">
+            <a:extLst>
+              <a:ext uri="{FF2B5EF4-FFF2-40B4-BE49-F238E27FC236}">
+                <a16:creationId xmlns:a16="http://schemas.microsoft.com/office/drawing/2014/main" id="{3917AD2E-3DFD-648F-6903-52BEBF1F5400}"/>
+              </a:ext>
+            </a:extLst>
+          </p:cNvPr>
+          <p:cNvSpPr/>
+          <p:nvPr/>
+        </p:nvSpPr>
+        <p:spPr>
+          <a:xfrm>
+            <a:off x="5998926" y="4222897"/>
+            <a:ext cx="972000" cy="180000"/>
+          </a:xfrm>
+          <a:prstGeom prst="roundRect">
+            <a:avLst/>
+          </a:prstGeom>
+        </p:spPr>
+        <p:style>
+          <a:lnRef idx="2">
+            <a:schemeClr val="dk1"/>
+          </a:lnRef>
+          <a:fillRef idx="1">
+            <a:schemeClr val="lt1"/>
+          </a:fillRef>
+          <a:effectRef idx="0">
+            <a:schemeClr val="dk1"/>
+          </a:effectRef>
+          <a:fontRef idx="minor">
+            <a:schemeClr val="dk1"/>
+          </a:fontRef>
+        </p:style>
+        <p:txBody>
+          <a:bodyPr lIns="0" tIns="0" rIns="0" bIns="0" rtlCol="0" anchor="ctr"/>
+          <a:lstStyle/>
+          <a:p>
+            <a:pPr algn="ctr"/>
+            <a:r>
+              <a:rPr lang="en-AU" sz="1200" dirty="0"/>
+              <a:t>Inference</a:t>
+            </a:r>
+          </a:p>
+        </p:txBody>
+      </p:sp>
+      <p:sp>
+        <p:nvSpPr>
+          <p:cNvPr id="156" name="Rectangle: Rounded Corners 155">
+            <a:extLst>
+              <a:ext uri="{FF2B5EF4-FFF2-40B4-BE49-F238E27FC236}">
+                <a16:creationId xmlns:a16="http://schemas.microsoft.com/office/drawing/2014/main" id="{394E347C-FDD1-3B3E-E857-7A5898000E30}"/>
+              </a:ext>
+            </a:extLst>
+          </p:cNvPr>
+          <p:cNvSpPr/>
+          <p:nvPr/>
+        </p:nvSpPr>
+        <p:spPr>
+          <a:xfrm>
+            <a:off x="5998926" y="4455551"/>
+            <a:ext cx="972000" cy="180000"/>
+          </a:xfrm>
+          <a:prstGeom prst="roundRect">
+            <a:avLst/>
+          </a:prstGeom>
+        </p:spPr>
+        <p:style>
+          <a:lnRef idx="2">
+            <a:schemeClr val="dk1"/>
+          </a:lnRef>
+          <a:fillRef idx="1">
+            <a:schemeClr val="lt1"/>
+          </a:fillRef>
+          <a:effectRef idx="0">
+            <a:schemeClr val="dk1"/>
+          </a:effectRef>
+          <a:fontRef idx="minor">
+            <a:schemeClr val="dk1"/>
+          </a:fontRef>
+        </p:style>
+        <p:txBody>
+          <a:bodyPr lIns="0" tIns="0" rIns="0" bIns="0" rtlCol="0" anchor="ctr"/>
+          <a:lstStyle/>
+          <a:p>
+            <a:pPr algn="ctr"/>
+            <a:r>
+              <a:rPr lang="en-AU" sz="1200" dirty="0"/>
+              <a:t>Fed Training</a:t>
+            </a:r>
+          </a:p>
+        </p:txBody>
+      </p:sp>
+      <p:sp>
+        <p:nvSpPr>
+          <p:cNvPr id="160" name="Content Placeholder 159">
+            <a:extLst>
+              <a:ext uri="{FF2B5EF4-FFF2-40B4-BE49-F238E27FC236}">
+                <a16:creationId xmlns:a16="http://schemas.microsoft.com/office/drawing/2014/main" id="{71B049E7-20C9-34A8-3D25-B1A55D6F482E}"/>
+              </a:ext>
+            </a:extLst>
+          </p:cNvPr>
+          <p:cNvSpPr>
+            <a:spLocks noGrp="1"/>
+          </p:cNvSpPr>
+          <p:nvPr>
+            <p:ph idx="1"/>
+          </p:nvPr>
+        </p:nvSpPr>
+        <p:spPr>
+          <a:xfrm>
+            <a:off x="7361873" y="856525"/>
+            <a:ext cx="4342447" cy="5320439"/>
+          </a:xfrm>
+        </p:spPr>
+        <p:txBody>
+          <a:bodyPr/>
+          <a:lstStyle/>
+          <a:p>
+            <a:endParaRPr lang="en-AU" dirty="0"/>
+          </a:p>
+        </p:txBody>
+      </p:sp>
+      <p:pic>
+        <p:nvPicPr>
+          <p:cNvPr id="161" name="Content Placeholder 26" descr="Car with solid fill">
+            <a:extLst>
+              <a:ext uri="{FF2B5EF4-FFF2-40B4-BE49-F238E27FC236}">
+                <a16:creationId xmlns:a16="http://schemas.microsoft.com/office/drawing/2014/main" id="{7A284C26-913A-9E67-A186-2B0D8EC1EEEE}"/>
+              </a:ext>
+            </a:extLst>
+          </p:cNvPr>
+          <p:cNvPicPr>
+            <a:picLocks noChangeAspect="1"/>
+          </p:cNvPicPr>
+          <p:nvPr/>
+        </p:nvPicPr>
+        <p:blipFill>
+          <a:blip>
+            <a:extLst>
+              <a:ext uri="{96DAC541-7B7A-43D3-8B79-37D633B846F1}">
+                <asvg:svgBlip xmlns:asvg="http://schemas.microsoft.com/office/drawing/2016/SVG/main" r:embed="rId6"/>
+              </a:ext>
+            </a:extLst>
+          </a:blip>
+          <a:srcRect t="27543" b="24109"/>
+          <a:stretch>
+            <a:fillRect/>
+          </a:stretch>
+        </p:blipFill>
+        <p:spPr>
+          <a:xfrm>
+            <a:off x="884885" y="2847787"/>
+            <a:ext cx="540000" cy="261079"/>
+          </a:xfrm>
+          <a:prstGeom prst="rect">
+            <a:avLst/>
+          </a:prstGeom>
+        </p:spPr>
+      </p:pic>
+      <p:sp>
+        <p:nvSpPr>
+          <p:cNvPr id="162" name="Rectangle 161">
+            <a:extLst>
+              <a:ext uri="{FF2B5EF4-FFF2-40B4-BE49-F238E27FC236}">
+                <a16:creationId xmlns:a16="http://schemas.microsoft.com/office/drawing/2014/main" id="{4D362451-2FAC-8FB0-86AC-7DEAE4D341DB}"/>
+              </a:ext>
+            </a:extLst>
+          </p:cNvPr>
+          <p:cNvSpPr/>
+          <p:nvPr/>
+        </p:nvSpPr>
+        <p:spPr>
+          <a:xfrm>
+            <a:off x="349889" y="5066402"/>
+            <a:ext cx="714590" cy="181217"/>
+          </a:xfrm>
+          <a:prstGeom prst="rect">
+            <a:avLst/>
+          </a:prstGeom>
+          <a:noFill/>
+          <a:ln>
+            <a:noFill/>
+          </a:ln>
+        </p:spPr>
+        <p:style>
+          <a:lnRef idx="2">
+            <a:schemeClr val="dk1"/>
+          </a:lnRef>
+          <a:fillRef idx="1">
+            <a:schemeClr val="lt1"/>
+          </a:fillRef>
+          <a:effectRef idx="0">
+            <a:schemeClr val="dk1"/>
+          </a:effectRef>
+          <a:fontRef idx="minor">
+            <a:schemeClr val="dk1"/>
+          </a:fontRef>
+        </p:style>
+        <p:txBody>
+          <a:bodyPr lIns="0" tIns="0" rIns="0" bIns="0" rtlCol="0" anchor="ctr"/>
+          <a:lstStyle/>
+          <a:p>
+            <a:pPr algn="ctr"/>
+            <a:r>
+              <a:rPr lang="en-AU" sz="1200" dirty="0"/>
+              <a:t>Events</a:t>
+            </a:r>
+          </a:p>
+        </p:txBody>
+      </p:sp>
+      <p:sp>
+        <p:nvSpPr>
+          <p:cNvPr id="163" name="Rectangle 162">
+            <a:extLst>
+              <a:ext uri="{FF2B5EF4-FFF2-40B4-BE49-F238E27FC236}">
+                <a16:creationId xmlns:a16="http://schemas.microsoft.com/office/drawing/2014/main" id="{70CCA0BC-1E50-A5C0-89AE-8C2CA0B82B20}"/>
+              </a:ext>
+            </a:extLst>
+          </p:cNvPr>
+          <p:cNvSpPr/>
+          <p:nvPr/>
+        </p:nvSpPr>
+        <p:spPr>
+          <a:xfrm>
+            <a:off x="2376960" y="5405503"/>
+            <a:ext cx="714590" cy="181217"/>
+          </a:xfrm>
+          <a:prstGeom prst="rect">
+            <a:avLst/>
+          </a:prstGeom>
+          <a:noFill/>
+          <a:ln>
+            <a:noFill/>
+          </a:ln>
+        </p:spPr>
+        <p:style>
+          <a:lnRef idx="2">
+            <a:schemeClr val="dk1"/>
+          </a:lnRef>
+          <a:fillRef idx="1">
+            <a:schemeClr val="lt1"/>
+          </a:fillRef>
+          <a:effectRef idx="0">
+            <a:schemeClr val="dk1"/>
+          </a:effectRef>
+          <a:fontRef idx="minor">
+            <a:schemeClr val="dk1"/>
+          </a:fontRef>
+        </p:style>
+        <p:txBody>
+          <a:bodyPr lIns="0" tIns="0" rIns="0" bIns="0" rtlCol="0" anchor="ctr"/>
+          <a:lstStyle/>
+          <a:p>
+            <a:pPr algn="ctr"/>
+            <a:r>
+              <a:rPr lang="en-AU" sz="1200" dirty="0"/>
+              <a:t>Events</a:t>
+            </a:r>
+          </a:p>
+        </p:txBody>
+      </p:sp>
+      <p:sp>
+        <p:nvSpPr>
+          <p:cNvPr id="164" name="Rectangle 163">
+            <a:extLst>
+              <a:ext uri="{FF2B5EF4-FFF2-40B4-BE49-F238E27FC236}">
+                <a16:creationId xmlns:a16="http://schemas.microsoft.com/office/drawing/2014/main" id="{75D6AAF4-26E7-7EDA-618A-3D42D7EC26C0}"/>
+              </a:ext>
+            </a:extLst>
+          </p:cNvPr>
+          <p:cNvSpPr/>
+          <p:nvPr/>
+        </p:nvSpPr>
+        <p:spPr>
+          <a:xfrm>
+            <a:off x="2416782" y="3956207"/>
+            <a:ext cx="714590" cy="181217"/>
+          </a:xfrm>
+          <a:prstGeom prst="rect">
+            <a:avLst/>
+          </a:prstGeom>
+          <a:noFill/>
+          <a:ln>
+            <a:noFill/>
+          </a:ln>
+        </p:spPr>
+        <p:style>
+          <a:lnRef idx="2">
+            <a:schemeClr val="dk1"/>
+          </a:lnRef>
+          <a:fillRef idx="1">
+            <a:schemeClr val="lt1"/>
+          </a:fillRef>
+          <a:effectRef idx="0">
+            <a:schemeClr val="dk1"/>
+          </a:effectRef>
+          <a:fontRef idx="minor">
+            <a:schemeClr val="dk1"/>
+          </a:fontRef>
+        </p:style>
+        <p:txBody>
+          <a:bodyPr lIns="0" tIns="0" rIns="0" bIns="0" rtlCol="0" anchor="ctr"/>
+          <a:lstStyle/>
+          <a:p>
+            <a:pPr algn="ctr"/>
+            <a:r>
+              <a:rPr lang="en-AU" sz="1200" dirty="0"/>
+              <a:t>Backup</a:t>
+            </a:r>
+          </a:p>
+        </p:txBody>
+      </p:sp>
+    </p:spTree>
+    <p:extLst>
+      <p:ext uri="{BB962C8B-B14F-4D97-AF65-F5344CB8AC3E}">
+        <p14:creationId xmlns:p14="http://schemas.microsoft.com/office/powerpoint/2010/main" val="4014313570"/>
       </p:ext>
     </p:extLst>
   </p:cSld>

--- a/Documentation/Corp Architecture Overview.pptx
+++ b/Documentation/Corp Architecture Overview.pptx
@@ -267,7 +267,7 @@
           <a:p>
             <a:fld id="{08306F49-376E-45A5-AD65-FD4D759E20F3}" type="datetimeFigureOut">
               <a:rPr lang="en-AU" smtClean="0"/>
-              <a:t>17/08/2026</a:t>
+              <a:t>18/08/2026</a:t>
             </a:fld>
             <a:endParaRPr lang="en-AU"/>
           </a:p>
@@ -467,7 +467,7 @@
           <a:p>
             <a:fld id="{08306F49-376E-45A5-AD65-FD4D759E20F3}" type="datetimeFigureOut">
               <a:rPr lang="en-AU" smtClean="0"/>
-              <a:t>17/08/2026</a:t>
+              <a:t>18/08/2026</a:t>
             </a:fld>
             <a:endParaRPr lang="en-AU"/>
           </a:p>
@@ -677,7 +677,7 @@
           <a:p>
             <a:fld id="{08306F49-376E-45A5-AD65-FD4D759E20F3}" type="datetimeFigureOut">
               <a:rPr lang="en-AU" smtClean="0"/>
-              <a:t>17/08/2026</a:t>
+              <a:t>18/08/2026</a:t>
             </a:fld>
             <a:endParaRPr lang="en-AU"/>
           </a:p>
@@ -887,7 +887,7 @@
           <a:p>
             <a:fld id="{08306F49-376E-45A5-AD65-FD4D759E20F3}" type="datetimeFigureOut">
               <a:rPr lang="en-AU" smtClean="0"/>
-              <a:t>17/08/2026</a:t>
+              <a:t>18/08/2026</a:t>
             </a:fld>
             <a:endParaRPr lang="en-AU"/>
           </a:p>
@@ -1179,7 +1179,7 @@
           <a:p>
             <a:fld id="{08306F49-376E-45A5-AD65-FD4D759E20F3}" type="datetimeFigureOut">
               <a:rPr lang="en-AU" smtClean="0"/>
-              <a:t>17/08/2026</a:t>
+              <a:t>18/08/2026</a:t>
             </a:fld>
             <a:endParaRPr lang="en-AU"/>
           </a:p>
@@ -1447,7 +1447,7 @@
           <a:p>
             <a:fld id="{08306F49-376E-45A5-AD65-FD4D759E20F3}" type="datetimeFigureOut">
               <a:rPr lang="en-AU" smtClean="0"/>
-              <a:t>17/08/2026</a:t>
+              <a:t>18/08/2026</a:t>
             </a:fld>
             <a:endParaRPr lang="en-AU"/>
           </a:p>
@@ -1862,7 +1862,7 @@
           <a:p>
             <a:fld id="{08306F49-376E-45A5-AD65-FD4D759E20F3}" type="datetimeFigureOut">
               <a:rPr lang="en-AU" smtClean="0"/>
-              <a:t>17/08/2026</a:t>
+              <a:t>18/08/2026</a:t>
             </a:fld>
             <a:endParaRPr lang="en-AU"/>
           </a:p>
@@ -2004,7 +2004,7 @@
           <a:p>
             <a:fld id="{08306F49-376E-45A5-AD65-FD4D759E20F3}" type="datetimeFigureOut">
               <a:rPr lang="en-AU" smtClean="0"/>
-              <a:t>17/08/2026</a:t>
+              <a:t>18/08/2026</a:t>
             </a:fld>
             <a:endParaRPr lang="en-AU"/>
           </a:p>
@@ -2117,7 +2117,7 @@
           <a:p>
             <a:fld id="{08306F49-376E-45A5-AD65-FD4D759E20F3}" type="datetimeFigureOut">
               <a:rPr lang="en-AU" smtClean="0"/>
-              <a:t>17/08/2026</a:t>
+              <a:t>18/08/2026</a:t>
             </a:fld>
             <a:endParaRPr lang="en-AU"/>
           </a:p>
@@ -2430,7 +2430,7 @@
           <a:p>
             <a:fld id="{08306F49-376E-45A5-AD65-FD4D759E20F3}" type="datetimeFigureOut">
               <a:rPr lang="en-AU" smtClean="0"/>
-              <a:t>17/08/2026</a:t>
+              <a:t>18/08/2026</a:t>
             </a:fld>
             <a:endParaRPr lang="en-AU"/>
           </a:p>
@@ -2719,7 +2719,7 @@
           <a:p>
             <a:fld id="{08306F49-376E-45A5-AD65-FD4D759E20F3}" type="datetimeFigureOut">
               <a:rPr lang="en-AU" smtClean="0"/>
-              <a:t>17/08/2026</a:t>
+              <a:t>18/08/2026</a:t>
             </a:fld>
             <a:endParaRPr lang="en-AU"/>
           </a:p>
@@ -2962,7 +2962,7 @@
           <a:p>
             <a:fld id="{08306F49-376E-45A5-AD65-FD4D759E20F3}" type="datetimeFigureOut">
               <a:rPr lang="en-AU" smtClean="0"/>
-              <a:t>17/08/2026</a:t>
+              <a:t>18/08/2026</a:t>
             </a:fld>
             <a:endParaRPr lang="en-AU"/>
           </a:p>
@@ -3797,7 +3797,7 @@
         </p:blipFill>
         <p:spPr>
           <a:xfrm>
-            <a:off x="312789" y="2639679"/>
+            <a:off x="312789" y="3072813"/>
             <a:ext cx="479426" cy="520701"/>
           </a:xfrm>
           <a:prstGeom prst="rect">
@@ -4062,8 +4062,8 @@
         </p:nvCxnSpPr>
         <p:spPr>
           <a:xfrm rot="16200000" flipH="1">
-            <a:off x="482204" y="3230677"/>
-            <a:ext cx="1245403" cy="1104807"/>
+            <a:off x="698771" y="3447244"/>
+            <a:ext cx="812269" cy="1104807"/>
           </a:xfrm>
           <a:prstGeom prst="curvedConnector2">
             <a:avLst/>
@@ -4339,8 +4339,8 @@
         </p:nvCxnSpPr>
         <p:spPr>
           <a:xfrm rot="16200000" flipH="1">
-            <a:off x="-297812" y="4010693"/>
-            <a:ext cx="2805434" cy="1104807"/>
+            <a:off x="-81245" y="4227260"/>
+            <a:ext cx="2372300" cy="1104807"/>
           </a:xfrm>
           <a:prstGeom prst="curvedConnector2">
             <a:avLst/>
@@ -4944,8 +4944,8 @@
         </p:nvSpPr>
         <p:spPr>
           <a:xfrm>
-            <a:off x="7235846" y="4117540"/>
-            <a:ext cx="837204" cy="504760"/>
+            <a:off x="7238208" y="3996711"/>
+            <a:ext cx="1054597" cy="504760"/>
           </a:xfrm>
           <a:prstGeom prst="rect">
             <a:avLst/>
@@ -4976,11 +4976,256 @@
             <a:pPr algn="ctr"/>
             <a:r>
               <a:rPr lang="en-AU" sz="1200" dirty="0"/>
-              <a:t>Add customer changes</a:t>
-            </a:r>
-          </a:p>
-        </p:txBody>
-      </p:sp>
+              <a:t>Customer adds specialisations</a:t>
+            </a:r>
+          </a:p>
+        </p:txBody>
+      </p:sp>
+      <p:sp>
+        <p:nvSpPr>
+          <p:cNvPr id="18" name="Rectangle 17">
+            <a:extLst>
+              <a:ext uri="{FF2B5EF4-FFF2-40B4-BE49-F238E27FC236}">
+                <a16:creationId xmlns:a16="http://schemas.microsoft.com/office/drawing/2014/main" id="{D6C842BF-1E14-88E2-9183-EEB72A81D152}"/>
+              </a:ext>
+            </a:extLst>
+          </p:cNvPr>
+          <p:cNvSpPr/>
+          <p:nvPr/>
+        </p:nvSpPr>
+        <p:spPr>
+          <a:xfrm>
+            <a:off x="102501" y="2486526"/>
+            <a:ext cx="900000" cy="461442"/>
+          </a:xfrm>
+          <a:prstGeom prst="rect">
+            <a:avLst/>
+          </a:prstGeom>
+          <a:noFill/>
+          <a:ln>
+            <a:noFill/>
+          </a:ln>
+        </p:spPr>
+        <p:style>
+          <a:lnRef idx="2">
+            <a:schemeClr val="dk1"/>
+          </a:lnRef>
+          <a:fillRef idx="1">
+            <a:schemeClr val="lt1"/>
+          </a:fillRef>
+          <a:effectRef idx="0">
+            <a:schemeClr val="dk1"/>
+          </a:effectRef>
+          <a:fontRef idx="minor">
+            <a:schemeClr val="dk1"/>
+          </a:fontRef>
+        </p:style>
+        <p:txBody>
+          <a:bodyPr lIns="0" tIns="0" rIns="0" bIns="0" rtlCol="0" anchor="ctr"/>
+          <a:lstStyle/>
+          <a:p>
+            <a:pPr algn="ctr"/>
+            <a:r>
+              <a:rPr lang="en-AU" sz="1200" dirty="0"/>
+              <a:t>Organisation level Technician</a:t>
+            </a:r>
+          </a:p>
+        </p:txBody>
+      </p:sp>
+      <p:sp>
+        <p:nvSpPr>
+          <p:cNvPr id="28" name="Rectangle 27">
+            <a:extLst>
+              <a:ext uri="{FF2B5EF4-FFF2-40B4-BE49-F238E27FC236}">
+                <a16:creationId xmlns:a16="http://schemas.microsoft.com/office/drawing/2014/main" id="{28CB8AC7-ED8F-465E-25E1-DF5F2CA3F010}"/>
+              </a:ext>
+            </a:extLst>
+          </p:cNvPr>
+          <p:cNvSpPr/>
+          <p:nvPr/>
+        </p:nvSpPr>
+        <p:spPr>
+          <a:xfrm>
+            <a:off x="1031733" y="5397283"/>
+            <a:ext cx="595093" cy="264618"/>
+          </a:xfrm>
+          <a:prstGeom prst="rect">
+            <a:avLst/>
+          </a:prstGeom>
+          <a:noFill/>
+          <a:ln>
+            <a:noFill/>
+          </a:ln>
+        </p:spPr>
+        <p:style>
+          <a:lnRef idx="2">
+            <a:schemeClr val="dk1"/>
+          </a:lnRef>
+          <a:fillRef idx="1">
+            <a:schemeClr val="lt1"/>
+          </a:fillRef>
+          <a:effectRef idx="0">
+            <a:schemeClr val="dk1"/>
+          </a:effectRef>
+          <a:fontRef idx="minor">
+            <a:schemeClr val="dk1"/>
+          </a:fontRef>
+        </p:style>
+        <p:txBody>
+          <a:bodyPr lIns="0" tIns="0" rIns="0" bIns="0" rtlCol="0" anchor="ctr"/>
+          <a:lstStyle/>
+          <a:p>
+            <a:pPr algn="ctr"/>
+            <a:r>
+              <a:rPr lang="en-AU" sz="1200" dirty="0"/>
+              <a:t>Deploy #95</a:t>
+            </a:r>
+          </a:p>
+        </p:txBody>
+      </p:sp>
+      <p:sp>
+        <p:nvSpPr>
+          <p:cNvPr id="30" name="Rectangle 29">
+            <a:extLst>
+              <a:ext uri="{FF2B5EF4-FFF2-40B4-BE49-F238E27FC236}">
+                <a16:creationId xmlns:a16="http://schemas.microsoft.com/office/drawing/2014/main" id="{CDB9701A-55C7-DD15-EC87-31D6B71CFBB5}"/>
+              </a:ext>
+            </a:extLst>
+          </p:cNvPr>
+          <p:cNvSpPr/>
+          <p:nvPr/>
+        </p:nvSpPr>
+        <p:spPr>
+          <a:xfrm>
+            <a:off x="197122" y="6131085"/>
+            <a:ext cx="987065" cy="461442"/>
+          </a:xfrm>
+          <a:prstGeom prst="rect">
+            <a:avLst/>
+          </a:prstGeom>
+          <a:noFill/>
+          <a:ln>
+            <a:noFill/>
+          </a:ln>
+        </p:spPr>
+        <p:style>
+          <a:lnRef idx="2">
+            <a:schemeClr val="dk1"/>
+          </a:lnRef>
+          <a:fillRef idx="1">
+            <a:schemeClr val="lt1"/>
+          </a:fillRef>
+          <a:effectRef idx="0">
+            <a:schemeClr val="dk1"/>
+          </a:effectRef>
+          <a:fontRef idx="minor">
+            <a:schemeClr val="dk1"/>
+          </a:fontRef>
+        </p:style>
+        <p:txBody>
+          <a:bodyPr lIns="0" tIns="0" rIns="0" bIns="0" rtlCol="0" anchor="ctr"/>
+          <a:lstStyle/>
+          <a:p>
+            <a:pPr algn="ctr"/>
+            <a:r>
+              <a:rPr lang="en-AU" sz="1200" dirty="0"/>
+              <a:t>Approve Deployment #95</a:t>
+            </a:r>
+          </a:p>
+        </p:txBody>
+      </p:sp>
+      <p:cxnSp>
+        <p:nvCxnSpPr>
+          <p:cNvPr id="32" name="Connector: Elbow 31">
+            <a:extLst>
+              <a:ext uri="{FF2B5EF4-FFF2-40B4-BE49-F238E27FC236}">
+                <a16:creationId xmlns:a16="http://schemas.microsoft.com/office/drawing/2014/main" id="{F51D9240-9055-7D5B-43A3-A8BAF50DF7E4}"/>
+              </a:ext>
+            </a:extLst>
+          </p:cNvPr>
+          <p:cNvCxnSpPr>
+            <a:cxnSpLocks/>
+            <a:stCxn id="5" idx="1"/>
+            <a:endCxn id="72" idx="2"/>
+          </p:cNvCxnSpPr>
+          <p:nvPr/>
+        </p:nvCxnSpPr>
+        <p:spPr>
+          <a:xfrm rot="10800000" flipH="1" flipV="1">
+            <a:off x="312788" y="3333163"/>
+            <a:ext cx="5787689" cy="2724753"/>
+          </a:xfrm>
+          <a:prstGeom prst="bentConnector4">
+            <a:avLst>
+              <a:gd name="adj1" fmla="val -3950"/>
+              <a:gd name="adj2" fmla="val 123992"/>
+            </a:avLst>
+          </a:prstGeom>
+          <a:ln>
+            <a:tailEnd type="triangle"/>
+          </a:ln>
+        </p:spPr>
+        <p:style>
+          <a:lnRef idx="2">
+            <a:schemeClr val="accent2"/>
+          </a:lnRef>
+          <a:fillRef idx="0">
+            <a:schemeClr val="accent2"/>
+          </a:fillRef>
+          <a:effectRef idx="1">
+            <a:schemeClr val="accent2"/>
+          </a:effectRef>
+          <a:fontRef idx="minor">
+            <a:schemeClr val="tx1"/>
+          </a:fontRef>
+        </p:style>
+      </p:cxnSp>
+      <p:cxnSp>
+        <p:nvCxnSpPr>
+          <p:cNvPr id="40" name="Connector: Elbow 39">
+            <a:extLst>
+              <a:ext uri="{FF2B5EF4-FFF2-40B4-BE49-F238E27FC236}">
+                <a16:creationId xmlns:a16="http://schemas.microsoft.com/office/drawing/2014/main" id="{7CF9E605-4607-D4D3-E7E3-F00C93BB99F0}"/>
+              </a:ext>
+            </a:extLst>
+          </p:cNvPr>
+          <p:cNvCxnSpPr>
+            <a:cxnSpLocks/>
+            <a:stCxn id="5" idx="1"/>
+            <a:endCxn id="73" idx="2"/>
+          </p:cNvCxnSpPr>
+          <p:nvPr/>
+        </p:nvCxnSpPr>
+        <p:spPr>
+          <a:xfrm rot="10800000" flipH="1" flipV="1">
+            <a:off x="312788" y="3333163"/>
+            <a:ext cx="7760261" cy="2724753"/>
+          </a:xfrm>
+          <a:prstGeom prst="bentConnector4">
+            <a:avLst>
+              <a:gd name="adj1" fmla="val -2946"/>
+              <a:gd name="adj2" fmla="val 123698"/>
+            </a:avLst>
+          </a:prstGeom>
+          <a:ln>
+            <a:tailEnd type="triangle"/>
+          </a:ln>
+        </p:spPr>
+        <p:style>
+          <a:lnRef idx="2">
+            <a:schemeClr val="accent2"/>
+          </a:lnRef>
+          <a:fillRef idx="0">
+            <a:schemeClr val="accent2"/>
+          </a:fillRef>
+          <a:effectRef idx="1">
+            <a:schemeClr val="accent2"/>
+          </a:effectRef>
+          <a:fontRef idx="minor">
+            <a:schemeClr val="tx1"/>
+          </a:fontRef>
+        </p:style>
+      </p:cxnSp>
     </p:spTree>
     <p:extLst>
       <p:ext uri="{BB962C8B-B14F-4D97-AF65-F5344CB8AC3E}">
